--- a/output/wordlabs-ad-prefix-3day.pptx
+++ b/output/wordlabs-ad-prefix-3day.pptx
@@ -4240,7 +4240,7 @@
                 <a:ea typeface="Calibri" pitchFamily="34" charset="-122"/>
                 <a:cs typeface="Calibri" pitchFamily="34" charset="-120"/>
               </a:rPr>
-              <a:t>"to, towards, near"</a:t>
+              <a:t>"to, toward, near"</a:t>
             </a:r>
             <a:endParaRPr lang="en-US" sz="2200" dirty="0"/>
           </a:p>
@@ -5288,7 +5288,7 @@
                 <a:ea typeface="Calibri" pitchFamily="34" charset="-122"/>
                 <a:cs typeface="Calibri" pitchFamily="34" charset="-120"/>
               </a:rPr>
-              <a:t>Word Labs  •  wordlabs.app  •  Prefix: 'ad-' = to, towards, near</a:t>
+              <a:t>Word Labs  •  wordlabs.app  •  Prefix: 'ad-' = to, toward, near</a:t>
             </a:r>
             <a:endParaRPr lang="en-US" sz="800" dirty="0"/>
           </a:p>
@@ -5928,7 +5928,7 @@
                 <a:ea typeface="Calibri" pitchFamily="34" charset="-122"/>
                 <a:cs typeface="Calibri" pitchFamily="34" charset="-120"/>
               </a:rPr>
-              <a:t>Word Labs  •  wordlabs.app  •  Prefix: 'ad-' = to, towards, near</a:t>
+              <a:t>Word Labs  •  wordlabs.app  •  Prefix: 'ad-' = to, toward, near</a:t>
             </a:r>
             <a:endParaRPr lang="en-US" sz="800" dirty="0"/>
           </a:p>
@@ -6040,7 +6040,7 @@
                 <a:ea typeface="Calibri" pitchFamily="34" charset="-122"/>
                 <a:cs typeface="Calibri" pitchFamily="34" charset="-120"/>
               </a:rPr>
-              <a:t>We had to </a:t>
+              <a:t>We need to </a:t>
             </a:r>
             <a:pPr algn="l" indent="0" marL="0">
               <a:buNone/>
@@ -6071,7 +6071,7 @@
                 <a:ea typeface="Calibri" pitchFamily="34" charset="-122"/>
                 <a:cs typeface="Calibri" pitchFamily="34" charset="-120"/>
               </a:rPr>
-              <a:t> our plans before the big </a:t>
+              <a:t> our plan so we can </a:t>
             </a:r>
             <a:pPr algn="l" indent="0" marL="0">
               <a:buNone/>
@@ -6088,7 +6088,7 @@
                 <a:ea typeface="Calibri" pitchFamily="34" charset="-122"/>
                 <a:cs typeface="Calibri" pitchFamily="34" charset="-120"/>
               </a:rPr>
-              <a:t>adventure</a:t>
+              <a:t>advance</a:t>
             </a:r>
             <a:pPr algn="l" indent="0" marL="0">
               <a:buNone/>
@@ -6102,7 +6102,7 @@
                 <a:ea typeface="Calibri" pitchFamily="34" charset="-122"/>
                 <a:cs typeface="Calibri" pitchFamily="34" charset="-120"/>
               </a:rPr>
-              <a:t> began.</a:t>
+              <a:t> to the next level.</a:t>
             </a:r>
             <a:endParaRPr lang="en-US" sz="1800" dirty="0"/>
           </a:p>
@@ -6385,7 +6385,7 @@
                 <a:ea typeface="Trebuchet MS" pitchFamily="34" charset="-122"/>
                 <a:cs typeface="Trebuchet MS" pitchFamily="34" charset="-120"/>
               </a:rPr>
-              <a:t>adventure</a:t>
+              <a:t>advance</a:t>
             </a:r>
             <a:endParaRPr lang="en-US" sz="1400" dirty="0"/>
           </a:p>
@@ -6716,7 +6716,7 @@
                 <a:ea typeface="Calibri" pitchFamily="34" charset="-122"/>
                 <a:cs typeface="Calibri" pitchFamily="34" charset="-120"/>
               </a:rPr>
-              <a:t>Word Labs  •  wordlabs.app  •  Prefix: 'ad-' = to, towards, near</a:t>
+              <a:t>Word Labs  •  wordlabs.app  •  Prefix: 'ad-' = to, toward, near</a:t>
             </a:r>
             <a:endParaRPr lang="en-US" sz="800" dirty="0"/>
           </a:p>
@@ -7543,7 +7543,7 @@
                 <a:ea typeface="Calibri" pitchFamily="34" charset="-122"/>
                 <a:cs typeface="Calibri" pitchFamily="34" charset="-120"/>
               </a:rPr>
-              <a:t>Word Labs  •  wordlabs.app  •  Prefix: 'ad-' = to, towards, near</a:t>
+              <a:t>Word Labs  •  wordlabs.app  •  Prefix: 'ad-' = to, toward, near</a:t>
             </a:r>
             <a:endParaRPr lang="en-US" sz="800" dirty="0"/>
           </a:p>
@@ -7860,7 +7860,7 @@
                 <a:ea typeface="Calibri" pitchFamily="34" charset="-122"/>
                 <a:cs typeface="Calibri" pitchFamily="34" charset="-120"/>
               </a:rPr>
-              <a:t>to, towards</a:t>
+              <a:t>toward</a:t>
             </a:r>
             <a:endParaRPr lang="en-US" sz="850" dirty="0"/>
           </a:p>
@@ -7972,7 +7972,7 @@
                 <a:ea typeface="Calibri" pitchFamily="34" charset="-122"/>
                 <a:cs typeface="Calibri" pitchFamily="34" charset="-120"/>
               </a:rPr>
-              <a:t>correct, right</a:t>
+              <a:t>near, correct</a:t>
             </a:r>
             <a:endParaRPr lang="en-US" sz="850" dirty="0"/>
           </a:p>
@@ -8528,7 +8528,7 @@
                 <a:ea typeface="Calibri" pitchFamily="34" charset="-122"/>
                 <a:cs typeface="Calibri" pitchFamily="34" charset="-120"/>
               </a:rPr>
-              <a:t>Word Labs  •  wordlabs.app  •  Prefix: 'ad-' = to, towards, near</a:t>
+              <a:t>Word Labs  •  wordlabs.app  •  Prefix: 'ad-' = to, toward, near</a:t>
             </a:r>
             <a:endParaRPr lang="en-US" sz="800" dirty="0"/>
           </a:p>
@@ -8845,7 +8845,7 @@
                 <a:ea typeface="Calibri" pitchFamily="34" charset="-122"/>
                 <a:cs typeface="Calibri" pitchFamily="34" charset="-120"/>
               </a:rPr>
-              <a:t>to, towards</a:t>
+              <a:t>toward</a:t>
             </a:r>
             <a:endParaRPr lang="en-US" sz="850" dirty="0"/>
           </a:p>
@@ -8957,7 +8957,7 @@
                 <a:ea typeface="Calibri" pitchFamily="34" charset="-122"/>
                 <a:cs typeface="Calibri" pitchFamily="34" charset="-120"/>
               </a:rPr>
-              <a:t>correct, right</a:t>
+              <a:t>near, correct</a:t>
             </a:r>
             <a:endParaRPr lang="en-US" sz="850" dirty="0"/>
           </a:p>
@@ -9645,7 +9645,7 @@
                 <a:ea typeface="Calibri" pitchFamily="34" charset="-122"/>
                 <a:cs typeface="Calibri" pitchFamily="34" charset="-120"/>
               </a:rPr>
-              <a:t>Word Labs  •  wordlabs.app  •  Prefix: 'ad-' = to, towards, near</a:t>
+              <a:t>Word Labs  •  wordlabs.app  •  Prefix: 'ad-' = to, toward, near</a:t>
             </a:r>
             <a:endParaRPr lang="en-US" sz="800" dirty="0"/>
           </a:p>
@@ -9962,7 +9962,7 @@
                 <a:ea typeface="Calibri" pitchFamily="34" charset="-122"/>
                 <a:cs typeface="Calibri" pitchFamily="34" charset="-120"/>
               </a:rPr>
-              <a:t>to, towards</a:t>
+              <a:t>toward</a:t>
             </a:r>
             <a:endParaRPr lang="en-US" sz="850" dirty="0"/>
           </a:p>
@@ -10074,7 +10074,7 @@
                 <a:ea typeface="Calibri" pitchFamily="34" charset="-122"/>
                 <a:cs typeface="Calibri" pitchFamily="34" charset="-120"/>
               </a:rPr>
-              <a:t>correct, right</a:t>
+              <a:t>near, correct</a:t>
             </a:r>
             <a:endParaRPr lang="en-US" sz="850" dirty="0"/>
           </a:p>
@@ -11119,7 +11119,7 @@
                 <a:ea typeface="Calibri" pitchFamily="34" charset="-122"/>
                 <a:cs typeface="Calibri" pitchFamily="34" charset="-120"/>
               </a:rPr>
-              <a:t>Word Labs  •  wordlabs.app  •  Prefix: 'ad-' = to, towards, near</a:t>
+              <a:t>Word Labs  •  wordlabs.app  •  Prefix: 'ad-' = to, toward, near</a:t>
             </a:r>
             <a:endParaRPr lang="en-US" sz="800" dirty="0"/>
           </a:p>
@@ -11258,7 +11258,7 @@
                 <a:ea typeface="Trebuchet MS" pitchFamily="34" charset="-122"/>
                 <a:cs typeface="Trebuchet MS" pitchFamily="34" charset="-120"/>
               </a:rPr>
-              <a:t>adventure</a:t>
+              <a:t>advance</a:t>
             </a:r>
             <a:endParaRPr lang="en-US" sz="2800" dirty="0"/>
           </a:p>
@@ -11946,7 +11946,7 @@
                 <a:ea typeface="Calibri" pitchFamily="34" charset="-122"/>
                 <a:cs typeface="Calibri" pitchFamily="34" charset="-120"/>
               </a:rPr>
-              <a:t>Word Labs  •  wordlabs.app  •  Prefix: 'ad-' = to, towards, near</a:t>
+              <a:t>Word Labs  •  wordlabs.app  •  Prefix: 'ad-' = to, toward, near</a:t>
             </a:r>
             <a:endParaRPr lang="en-US" sz="800" dirty="0"/>
           </a:p>
@@ -12085,7 +12085,7 @@
                 <a:ea typeface="Trebuchet MS" pitchFamily="34" charset="-122"/>
                 <a:cs typeface="Trebuchet MS" pitchFamily="34" charset="-120"/>
               </a:rPr>
-              <a:t>adventure</a:t>
+              <a:t>advance</a:t>
             </a:r>
             <a:endParaRPr lang="en-US" sz="2800" dirty="0"/>
           </a:p>
@@ -12165,7 +12165,7 @@
         </p:nvSpPr>
         <p:spPr>
           <a:xfrm>
-            <a:off x="2221992" y="2258568"/>
+            <a:off x="2938272" y="2258568"/>
             <a:ext cx="1828800" cy="292608"/>
           </a:xfrm>
           <a:prstGeom prst="rect">
@@ -12199,7 +12199,7 @@
         </p:nvSpPr>
         <p:spPr>
           <a:xfrm>
-            <a:off x="2221992" y="2258568"/>
+            <a:off x="2938272" y="2258568"/>
             <a:ext cx="1828800" cy="292608"/>
           </a:xfrm>
           <a:prstGeom prst="rect">
@@ -12238,7 +12238,7 @@
         </p:nvSpPr>
         <p:spPr>
           <a:xfrm>
-            <a:off x="2221992" y="2569464"/>
+            <a:off x="2938272" y="2569464"/>
             <a:ext cx="1828800" cy="201168"/>
           </a:xfrm>
           <a:prstGeom prst="rect">
@@ -12263,7 +12263,7 @@
                 <a:ea typeface="Calibri" pitchFamily="34" charset="-122"/>
                 <a:cs typeface="Calibri" pitchFamily="34" charset="-120"/>
               </a:rPr>
-              <a:t>to, towards</a:t>
+              <a:t>toward</a:t>
             </a:r>
             <a:endParaRPr lang="en-US" sz="850" dirty="0"/>
           </a:p>
@@ -12277,7 +12277,7 @@
         </p:nvSpPr>
         <p:spPr>
           <a:xfrm>
-            <a:off x="4370832" y="2258568"/>
+            <a:off x="5803392" y="2258568"/>
             <a:ext cx="1828800" cy="292608"/>
           </a:xfrm>
           <a:prstGeom prst="rect">
@@ -12311,7 +12311,7 @@
         </p:nvSpPr>
         <p:spPr>
           <a:xfrm>
-            <a:off x="4370832" y="2258568"/>
+            <a:off x="5803392" y="2258568"/>
             <a:ext cx="1828800" cy="292608"/>
           </a:xfrm>
           <a:prstGeom prst="rect">
@@ -12336,7 +12336,7 @@
                 <a:ea typeface="Trebuchet MS" pitchFamily="34" charset="-122"/>
                 <a:cs typeface="Trebuchet MS" pitchFamily="34" charset="-120"/>
               </a:rPr>
-              <a:t>vent</a:t>
+              <a:t>vance</a:t>
             </a:r>
             <a:endParaRPr lang="en-US" sz="1300" dirty="0"/>
           </a:p>
@@ -12350,7 +12350,7 @@
         </p:nvSpPr>
         <p:spPr>
           <a:xfrm>
-            <a:off x="4370832" y="2569464"/>
+            <a:off x="5803392" y="2569464"/>
             <a:ext cx="1828800" cy="201168"/>
           </a:xfrm>
           <a:prstGeom prst="rect">
@@ -12375,7 +12375,7 @@
                 <a:ea typeface="Calibri" pitchFamily="34" charset="-122"/>
                 <a:cs typeface="Calibri" pitchFamily="34" charset="-120"/>
               </a:rPr>
-              <a:t>come</a:t>
+              <a:t>go forward</a:t>
             </a:r>
             <a:endParaRPr lang="en-US" sz="850" dirty="0"/>
           </a:p>
@@ -12389,30 +12389,23 @@
         </p:nvSpPr>
         <p:spPr>
           <a:xfrm>
-            <a:off x="6519672" y="2258568"/>
-            <a:ext cx="1828800" cy="292608"/>
+            <a:off x="365760" y="3273552"/>
+            <a:ext cx="1371600" cy="658368"/>
           </a:xfrm>
           <a:prstGeom prst="rect">
             <a:avLst>
-              <a:gd name="adj" fmla="val 25000"/>
+              <a:gd name="adj" fmla="val 8333"/>
             </a:avLst>
           </a:prstGeom>
           <a:solidFill>
-            <a:srgbClr val="FCE7F3"/>
-          </a:solidFill>
-          <a:ln w="19050">
-            <a:solidFill>
-              <a:srgbClr val="DB2777"/>
-            </a:solidFill>
-            <a:prstDash val="solid"/>
-          </a:ln>
-          <a:effectLst>
-            <a:outerShdw sx="100000" sy="100000" kx="0" ky="0" algn="bl" rotWithShape="0" blurRad="101600" dist="38100" dir="8100000">
-              <a:srgbClr val="000000">
-                <a:alpha val="12000"/>
-              </a:srgbClr>
-            </a:outerShdw>
-          </a:effectLst>
+            <a:srgbClr val="E2E8F0"/>
+          </a:solidFill>
+          <a:ln w="12700">
+            <a:solidFill>
+              <a:srgbClr val="E2E8F0"/>
+            </a:solidFill>
+            <a:prstDash val="solid"/>
+          </a:ln>
         </p:spPr>
       </p:sp>
       <p:sp>
@@ -12423,8 +12416,8 @@
         </p:nvSpPr>
         <p:spPr>
           <a:xfrm>
-            <a:off x="6519672" y="2258568"/>
-            <a:ext cx="1828800" cy="292608"/>
+            <a:off x="365760" y="3273552"/>
+            <a:ext cx="1371600" cy="658368"/>
           </a:xfrm>
           <a:prstGeom prst="rect">
             <a:avLst/>
@@ -12440,73 +12433,100 @@
               <a:buNone/>
             </a:pPr>
             <a:r>
-              <a:rPr lang="en-US" sz="1300" b="1" dirty="0">
-                <a:solidFill>
-                  <a:srgbClr val="9D174D"/>
+              <a:rPr lang="en-US" sz="1100" b="1" dirty="0">
+                <a:solidFill>
+                  <a:srgbClr val="475569"/>
                 </a:solidFill>
                 <a:latin typeface="Trebuchet MS" pitchFamily="34" charset="0"/>
                 <a:ea typeface="Trebuchet MS" pitchFamily="34" charset="-122"/>
                 <a:cs typeface="Trebuchet MS" pitchFamily="34" charset="-120"/>
               </a:rPr>
-              <a:t>ure</a:t>
-            </a:r>
-            <a:endParaRPr lang="en-US" sz="1300" dirty="0"/>
-          </a:p>
-        </p:txBody>
-      </p:sp>
-      <p:sp>
-        <p:nvSpPr>
-          <p:cNvPr id="24" name="Text 22"/>
-          <p:cNvSpPr/>
-          <p:nvPr/>
-        </p:nvSpPr>
-        <p:spPr>
-          <a:xfrm>
-            <a:off x="6519672" y="2569464"/>
-            <a:ext cx="1828800" cy="201168"/>
-          </a:xfrm>
-          <a:prstGeom prst="rect">
-            <a:avLst/>
-          </a:prstGeom>
-          <a:noFill/>
-          <a:ln/>
-        </p:spPr>
-        <p:txBody>
-          <a:bodyPr wrap="square" lIns="0" tIns="0" rIns="0" bIns="0" rtlCol="0" anchor="t"/>
-          <a:lstStyle/>
-          <a:p>
-            <a:pPr algn="ctr" indent="0" marL="0">
-              <a:buNone/>
-            </a:pPr>
-            <a:r>
-              <a:rPr lang="en-US" sz="850" dirty="0">
-                <a:solidFill>
-                  <a:srgbClr val="475569"/>
+              <a:t>Syllables</a:t>
+            </a:r>
+            <a:endParaRPr lang="en-US" sz="1100" dirty="0"/>
+          </a:p>
+        </p:txBody>
+      </p:sp>
+      <p:sp>
+        <p:nvSpPr>
+          <p:cNvPr id="24" name="Shape 22"/>
+          <p:cNvSpPr/>
+          <p:nvPr/>
+        </p:nvSpPr>
+        <p:spPr>
+          <a:xfrm>
+            <a:off x="1874520" y="3273552"/>
+            <a:ext cx="6903720" cy="658368"/>
+          </a:xfrm>
+          <a:prstGeom prst="rect">
+            <a:avLst>
+              <a:gd name="adj" fmla="val 8333"/>
+            </a:avLst>
+          </a:prstGeom>
+          <a:solidFill>
+            <a:srgbClr val="F8FAFC"/>
+          </a:solidFill>
+          <a:ln w="12700">
+            <a:solidFill>
+              <a:srgbClr val="E2E8F0"/>
+            </a:solidFill>
+            <a:prstDash val="dash"/>
+          </a:ln>
+        </p:spPr>
+      </p:sp>
+      <p:sp>
+        <p:nvSpPr>
+          <p:cNvPr id="25" name="Text 23"/>
+          <p:cNvSpPr/>
+          <p:nvPr/>
+        </p:nvSpPr>
+        <p:spPr>
+          <a:xfrm>
+            <a:off x="1874520" y="3273552"/>
+            <a:ext cx="6903720" cy="658368"/>
+          </a:xfrm>
+          <a:prstGeom prst="rect">
+            <a:avLst/>
+          </a:prstGeom>
+          <a:noFill/>
+          <a:ln/>
+        </p:spPr>
+        <p:txBody>
+          <a:bodyPr wrap="square" rtlCol="0" anchor="ctr"/>
+          <a:lstStyle/>
+          <a:p>
+            <a:pPr algn="ctr" indent="0" marL="0">
+              <a:buNone/>
+            </a:pPr>
+            <a:r>
+              <a:rPr lang="en-US" sz="1100" i="1" dirty="0">
+                <a:solidFill>
+                  <a:srgbClr val="CBD5E1"/>
                 </a:solidFill>
                 <a:latin typeface="Calibri" pitchFamily="34" charset="0"/>
                 <a:ea typeface="Calibri" pitchFamily="34" charset="-122"/>
                 <a:cs typeface="Calibri" pitchFamily="34" charset="-120"/>
               </a:rPr>
-              <a:t>state or result of</a:t>
-            </a:r>
-            <a:endParaRPr lang="en-US" sz="850" dirty="0"/>
-          </a:p>
-        </p:txBody>
-      </p:sp>
-      <p:sp>
-        <p:nvSpPr>
-          <p:cNvPr id="25" name="Shape 23"/>
-          <p:cNvSpPr/>
-          <p:nvPr/>
-        </p:nvSpPr>
-        <p:spPr>
-          <a:xfrm>
-            <a:off x="365760" y="3273552"/>
-            <a:ext cx="1371600" cy="658368"/>
+              <a:t>Write here...</a:t>
+            </a:r>
+            <a:endParaRPr lang="en-US" sz="1100" dirty="0"/>
+          </a:p>
+        </p:txBody>
+      </p:sp>
+      <p:sp>
+        <p:nvSpPr>
+          <p:cNvPr id="26" name="Shape 24"/>
+          <p:cNvSpPr/>
+          <p:nvPr/>
+        </p:nvSpPr>
+        <p:spPr>
+          <a:xfrm>
+            <a:off x="365760" y="4096512"/>
+            <a:ext cx="1371600" cy="804672"/>
           </a:xfrm>
           <a:prstGeom prst="rect">
             <a:avLst>
-              <a:gd name="adj" fmla="val 8333"/>
+              <a:gd name="adj" fmla="val 6818"/>
             </a:avLst>
           </a:prstGeom>
           <a:solidFill>
@@ -12522,14 +12542,14 @@
       </p:sp>
       <p:sp>
         <p:nvSpPr>
-          <p:cNvPr id="26" name="Text 24"/>
-          <p:cNvSpPr/>
-          <p:nvPr/>
-        </p:nvSpPr>
-        <p:spPr>
-          <a:xfrm>
-            <a:off x="365760" y="3273552"/>
-            <a:ext cx="1371600" cy="658368"/>
+          <p:cNvPr id="27" name="Text 25"/>
+          <p:cNvSpPr/>
+          <p:nvPr/>
+        </p:nvSpPr>
+        <p:spPr>
+          <a:xfrm>
+            <a:off x="365760" y="4096512"/>
+            <a:ext cx="1371600" cy="804672"/>
           </a:xfrm>
           <a:prstGeom prst="rect">
             <a:avLst/>
@@ -12553,7 +12573,7 @@
                 <a:ea typeface="Trebuchet MS" pitchFamily="34" charset="-122"/>
                 <a:cs typeface="Trebuchet MS" pitchFamily="34" charset="-120"/>
               </a:rPr>
-              <a:t>Syllables</a:t>
+              <a:t>Phonemes</a:t>
             </a:r>
             <a:endParaRPr lang="en-US" sz="1100" dirty="0"/>
           </a:p>
@@ -12561,80 +12581,14 @@
       </p:sp>
       <p:sp>
         <p:nvSpPr>
-          <p:cNvPr id="27" name="Shape 25"/>
-          <p:cNvSpPr/>
-          <p:nvPr/>
-        </p:nvSpPr>
-        <p:spPr>
-          <a:xfrm>
-            <a:off x="1874520" y="3273552"/>
-            <a:ext cx="6903720" cy="658368"/>
-          </a:xfrm>
-          <a:prstGeom prst="rect">
-            <a:avLst>
-              <a:gd name="adj" fmla="val 8333"/>
-            </a:avLst>
-          </a:prstGeom>
-          <a:solidFill>
-            <a:srgbClr val="F8FAFC"/>
-          </a:solidFill>
-          <a:ln w="12700">
-            <a:solidFill>
-              <a:srgbClr val="E2E8F0"/>
-            </a:solidFill>
-            <a:prstDash val="dash"/>
-          </a:ln>
-        </p:spPr>
-      </p:sp>
-      <p:sp>
-        <p:nvSpPr>
-          <p:cNvPr id="28" name="Text 26"/>
-          <p:cNvSpPr/>
-          <p:nvPr/>
-        </p:nvSpPr>
-        <p:spPr>
-          <a:xfrm>
-            <a:off x="1874520" y="3273552"/>
-            <a:ext cx="6903720" cy="658368"/>
-          </a:xfrm>
-          <a:prstGeom prst="rect">
-            <a:avLst/>
-          </a:prstGeom>
-          <a:noFill/>
-          <a:ln/>
-        </p:spPr>
-        <p:txBody>
-          <a:bodyPr wrap="square" rtlCol="0" anchor="ctr"/>
-          <a:lstStyle/>
-          <a:p>
-            <a:pPr algn="ctr" indent="0" marL="0">
-              <a:buNone/>
-            </a:pPr>
-            <a:r>
-              <a:rPr lang="en-US" sz="1100" i="1" dirty="0">
-                <a:solidFill>
-                  <a:srgbClr val="CBD5E1"/>
-                </a:solidFill>
-                <a:latin typeface="Calibri" pitchFamily="34" charset="0"/>
-                <a:ea typeface="Calibri" pitchFamily="34" charset="-122"/>
-                <a:cs typeface="Calibri" pitchFamily="34" charset="-120"/>
-              </a:rPr>
-              <a:t>Write here...</a:t>
-            </a:r>
-            <a:endParaRPr lang="en-US" sz="1100" dirty="0"/>
-          </a:p>
-        </p:txBody>
-      </p:sp>
-      <p:sp>
-        <p:nvSpPr>
-          <p:cNvPr id="29" name="Shape 27"/>
-          <p:cNvSpPr/>
-          <p:nvPr/>
-        </p:nvSpPr>
-        <p:spPr>
-          <a:xfrm>
-            <a:off x="365760" y="4096512"/>
-            <a:ext cx="1371600" cy="804672"/>
+          <p:cNvPr id="28" name="Shape 26"/>
+          <p:cNvSpPr/>
+          <p:nvPr/>
+        </p:nvSpPr>
+        <p:spPr>
+          <a:xfrm>
+            <a:off x="1874520" y="4096512"/>
+            <a:ext cx="6903720" cy="804672"/>
           </a:xfrm>
           <a:prstGeom prst="rect">
             <a:avLst>
@@ -12642,85 +12596,19 @@
             </a:avLst>
           </a:prstGeom>
           <a:solidFill>
-            <a:srgbClr val="E2E8F0"/>
+            <a:srgbClr val="F8FAFC"/>
           </a:solidFill>
           <a:ln w="12700">
             <a:solidFill>
               <a:srgbClr val="E2E8F0"/>
             </a:solidFill>
-            <a:prstDash val="solid"/>
-          </a:ln>
-        </p:spPr>
-      </p:sp>
-      <p:sp>
-        <p:nvSpPr>
-          <p:cNvPr id="30" name="Text 28"/>
-          <p:cNvSpPr/>
-          <p:nvPr/>
-        </p:nvSpPr>
-        <p:spPr>
-          <a:xfrm>
-            <a:off x="365760" y="4096512"/>
-            <a:ext cx="1371600" cy="804672"/>
-          </a:xfrm>
-          <a:prstGeom prst="rect">
-            <a:avLst/>
-          </a:prstGeom>
-          <a:noFill/>
-          <a:ln/>
-        </p:spPr>
-        <p:txBody>
-          <a:bodyPr wrap="square" lIns="0" tIns="0" rIns="0" bIns="0" rtlCol="0" anchor="ctr"/>
-          <a:lstStyle/>
-          <a:p>
-            <a:pPr algn="ctr" indent="0" marL="0">
-              <a:buNone/>
-            </a:pPr>
-            <a:r>
-              <a:rPr lang="en-US" sz="1100" b="1" dirty="0">
-                <a:solidFill>
-                  <a:srgbClr val="475569"/>
-                </a:solidFill>
-                <a:latin typeface="Trebuchet MS" pitchFamily="34" charset="0"/>
-                <a:ea typeface="Trebuchet MS" pitchFamily="34" charset="-122"/>
-                <a:cs typeface="Trebuchet MS" pitchFamily="34" charset="-120"/>
-              </a:rPr>
-              <a:t>Phonemes</a:t>
-            </a:r>
-            <a:endParaRPr lang="en-US" sz="1100" dirty="0"/>
-          </a:p>
-        </p:txBody>
-      </p:sp>
-      <p:sp>
-        <p:nvSpPr>
-          <p:cNvPr id="31" name="Shape 29"/>
-          <p:cNvSpPr/>
-          <p:nvPr/>
-        </p:nvSpPr>
-        <p:spPr>
-          <a:xfrm>
-            <a:off x="1874520" y="4096512"/>
-            <a:ext cx="6903720" cy="804672"/>
-          </a:xfrm>
-          <a:prstGeom prst="rect">
-            <a:avLst>
-              <a:gd name="adj" fmla="val 6818"/>
-            </a:avLst>
-          </a:prstGeom>
-          <a:solidFill>
-            <a:srgbClr val="F8FAFC"/>
-          </a:solidFill>
-          <a:ln w="12700">
-            <a:solidFill>
-              <a:srgbClr val="E2E8F0"/>
-            </a:solidFill>
             <a:prstDash val="dash"/>
           </a:ln>
         </p:spPr>
       </p:sp>
       <p:sp>
         <p:nvSpPr>
-          <p:cNvPr id="32" name="Text 30"/>
+          <p:cNvPr id="29" name="Text 27"/>
           <p:cNvSpPr/>
           <p:nvPr/>
         </p:nvSpPr>
@@ -13043,7 +12931,7 @@
                 <a:ea typeface="Calibri" pitchFamily="34" charset="-122"/>
                 <a:cs typeface="Calibri" pitchFamily="34" charset="-120"/>
               </a:rPr>
-              <a:t>Word Labs  •  wordlabs.app  •  Prefix: 'ad-' = to, towards, near</a:t>
+              <a:t>Word Labs  •  wordlabs.app  •  Prefix: 'ad-' = to, toward, near</a:t>
             </a:r>
             <a:endParaRPr lang="en-US" sz="800" dirty="0"/>
           </a:p>
@@ -13182,7 +13070,7 @@
                 <a:ea typeface="Trebuchet MS" pitchFamily="34" charset="-122"/>
                 <a:cs typeface="Trebuchet MS" pitchFamily="34" charset="-120"/>
               </a:rPr>
-              <a:t>adventure</a:t>
+              <a:t>advance</a:t>
             </a:r>
             <a:endParaRPr lang="en-US" sz="2800" dirty="0"/>
           </a:p>
@@ -13262,7 +13150,7 @@
         </p:nvSpPr>
         <p:spPr>
           <a:xfrm>
-            <a:off x="2221992" y="2258568"/>
+            <a:off x="2938272" y="2258568"/>
             <a:ext cx="1828800" cy="292608"/>
           </a:xfrm>
           <a:prstGeom prst="rect">
@@ -13296,7 +13184,7 @@
         </p:nvSpPr>
         <p:spPr>
           <a:xfrm>
-            <a:off x="2221992" y="2258568"/>
+            <a:off x="2938272" y="2258568"/>
             <a:ext cx="1828800" cy="292608"/>
           </a:xfrm>
           <a:prstGeom prst="rect">
@@ -13335,7 +13223,7 @@
         </p:nvSpPr>
         <p:spPr>
           <a:xfrm>
-            <a:off x="2221992" y="2569464"/>
+            <a:off x="2938272" y="2569464"/>
             <a:ext cx="1828800" cy="201168"/>
           </a:xfrm>
           <a:prstGeom prst="rect">
@@ -13360,7 +13248,7 @@
                 <a:ea typeface="Calibri" pitchFamily="34" charset="-122"/>
                 <a:cs typeface="Calibri" pitchFamily="34" charset="-120"/>
               </a:rPr>
-              <a:t>to, towards</a:t>
+              <a:t>toward</a:t>
             </a:r>
             <a:endParaRPr lang="en-US" sz="850" dirty="0"/>
           </a:p>
@@ -13374,7 +13262,7 @@
         </p:nvSpPr>
         <p:spPr>
           <a:xfrm>
-            <a:off x="4370832" y="2258568"/>
+            <a:off x="5803392" y="2258568"/>
             <a:ext cx="1828800" cy="292608"/>
           </a:xfrm>
           <a:prstGeom prst="rect">
@@ -13408,7 +13296,7 @@
         </p:nvSpPr>
         <p:spPr>
           <a:xfrm>
-            <a:off x="4370832" y="2258568"/>
+            <a:off x="5803392" y="2258568"/>
             <a:ext cx="1828800" cy="292608"/>
           </a:xfrm>
           <a:prstGeom prst="rect">
@@ -13433,7 +13321,7 @@
                 <a:ea typeface="Trebuchet MS" pitchFamily="34" charset="-122"/>
                 <a:cs typeface="Trebuchet MS" pitchFamily="34" charset="-120"/>
               </a:rPr>
-              <a:t>vent</a:t>
+              <a:t>vance</a:t>
             </a:r>
             <a:endParaRPr lang="en-US" sz="1300" dirty="0"/>
           </a:p>
@@ -13447,7 +13335,7 @@
         </p:nvSpPr>
         <p:spPr>
           <a:xfrm>
-            <a:off x="4370832" y="2569464"/>
+            <a:off x="5803392" y="2569464"/>
             <a:ext cx="1828800" cy="201168"/>
           </a:xfrm>
           <a:prstGeom prst="rect">
@@ -13472,7 +13360,7 @@
                 <a:ea typeface="Calibri" pitchFamily="34" charset="-122"/>
                 <a:cs typeface="Calibri" pitchFamily="34" charset="-120"/>
               </a:rPr>
-              <a:t>come</a:t>
+              <a:t>go forward</a:t>
             </a:r>
             <a:endParaRPr lang="en-US" sz="850" dirty="0"/>
           </a:p>
@@ -13486,30 +13374,23 @@
         </p:nvSpPr>
         <p:spPr>
           <a:xfrm>
-            <a:off x="6519672" y="2258568"/>
-            <a:ext cx="1828800" cy="292608"/>
+            <a:off x="365760" y="3273552"/>
+            <a:ext cx="1371600" cy="658368"/>
           </a:xfrm>
           <a:prstGeom prst="rect">
             <a:avLst>
-              <a:gd name="adj" fmla="val 25000"/>
+              <a:gd name="adj" fmla="val 8333"/>
             </a:avLst>
           </a:prstGeom>
           <a:solidFill>
-            <a:srgbClr val="FCE7F3"/>
-          </a:solidFill>
-          <a:ln w="19050">
-            <a:solidFill>
-              <a:srgbClr val="DB2777"/>
-            </a:solidFill>
-            <a:prstDash val="solid"/>
-          </a:ln>
-          <a:effectLst>
-            <a:outerShdw sx="100000" sy="100000" kx="0" ky="0" algn="bl" rotWithShape="0" blurRad="101600" dist="38100" dir="8100000">
-              <a:srgbClr val="000000">
-                <a:alpha val="12000"/>
-              </a:srgbClr>
-            </a:outerShdw>
-          </a:effectLst>
+            <a:srgbClr val="E2E8F0"/>
+          </a:solidFill>
+          <a:ln w="12700">
+            <a:solidFill>
+              <a:srgbClr val="E2E8F0"/>
+            </a:solidFill>
+            <a:prstDash val="solid"/>
+          </a:ln>
         </p:spPr>
       </p:sp>
       <p:sp>
@@ -13520,8 +13401,8 @@
         </p:nvSpPr>
         <p:spPr>
           <a:xfrm>
-            <a:off x="6519672" y="2258568"/>
-            <a:ext cx="1828800" cy="292608"/>
+            <a:off x="365760" y="3273552"/>
+            <a:ext cx="1371600" cy="658368"/>
           </a:xfrm>
           <a:prstGeom prst="rect">
             <a:avLst/>
@@ -13537,69 +13418,30 @@
               <a:buNone/>
             </a:pPr>
             <a:r>
-              <a:rPr lang="en-US" sz="1300" b="1" dirty="0">
-                <a:solidFill>
-                  <a:srgbClr val="9D174D"/>
+              <a:rPr lang="en-US" sz="1100" b="1" dirty="0">
+                <a:solidFill>
+                  <a:srgbClr val="475569"/>
                 </a:solidFill>
                 <a:latin typeface="Trebuchet MS" pitchFamily="34" charset="0"/>
                 <a:ea typeface="Trebuchet MS" pitchFamily="34" charset="-122"/>
                 <a:cs typeface="Trebuchet MS" pitchFamily="34" charset="-120"/>
               </a:rPr>
-              <a:t>ure</a:t>
-            </a:r>
-            <a:endParaRPr lang="en-US" sz="1300" dirty="0"/>
-          </a:p>
-        </p:txBody>
-      </p:sp>
-      <p:sp>
-        <p:nvSpPr>
-          <p:cNvPr id="24" name="Text 22"/>
-          <p:cNvSpPr/>
-          <p:nvPr/>
-        </p:nvSpPr>
-        <p:spPr>
-          <a:xfrm>
-            <a:off x="6519672" y="2569464"/>
-            <a:ext cx="1828800" cy="201168"/>
-          </a:xfrm>
-          <a:prstGeom prst="rect">
-            <a:avLst/>
-          </a:prstGeom>
-          <a:noFill/>
-          <a:ln/>
-        </p:spPr>
-        <p:txBody>
-          <a:bodyPr wrap="square" lIns="0" tIns="0" rIns="0" bIns="0" rtlCol="0" anchor="t"/>
-          <a:lstStyle/>
-          <a:p>
-            <a:pPr algn="ctr" indent="0" marL="0">
-              <a:buNone/>
-            </a:pPr>
-            <a:r>
-              <a:rPr lang="en-US" sz="850" dirty="0">
-                <a:solidFill>
-                  <a:srgbClr val="475569"/>
-                </a:solidFill>
-                <a:latin typeface="Calibri" pitchFamily="34" charset="0"/>
-                <a:ea typeface="Calibri" pitchFamily="34" charset="-122"/>
-                <a:cs typeface="Calibri" pitchFamily="34" charset="-120"/>
-              </a:rPr>
-              <a:t>state or result of</a:t>
-            </a:r>
-            <a:endParaRPr lang="en-US" sz="850" dirty="0"/>
-          </a:p>
-        </p:txBody>
-      </p:sp>
-      <p:sp>
-        <p:nvSpPr>
-          <p:cNvPr id="25" name="Shape 23"/>
-          <p:cNvSpPr/>
-          <p:nvPr/>
-        </p:nvSpPr>
-        <p:spPr>
-          <a:xfrm>
-            <a:off x="365760" y="3273552"/>
-            <a:ext cx="1371600" cy="658368"/>
+              <a:t>Syllables</a:t>
+            </a:r>
+            <a:endParaRPr lang="en-US" sz="1100" dirty="0"/>
+          </a:p>
+        </p:txBody>
+      </p:sp>
+      <p:sp>
+        <p:nvSpPr>
+          <p:cNvPr id="24" name="Shape 22"/>
+          <p:cNvSpPr/>
+          <p:nvPr/>
+        </p:nvSpPr>
+        <p:spPr>
+          <a:xfrm>
+            <a:off x="1874520" y="3273552"/>
+            <a:ext cx="6903720" cy="658368"/>
           </a:xfrm>
           <a:prstGeom prst="rect">
             <a:avLst>
@@ -13607,11 +13449,38 @@
             </a:avLst>
           </a:prstGeom>
           <a:solidFill>
-            <a:srgbClr val="E2E8F0"/>
-          </a:solidFill>
-          <a:ln w="12700">
-            <a:solidFill>
-              <a:srgbClr val="E2E8F0"/>
+            <a:srgbClr val="CCFBF1"/>
+          </a:solidFill>
+          <a:ln w="12700">
+            <a:solidFill>
+              <a:srgbClr val="0D9488"/>
+            </a:solidFill>
+            <a:prstDash val="solid"/>
+          </a:ln>
+        </p:spPr>
+      </p:sp>
+      <p:sp>
+        <p:nvSpPr>
+          <p:cNvPr id="25" name="Shape 23"/>
+          <p:cNvSpPr/>
+          <p:nvPr/>
+        </p:nvSpPr>
+        <p:spPr>
+          <a:xfrm>
+            <a:off x="2999232" y="3364992"/>
+            <a:ext cx="1645920" cy="475488"/>
+          </a:xfrm>
+          <a:prstGeom prst="rect">
+            <a:avLst>
+              <a:gd name="adj" fmla="val 9615"/>
+            </a:avLst>
+          </a:prstGeom>
+          <a:solidFill>
+            <a:srgbClr val="FFFFFF"/>
+          </a:solidFill>
+          <a:ln w="12700">
+            <a:solidFill>
+              <a:srgbClr val="0D9488"/>
             </a:solidFill>
             <a:prstDash val="solid"/>
           </a:ln>
@@ -13625,8 +13494,8 @@
         </p:nvSpPr>
         <p:spPr>
           <a:xfrm>
-            <a:off x="365760" y="3273552"/>
-            <a:ext cx="1371600" cy="658368"/>
+            <a:off x="2999232" y="3364992"/>
+            <a:ext cx="1645920" cy="475488"/>
           </a:xfrm>
           <a:prstGeom prst="rect">
             <a:avLst/>
@@ -13642,46 +13511,58 @@
               <a:buNone/>
             </a:pPr>
             <a:r>
-              <a:rPr lang="en-US" sz="1100" b="1" dirty="0">
-                <a:solidFill>
-                  <a:srgbClr val="475569"/>
+              <a:rPr lang="en-US" sz="1400" b="1" dirty="0">
+                <a:solidFill>
+                  <a:srgbClr val="0D9488"/>
                 </a:solidFill>
                 <a:latin typeface="Trebuchet MS" pitchFamily="34" charset="0"/>
                 <a:ea typeface="Trebuchet MS" pitchFamily="34" charset="-122"/>
                 <a:cs typeface="Trebuchet MS" pitchFamily="34" charset="-120"/>
               </a:rPr>
-              <a:t>Syllables</a:t>
-            </a:r>
-            <a:endParaRPr lang="en-US" sz="1100" dirty="0"/>
-          </a:p>
-        </p:txBody>
-      </p:sp>
-      <p:sp>
-        <p:nvSpPr>
-          <p:cNvPr id="27" name="Shape 25"/>
-          <p:cNvSpPr/>
-          <p:nvPr/>
-        </p:nvSpPr>
-        <p:spPr>
-          <a:xfrm>
-            <a:off x="1874520" y="3273552"/>
-            <a:ext cx="6903720" cy="658368"/>
-          </a:xfrm>
-          <a:prstGeom prst="rect">
-            <a:avLst>
-              <a:gd name="adj" fmla="val 8333"/>
-            </a:avLst>
-          </a:prstGeom>
-          <a:solidFill>
-            <a:srgbClr val="CCFBF1"/>
-          </a:solidFill>
-          <a:ln w="12700">
-            <a:solidFill>
-              <a:srgbClr val="0D9488"/>
-            </a:solidFill>
-            <a:prstDash val="solid"/>
-          </a:ln>
-        </p:spPr>
+              <a:t>ad</a:t>
+            </a:r>
+            <a:endParaRPr lang="en-US" sz="1400" dirty="0"/>
+          </a:p>
+        </p:txBody>
+      </p:sp>
+      <p:sp>
+        <p:nvSpPr>
+          <p:cNvPr id="27" name="Text 25"/>
+          <p:cNvSpPr/>
+          <p:nvPr/>
+        </p:nvSpPr>
+        <p:spPr>
+          <a:xfrm>
+            <a:off x="4645152" y="3364992"/>
+            <a:ext cx="1097280" cy="475488"/>
+          </a:xfrm>
+          <a:prstGeom prst="rect">
+            <a:avLst/>
+          </a:prstGeom>
+          <a:noFill/>
+          <a:ln/>
+        </p:spPr>
+        <p:txBody>
+          <a:bodyPr wrap="square" lIns="0" tIns="0" rIns="0" bIns="0" rtlCol="0" anchor="ctr"/>
+          <a:lstStyle/>
+          <a:p>
+            <a:pPr algn="ctr" indent="0" marL="0">
+              <a:buNone/>
+            </a:pPr>
+            <a:r>
+              <a:rPr lang="en-US" sz="1600" b="1" dirty="0">
+                <a:solidFill>
+                  <a:srgbClr val="0D9488"/>
+                </a:solidFill>
+                <a:latin typeface="Trebuchet MS" pitchFamily="34" charset="0"/>
+                <a:ea typeface="Trebuchet MS" pitchFamily="34" charset="-122"/>
+                <a:cs typeface="Trebuchet MS" pitchFamily="34" charset="-120"/>
+              </a:rPr>
+              <a:t>·</a:t>
+            </a:r>
+            <a:endParaRPr lang="en-US" sz="1600" dirty="0"/>
+          </a:p>
+        </p:txBody>
       </p:sp>
       <p:sp>
         <p:nvSpPr>
@@ -13691,7 +13572,7 @@
         </p:nvSpPr>
         <p:spPr>
           <a:xfrm>
-            <a:off x="2313432" y="3364992"/>
+            <a:off x="5742432" y="3364992"/>
             <a:ext cx="1645920" cy="475488"/>
           </a:xfrm>
           <a:prstGeom prst="rect">
@@ -13718,7 +13599,7 @@
         </p:nvSpPr>
         <p:spPr>
           <a:xfrm>
-            <a:off x="2313432" y="3364992"/>
+            <a:off x="5742432" y="3364992"/>
             <a:ext cx="1645920" cy="475488"/>
           </a:xfrm>
           <a:prstGeom prst="rect">
@@ -13743,7 +13624,7 @@
                 <a:ea typeface="Trebuchet MS" pitchFamily="34" charset="-122"/>
                 <a:cs typeface="Trebuchet MS" pitchFamily="34" charset="-120"/>
               </a:rPr>
-              <a:t>ad</a:t>
+              <a:t>vance</a:t>
             </a:r>
             <a:endParaRPr lang="en-US" sz="1400" dirty="0"/>
           </a:p>
@@ -13751,14 +13632,41 @@
       </p:sp>
       <p:sp>
         <p:nvSpPr>
-          <p:cNvPr id="30" name="Text 28"/>
-          <p:cNvSpPr/>
-          <p:nvPr/>
-        </p:nvSpPr>
-        <p:spPr>
-          <a:xfrm>
-            <a:off x="3959352" y="3364992"/>
-            <a:ext cx="411480" cy="475488"/>
+          <p:cNvPr id="30" name="Shape 28"/>
+          <p:cNvSpPr/>
+          <p:nvPr/>
+        </p:nvSpPr>
+        <p:spPr>
+          <a:xfrm>
+            <a:off x="365760" y="4096512"/>
+            <a:ext cx="1371600" cy="804672"/>
+          </a:xfrm>
+          <a:prstGeom prst="rect">
+            <a:avLst>
+              <a:gd name="adj" fmla="val 6818"/>
+            </a:avLst>
+          </a:prstGeom>
+          <a:solidFill>
+            <a:srgbClr val="E2E8F0"/>
+          </a:solidFill>
+          <a:ln w="12700">
+            <a:solidFill>
+              <a:srgbClr val="E2E8F0"/>
+            </a:solidFill>
+            <a:prstDash val="solid"/>
+          </a:ln>
+        </p:spPr>
+      </p:sp>
+      <p:sp>
+        <p:nvSpPr>
+          <p:cNvPr id="31" name="Text 29"/>
+          <p:cNvSpPr/>
+          <p:nvPr/>
+        </p:nvSpPr>
+        <p:spPr>
+          <a:xfrm>
+            <a:off x="365760" y="4096512"/>
+            <a:ext cx="1371600" cy="804672"/>
           </a:xfrm>
           <a:prstGeom prst="rect">
             <a:avLst/>
@@ -13774,201 +13682,30 @@
               <a:buNone/>
             </a:pPr>
             <a:r>
-              <a:rPr lang="en-US" sz="1600" b="1" dirty="0">
-                <a:solidFill>
-                  <a:srgbClr val="0D9488"/>
+              <a:rPr lang="en-US" sz="1100" b="1" dirty="0">
+                <a:solidFill>
+                  <a:srgbClr val="475569"/>
                 </a:solidFill>
                 <a:latin typeface="Trebuchet MS" pitchFamily="34" charset="0"/>
                 <a:ea typeface="Trebuchet MS" pitchFamily="34" charset="-122"/>
                 <a:cs typeface="Trebuchet MS" pitchFamily="34" charset="-120"/>
               </a:rPr>
-              <a:t>·</a:t>
-            </a:r>
-            <a:endParaRPr lang="en-US" sz="1600" dirty="0"/>
-          </a:p>
-        </p:txBody>
-      </p:sp>
-      <p:sp>
-        <p:nvSpPr>
-          <p:cNvPr id="31" name="Shape 29"/>
-          <p:cNvSpPr/>
-          <p:nvPr/>
-        </p:nvSpPr>
-        <p:spPr>
-          <a:xfrm>
-            <a:off x="4370832" y="3364992"/>
-            <a:ext cx="1645920" cy="475488"/>
-          </a:xfrm>
-          <a:prstGeom prst="rect">
-            <a:avLst>
-              <a:gd name="adj" fmla="val 9615"/>
-            </a:avLst>
-          </a:prstGeom>
-          <a:solidFill>
-            <a:srgbClr val="FFFFFF"/>
-          </a:solidFill>
-          <a:ln w="12700">
-            <a:solidFill>
-              <a:srgbClr val="0D9488"/>
-            </a:solidFill>
-            <a:prstDash val="solid"/>
-          </a:ln>
-        </p:spPr>
-      </p:sp>
-      <p:sp>
-        <p:nvSpPr>
-          <p:cNvPr id="32" name="Text 30"/>
-          <p:cNvSpPr/>
-          <p:nvPr/>
-        </p:nvSpPr>
-        <p:spPr>
-          <a:xfrm>
-            <a:off x="4370832" y="3364992"/>
-            <a:ext cx="1645920" cy="475488"/>
-          </a:xfrm>
-          <a:prstGeom prst="rect">
-            <a:avLst/>
-          </a:prstGeom>
-          <a:noFill/>
-          <a:ln/>
-        </p:spPr>
-        <p:txBody>
-          <a:bodyPr wrap="square" lIns="0" tIns="0" rIns="0" bIns="0" rtlCol="0" anchor="ctr"/>
-          <a:lstStyle/>
-          <a:p>
-            <a:pPr algn="ctr" indent="0" marL="0">
-              <a:buNone/>
-            </a:pPr>
-            <a:r>
-              <a:rPr lang="en-US" sz="1400" b="1" dirty="0">
-                <a:solidFill>
-                  <a:srgbClr val="0D9488"/>
-                </a:solidFill>
-                <a:latin typeface="Trebuchet MS" pitchFamily="34" charset="0"/>
-                <a:ea typeface="Trebuchet MS" pitchFamily="34" charset="-122"/>
-                <a:cs typeface="Trebuchet MS" pitchFamily="34" charset="-120"/>
-              </a:rPr>
-              <a:t>ven</a:t>
-            </a:r>
-            <a:endParaRPr lang="en-US" sz="1400" dirty="0"/>
-          </a:p>
-        </p:txBody>
-      </p:sp>
-      <p:sp>
-        <p:nvSpPr>
-          <p:cNvPr id="33" name="Text 31"/>
-          <p:cNvSpPr/>
-          <p:nvPr/>
-        </p:nvSpPr>
-        <p:spPr>
-          <a:xfrm>
-            <a:off x="6016752" y="3364992"/>
-            <a:ext cx="411480" cy="475488"/>
-          </a:xfrm>
-          <a:prstGeom prst="rect">
-            <a:avLst/>
-          </a:prstGeom>
-          <a:noFill/>
-          <a:ln/>
-        </p:spPr>
-        <p:txBody>
-          <a:bodyPr wrap="square" lIns="0" tIns="0" rIns="0" bIns="0" rtlCol="0" anchor="ctr"/>
-          <a:lstStyle/>
-          <a:p>
-            <a:pPr algn="ctr" indent="0" marL="0">
-              <a:buNone/>
-            </a:pPr>
-            <a:r>
-              <a:rPr lang="en-US" sz="1600" b="1" dirty="0">
-                <a:solidFill>
-                  <a:srgbClr val="0D9488"/>
-                </a:solidFill>
-                <a:latin typeface="Trebuchet MS" pitchFamily="34" charset="0"/>
-                <a:ea typeface="Trebuchet MS" pitchFamily="34" charset="-122"/>
-                <a:cs typeface="Trebuchet MS" pitchFamily="34" charset="-120"/>
-              </a:rPr>
-              <a:t>·</a:t>
-            </a:r>
-            <a:endParaRPr lang="en-US" sz="1600" dirty="0"/>
-          </a:p>
-        </p:txBody>
-      </p:sp>
-      <p:sp>
-        <p:nvSpPr>
-          <p:cNvPr id="34" name="Shape 32"/>
-          <p:cNvSpPr/>
-          <p:nvPr/>
-        </p:nvSpPr>
-        <p:spPr>
-          <a:xfrm>
-            <a:off x="6428232" y="3364992"/>
-            <a:ext cx="1645920" cy="475488"/>
-          </a:xfrm>
-          <a:prstGeom prst="rect">
-            <a:avLst>
-              <a:gd name="adj" fmla="val 9615"/>
-            </a:avLst>
-          </a:prstGeom>
-          <a:solidFill>
-            <a:srgbClr val="FFFFFF"/>
-          </a:solidFill>
-          <a:ln w="12700">
-            <a:solidFill>
-              <a:srgbClr val="0D9488"/>
-            </a:solidFill>
-            <a:prstDash val="solid"/>
-          </a:ln>
-        </p:spPr>
-      </p:sp>
-      <p:sp>
-        <p:nvSpPr>
-          <p:cNvPr id="35" name="Text 33"/>
-          <p:cNvSpPr/>
-          <p:nvPr/>
-        </p:nvSpPr>
-        <p:spPr>
-          <a:xfrm>
-            <a:off x="6428232" y="3364992"/>
-            <a:ext cx="1645920" cy="475488"/>
-          </a:xfrm>
-          <a:prstGeom prst="rect">
-            <a:avLst/>
-          </a:prstGeom>
-          <a:noFill/>
-          <a:ln/>
-        </p:spPr>
-        <p:txBody>
-          <a:bodyPr wrap="square" lIns="0" tIns="0" rIns="0" bIns="0" rtlCol="0" anchor="ctr"/>
-          <a:lstStyle/>
-          <a:p>
-            <a:pPr algn="ctr" indent="0" marL="0">
-              <a:buNone/>
-            </a:pPr>
-            <a:r>
-              <a:rPr lang="en-US" sz="1400" b="1" dirty="0">
-                <a:solidFill>
-                  <a:srgbClr val="0D9488"/>
-                </a:solidFill>
-                <a:latin typeface="Trebuchet MS" pitchFamily="34" charset="0"/>
-                <a:ea typeface="Trebuchet MS" pitchFamily="34" charset="-122"/>
-                <a:cs typeface="Trebuchet MS" pitchFamily="34" charset="-120"/>
-              </a:rPr>
-              <a:t>ture</a:t>
-            </a:r>
-            <a:endParaRPr lang="en-US" sz="1400" dirty="0"/>
-          </a:p>
-        </p:txBody>
-      </p:sp>
-      <p:sp>
-        <p:nvSpPr>
-          <p:cNvPr id="36" name="Shape 34"/>
-          <p:cNvSpPr/>
-          <p:nvPr/>
-        </p:nvSpPr>
-        <p:spPr>
-          <a:xfrm>
-            <a:off x="365760" y="4096512"/>
-            <a:ext cx="1371600" cy="804672"/>
+              <a:t>Phonemes</a:t>
+            </a:r>
+            <a:endParaRPr lang="en-US" sz="1100" dirty="0"/>
+          </a:p>
+        </p:txBody>
+      </p:sp>
+      <p:sp>
+        <p:nvSpPr>
+          <p:cNvPr id="32" name="Shape 30"/>
+          <p:cNvSpPr/>
+          <p:nvPr/>
+        </p:nvSpPr>
+        <p:spPr>
+          <a:xfrm>
+            <a:off x="1874520" y="4096512"/>
+            <a:ext cx="6903720" cy="804672"/>
           </a:xfrm>
           <a:prstGeom prst="rect">
             <a:avLst>
@@ -13976,85 +13713,19 @@
             </a:avLst>
           </a:prstGeom>
           <a:solidFill>
-            <a:srgbClr val="E2E8F0"/>
+            <a:srgbClr val="F8FAFC"/>
           </a:solidFill>
           <a:ln w="12700">
             <a:solidFill>
               <a:srgbClr val="E2E8F0"/>
             </a:solidFill>
-            <a:prstDash val="solid"/>
-          </a:ln>
-        </p:spPr>
-      </p:sp>
-      <p:sp>
-        <p:nvSpPr>
-          <p:cNvPr id="37" name="Text 35"/>
-          <p:cNvSpPr/>
-          <p:nvPr/>
-        </p:nvSpPr>
-        <p:spPr>
-          <a:xfrm>
-            <a:off x="365760" y="4096512"/>
-            <a:ext cx="1371600" cy="804672"/>
-          </a:xfrm>
-          <a:prstGeom prst="rect">
-            <a:avLst/>
-          </a:prstGeom>
-          <a:noFill/>
-          <a:ln/>
-        </p:spPr>
-        <p:txBody>
-          <a:bodyPr wrap="square" lIns="0" tIns="0" rIns="0" bIns="0" rtlCol="0" anchor="ctr"/>
-          <a:lstStyle/>
-          <a:p>
-            <a:pPr algn="ctr" indent="0" marL="0">
-              <a:buNone/>
-            </a:pPr>
-            <a:r>
-              <a:rPr lang="en-US" sz="1100" b="1" dirty="0">
-                <a:solidFill>
-                  <a:srgbClr val="475569"/>
-                </a:solidFill>
-                <a:latin typeface="Trebuchet MS" pitchFamily="34" charset="0"/>
-                <a:ea typeface="Trebuchet MS" pitchFamily="34" charset="-122"/>
-                <a:cs typeface="Trebuchet MS" pitchFamily="34" charset="-120"/>
-              </a:rPr>
-              <a:t>Phonemes</a:t>
-            </a:r>
-            <a:endParaRPr lang="en-US" sz="1100" dirty="0"/>
-          </a:p>
-        </p:txBody>
-      </p:sp>
-      <p:sp>
-        <p:nvSpPr>
-          <p:cNvPr id="38" name="Shape 36"/>
-          <p:cNvSpPr/>
-          <p:nvPr/>
-        </p:nvSpPr>
-        <p:spPr>
-          <a:xfrm>
-            <a:off x="1874520" y="4096512"/>
-            <a:ext cx="6903720" cy="804672"/>
-          </a:xfrm>
-          <a:prstGeom prst="rect">
-            <a:avLst>
-              <a:gd name="adj" fmla="val 6818"/>
-            </a:avLst>
-          </a:prstGeom>
-          <a:solidFill>
-            <a:srgbClr val="F8FAFC"/>
-          </a:solidFill>
-          <a:ln w="12700">
-            <a:solidFill>
-              <a:srgbClr val="E2E8F0"/>
-            </a:solidFill>
             <a:prstDash val="dash"/>
           </a:ln>
         </p:spPr>
       </p:sp>
       <p:sp>
         <p:nvSpPr>
-          <p:cNvPr id="39" name="Text 37"/>
+          <p:cNvPr id="33" name="Text 31"/>
           <p:cNvSpPr/>
           <p:nvPr/>
         </p:nvSpPr>
@@ -14286,7 +13957,7 @@
                 <a:ea typeface="Calibri" pitchFamily="34" charset="-122"/>
                 <a:cs typeface="Calibri" pitchFamily="34" charset="-120"/>
               </a:rPr>
-              <a:t>Prefix 'ad-' — to, towards, near</a:t>
+              <a:t>Prefix 'ad-' — to, toward, near</a:t>
             </a:r>
             <a:endParaRPr lang="en-US" sz="1600" dirty="0"/>
           </a:p>
@@ -14642,7 +14313,7 @@
                 <a:ea typeface="Calibri" pitchFamily="34" charset="-122"/>
                 <a:cs typeface="Calibri" pitchFamily="34" charset="-120"/>
               </a:rPr>
-              <a:t>Word Labs  •  wordlabs.app  •  Prefix: 'ad-' = to, towards, near</a:t>
+              <a:t>Word Labs  •  wordlabs.app  •  Prefix: 'ad-' = to, toward, near</a:t>
             </a:r>
             <a:endParaRPr lang="en-US" sz="800" dirty="0"/>
           </a:p>
@@ -14781,7 +14452,7 @@
                 <a:ea typeface="Trebuchet MS" pitchFamily="34" charset="-122"/>
                 <a:cs typeface="Trebuchet MS" pitchFamily="34" charset="-120"/>
               </a:rPr>
-              <a:t>adventure</a:t>
+              <a:t>advance</a:t>
             </a:r>
             <a:endParaRPr lang="en-US" sz="2800" dirty="0"/>
           </a:p>
@@ -14861,7 +14532,7 @@
         </p:nvSpPr>
         <p:spPr>
           <a:xfrm>
-            <a:off x="2221992" y="2258568"/>
+            <a:off x="2938272" y="2258568"/>
             <a:ext cx="1828800" cy="292608"/>
           </a:xfrm>
           <a:prstGeom prst="rect">
@@ -14895,7 +14566,7 @@
         </p:nvSpPr>
         <p:spPr>
           <a:xfrm>
-            <a:off x="2221992" y="2258568"/>
+            <a:off x="2938272" y="2258568"/>
             <a:ext cx="1828800" cy="292608"/>
           </a:xfrm>
           <a:prstGeom prst="rect">
@@ -14934,7 +14605,7 @@
         </p:nvSpPr>
         <p:spPr>
           <a:xfrm>
-            <a:off x="2221992" y="2569464"/>
+            <a:off x="2938272" y="2569464"/>
             <a:ext cx="1828800" cy="201168"/>
           </a:xfrm>
           <a:prstGeom prst="rect">
@@ -14959,7 +14630,7 @@
                 <a:ea typeface="Calibri" pitchFamily="34" charset="-122"/>
                 <a:cs typeface="Calibri" pitchFamily="34" charset="-120"/>
               </a:rPr>
-              <a:t>to, towards</a:t>
+              <a:t>toward</a:t>
             </a:r>
             <a:endParaRPr lang="en-US" sz="850" dirty="0"/>
           </a:p>
@@ -14973,7 +14644,7 @@
         </p:nvSpPr>
         <p:spPr>
           <a:xfrm>
-            <a:off x="4370832" y="2258568"/>
+            <a:off x="5803392" y="2258568"/>
             <a:ext cx="1828800" cy="292608"/>
           </a:xfrm>
           <a:prstGeom prst="rect">
@@ -15007,7 +14678,7 @@
         </p:nvSpPr>
         <p:spPr>
           <a:xfrm>
-            <a:off x="4370832" y="2258568"/>
+            <a:off x="5803392" y="2258568"/>
             <a:ext cx="1828800" cy="292608"/>
           </a:xfrm>
           <a:prstGeom prst="rect">
@@ -15032,7 +14703,7 @@
                 <a:ea typeface="Trebuchet MS" pitchFamily="34" charset="-122"/>
                 <a:cs typeface="Trebuchet MS" pitchFamily="34" charset="-120"/>
               </a:rPr>
-              <a:t>vent</a:t>
+              <a:t>vance</a:t>
             </a:r>
             <a:endParaRPr lang="en-US" sz="1300" dirty="0"/>
           </a:p>
@@ -15046,7 +14717,7 @@
         </p:nvSpPr>
         <p:spPr>
           <a:xfrm>
-            <a:off x="4370832" y="2569464"/>
+            <a:off x="5803392" y="2569464"/>
             <a:ext cx="1828800" cy="201168"/>
           </a:xfrm>
           <a:prstGeom prst="rect">
@@ -15071,7 +14742,7 @@
                 <a:ea typeface="Calibri" pitchFamily="34" charset="-122"/>
                 <a:cs typeface="Calibri" pitchFamily="34" charset="-120"/>
               </a:rPr>
-              <a:t>come</a:t>
+              <a:t>go forward</a:t>
             </a:r>
             <a:endParaRPr lang="en-US" sz="850" dirty="0"/>
           </a:p>
@@ -15085,30 +14756,23 @@
         </p:nvSpPr>
         <p:spPr>
           <a:xfrm>
-            <a:off x="6519672" y="2258568"/>
-            <a:ext cx="1828800" cy="292608"/>
+            <a:off x="365760" y="3273552"/>
+            <a:ext cx="1371600" cy="658368"/>
           </a:xfrm>
           <a:prstGeom prst="rect">
             <a:avLst>
-              <a:gd name="adj" fmla="val 25000"/>
+              <a:gd name="adj" fmla="val 8333"/>
             </a:avLst>
           </a:prstGeom>
           <a:solidFill>
-            <a:srgbClr val="FCE7F3"/>
-          </a:solidFill>
-          <a:ln w="19050">
-            <a:solidFill>
-              <a:srgbClr val="DB2777"/>
-            </a:solidFill>
-            <a:prstDash val="solid"/>
-          </a:ln>
-          <a:effectLst>
-            <a:outerShdw sx="100000" sy="100000" kx="0" ky="0" algn="bl" rotWithShape="0" blurRad="101600" dist="38100" dir="8100000">
-              <a:srgbClr val="000000">
-                <a:alpha val="12000"/>
-              </a:srgbClr>
-            </a:outerShdw>
-          </a:effectLst>
+            <a:srgbClr val="E2E8F0"/>
+          </a:solidFill>
+          <a:ln w="12700">
+            <a:solidFill>
+              <a:srgbClr val="E2E8F0"/>
+            </a:solidFill>
+            <a:prstDash val="solid"/>
+          </a:ln>
         </p:spPr>
       </p:sp>
       <p:sp>
@@ -15119,8 +14783,8 @@
         </p:nvSpPr>
         <p:spPr>
           <a:xfrm>
-            <a:off x="6519672" y="2258568"/>
-            <a:ext cx="1828800" cy="292608"/>
+            <a:off x="365760" y="3273552"/>
+            <a:ext cx="1371600" cy="658368"/>
           </a:xfrm>
           <a:prstGeom prst="rect">
             <a:avLst/>
@@ -15136,30 +14800,717 @@
               <a:buNone/>
             </a:pPr>
             <a:r>
-              <a:rPr lang="en-US" sz="1300" b="1" dirty="0">
-                <a:solidFill>
-                  <a:srgbClr val="9D174D"/>
+              <a:rPr lang="en-US" sz="1100" b="1" dirty="0">
+                <a:solidFill>
+                  <a:srgbClr val="475569"/>
                 </a:solidFill>
                 <a:latin typeface="Trebuchet MS" pitchFamily="34" charset="0"/>
                 <a:ea typeface="Trebuchet MS" pitchFamily="34" charset="-122"/>
                 <a:cs typeface="Trebuchet MS" pitchFamily="34" charset="-120"/>
               </a:rPr>
-              <a:t>ure</a:t>
-            </a:r>
-            <a:endParaRPr lang="en-US" sz="1300" dirty="0"/>
-          </a:p>
-        </p:txBody>
-      </p:sp>
-      <p:sp>
-        <p:nvSpPr>
-          <p:cNvPr id="24" name="Text 22"/>
-          <p:cNvSpPr/>
-          <p:nvPr/>
-        </p:nvSpPr>
-        <p:spPr>
-          <a:xfrm>
-            <a:off x="6519672" y="2569464"/>
-            <a:ext cx="1828800" cy="201168"/>
+              <a:t>Syllables</a:t>
+            </a:r>
+            <a:endParaRPr lang="en-US" sz="1100" dirty="0"/>
+          </a:p>
+        </p:txBody>
+      </p:sp>
+      <p:sp>
+        <p:nvSpPr>
+          <p:cNvPr id="24" name="Shape 22"/>
+          <p:cNvSpPr/>
+          <p:nvPr/>
+        </p:nvSpPr>
+        <p:spPr>
+          <a:xfrm>
+            <a:off x="1874520" y="3273552"/>
+            <a:ext cx="6903720" cy="658368"/>
+          </a:xfrm>
+          <a:prstGeom prst="rect">
+            <a:avLst>
+              <a:gd name="adj" fmla="val 8333"/>
+            </a:avLst>
+          </a:prstGeom>
+          <a:solidFill>
+            <a:srgbClr val="CCFBF1"/>
+          </a:solidFill>
+          <a:ln w="12700">
+            <a:solidFill>
+              <a:srgbClr val="0D9488"/>
+            </a:solidFill>
+            <a:prstDash val="solid"/>
+          </a:ln>
+        </p:spPr>
+      </p:sp>
+      <p:sp>
+        <p:nvSpPr>
+          <p:cNvPr id="25" name="Shape 23"/>
+          <p:cNvSpPr/>
+          <p:nvPr/>
+        </p:nvSpPr>
+        <p:spPr>
+          <a:xfrm>
+            <a:off x="2999232" y="3364992"/>
+            <a:ext cx="1645920" cy="475488"/>
+          </a:xfrm>
+          <a:prstGeom prst="rect">
+            <a:avLst>
+              <a:gd name="adj" fmla="val 9615"/>
+            </a:avLst>
+          </a:prstGeom>
+          <a:solidFill>
+            <a:srgbClr val="FFFFFF"/>
+          </a:solidFill>
+          <a:ln w="12700">
+            <a:solidFill>
+              <a:srgbClr val="0D9488"/>
+            </a:solidFill>
+            <a:prstDash val="solid"/>
+          </a:ln>
+        </p:spPr>
+      </p:sp>
+      <p:sp>
+        <p:nvSpPr>
+          <p:cNvPr id="26" name="Text 24"/>
+          <p:cNvSpPr/>
+          <p:nvPr/>
+        </p:nvSpPr>
+        <p:spPr>
+          <a:xfrm>
+            <a:off x="2999232" y="3364992"/>
+            <a:ext cx="1645920" cy="475488"/>
+          </a:xfrm>
+          <a:prstGeom prst="rect">
+            <a:avLst/>
+          </a:prstGeom>
+          <a:noFill/>
+          <a:ln/>
+        </p:spPr>
+        <p:txBody>
+          <a:bodyPr wrap="square" lIns="0" tIns="0" rIns="0" bIns="0" rtlCol="0" anchor="ctr"/>
+          <a:lstStyle/>
+          <a:p>
+            <a:pPr algn="ctr" indent="0" marL="0">
+              <a:buNone/>
+            </a:pPr>
+            <a:r>
+              <a:rPr lang="en-US" sz="1400" b="1" dirty="0">
+                <a:solidFill>
+                  <a:srgbClr val="0D9488"/>
+                </a:solidFill>
+                <a:latin typeface="Trebuchet MS" pitchFamily="34" charset="0"/>
+                <a:ea typeface="Trebuchet MS" pitchFamily="34" charset="-122"/>
+                <a:cs typeface="Trebuchet MS" pitchFamily="34" charset="-120"/>
+              </a:rPr>
+              <a:t>ad</a:t>
+            </a:r>
+            <a:endParaRPr lang="en-US" sz="1400" dirty="0"/>
+          </a:p>
+        </p:txBody>
+      </p:sp>
+      <p:sp>
+        <p:nvSpPr>
+          <p:cNvPr id="27" name="Text 25"/>
+          <p:cNvSpPr/>
+          <p:nvPr/>
+        </p:nvSpPr>
+        <p:spPr>
+          <a:xfrm>
+            <a:off x="4645152" y="3364992"/>
+            <a:ext cx="1097280" cy="475488"/>
+          </a:xfrm>
+          <a:prstGeom prst="rect">
+            <a:avLst/>
+          </a:prstGeom>
+          <a:noFill/>
+          <a:ln/>
+        </p:spPr>
+        <p:txBody>
+          <a:bodyPr wrap="square" lIns="0" tIns="0" rIns="0" bIns="0" rtlCol="0" anchor="ctr"/>
+          <a:lstStyle/>
+          <a:p>
+            <a:pPr algn="ctr" indent="0" marL="0">
+              <a:buNone/>
+            </a:pPr>
+            <a:r>
+              <a:rPr lang="en-US" sz="1600" b="1" dirty="0">
+                <a:solidFill>
+                  <a:srgbClr val="0D9488"/>
+                </a:solidFill>
+                <a:latin typeface="Trebuchet MS" pitchFamily="34" charset="0"/>
+                <a:ea typeface="Trebuchet MS" pitchFamily="34" charset="-122"/>
+                <a:cs typeface="Trebuchet MS" pitchFamily="34" charset="-120"/>
+              </a:rPr>
+              <a:t>·</a:t>
+            </a:r>
+            <a:endParaRPr lang="en-US" sz="1600" dirty="0"/>
+          </a:p>
+        </p:txBody>
+      </p:sp>
+      <p:sp>
+        <p:nvSpPr>
+          <p:cNvPr id="28" name="Shape 26"/>
+          <p:cNvSpPr/>
+          <p:nvPr/>
+        </p:nvSpPr>
+        <p:spPr>
+          <a:xfrm>
+            <a:off x="5742432" y="3364992"/>
+            <a:ext cx="1645920" cy="475488"/>
+          </a:xfrm>
+          <a:prstGeom prst="rect">
+            <a:avLst>
+              <a:gd name="adj" fmla="val 9615"/>
+            </a:avLst>
+          </a:prstGeom>
+          <a:solidFill>
+            <a:srgbClr val="FFFFFF"/>
+          </a:solidFill>
+          <a:ln w="12700">
+            <a:solidFill>
+              <a:srgbClr val="0D9488"/>
+            </a:solidFill>
+            <a:prstDash val="solid"/>
+          </a:ln>
+        </p:spPr>
+      </p:sp>
+      <p:sp>
+        <p:nvSpPr>
+          <p:cNvPr id="29" name="Text 27"/>
+          <p:cNvSpPr/>
+          <p:nvPr/>
+        </p:nvSpPr>
+        <p:spPr>
+          <a:xfrm>
+            <a:off x="5742432" y="3364992"/>
+            <a:ext cx="1645920" cy="475488"/>
+          </a:xfrm>
+          <a:prstGeom prst="rect">
+            <a:avLst/>
+          </a:prstGeom>
+          <a:noFill/>
+          <a:ln/>
+        </p:spPr>
+        <p:txBody>
+          <a:bodyPr wrap="square" lIns="0" tIns="0" rIns="0" bIns="0" rtlCol="0" anchor="ctr"/>
+          <a:lstStyle/>
+          <a:p>
+            <a:pPr algn="ctr" indent="0" marL="0">
+              <a:buNone/>
+            </a:pPr>
+            <a:r>
+              <a:rPr lang="en-US" sz="1400" b="1" dirty="0">
+                <a:solidFill>
+                  <a:srgbClr val="0D9488"/>
+                </a:solidFill>
+                <a:latin typeface="Trebuchet MS" pitchFamily="34" charset="0"/>
+                <a:ea typeface="Trebuchet MS" pitchFamily="34" charset="-122"/>
+                <a:cs typeface="Trebuchet MS" pitchFamily="34" charset="-120"/>
+              </a:rPr>
+              <a:t>vance</a:t>
+            </a:r>
+            <a:endParaRPr lang="en-US" sz="1400" dirty="0"/>
+          </a:p>
+        </p:txBody>
+      </p:sp>
+      <p:sp>
+        <p:nvSpPr>
+          <p:cNvPr id="30" name="Shape 28"/>
+          <p:cNvSpPr/>
+          <p:nvPr/>
+        </p:nvSpPr>
+        <p:spPr>
+          <a:xfrm>
+            <a:off x="365760" y="4096512"/>
+            <a:ext cx="1371600" cy="804672"/>
+          </a:xfrm>
+          <a:prstGeom prst="rect">
+            <a:avLst>
+              <a:gd name="adj" fmla="val 6818"/>
+            </a:avLst>
+          </a:prstGeom>
+          <a:solidFill>
+            <a:srgbClr val="E2E8F0"/>
+          </a:solidFill>
+          <a:ln w="12700">
+            <a:solidFill>
+              <a:srgbClr val="E2E8F0"/>
+            </a:solidFill>
+            <a:prstDash val="solid"/>
+          </a:ln>
+        </p:spPr>
+      </p:sp>
+      <p:sp>
+        <p:nvSpPr>
+          <p:cNvPr id="31" name="Text 29"/>
+          <p:cNvSpPr/>
+          <p:nvPr/>
+        </p:nvSpPr>
+        <p:spPr>
+          <a:xfrm>
+            <a:off x="365760" y="4096512"/>
+            <a:ext cx="1371600" cy="804672"/>
+          </a:xfrm>
+          <a:prstGeom prst="rect">
+            <a:avLst/>
+          </a:prstGeom>
+          <a:noFill/>
+          <a:ln/>
+        </p:spPr>
+        <p:txBody>
+          <a:bodyPr wrap="square" lIns="0" tIns="0" rIns="0" bIns="0" rtlCol="0" anchor="ctr"/>
+          <a:lstStyle/>
+          <a:p>
+            <a:pPr algn="ctr" indent="0" marL="0">
+              <a:buNone/>
+            </a:pPr>
+            <a:r>
+              <a:rPr lang="en-US" sz="1100" b="1" dirty="0">
+                <a:solidFill>
+                  <a:srgbClr val="475569"/>
+                </a:solidFill>
+                <a:latin typeface="Trebuchet MS" pitchFamily="34" charset="0"/>
+                <a:ea typeface="Trebuchet MS" pitchFamily="34" charset="-122"/>
+                <a:cs typeface="Trebuchet MS" pitchFamily="34" charset="-120"/>
+              </a:rPr>
+              <a:t>Phonemes</a:t>
+            </a:r>
+            <a:endParaRPr lang="en-US" sz="1100" dirty="0"/>
+          </a:p>
+        </p:txBody>
+      </p:sp>
+      <p:sp>
+        <p:nvSpPr>
+          <p:cNvPr id="32" name="Shape 30"/>
+          <p:cNvSpPr/>
+          <p:nvPr/>
+        </p:nvSpPr>
+        <p:spPr>
+          <a:xfrm>
+            <a:off x="1874520" y="4096512"/>
+            <a:ext cx="6903720" cy="804672"/>
+          </a:xfrm>
+          <a:prstGeom prst="rect">
+            <a:avLst>
+              <a:gd name="adj" fmla="val 6818"/>
+            </a:avLst>
+          </a:prstGeom>
+          <a:solidFill>
+            <a:srgbClr val="FCE7F3"/>
+          </a:solidFill>
+          <a:ln w="12700">
+            <a:solidFill>
+              <a:srgbClr val="DB2777"/>
+            </a:solidFill>
+            <a:prstDash val="solid"/>
+          </a:ln>
+        </p:spPr>
+      </p:sp>
+      <p:sp>
+        <p:nvSpPr>
+          <p:cNvPr id="33" name="Shape 31"/>
+          <p:cNvSpPr/>
+          <p:nvPr/>
+        </p:nvSpPr>
+        <p:spPr>
+          <a:xfrm>
+            <a:off x="2254649" y="4169664"/>
+            <a:ext cx="685800" cy="384048"/>
+          </a:xfrm>
+          <a:prstGeom prst="rect">
+            <a:avLst>
+              <a:gd name="adj" fmla="val 9524"/>
+            </a:avLst>
+          </a:prstGeom>
+          <a:solidFill>
+            <a:srgbClr val="FFFFFF"/>
+          </a:solidFill>
+          <a:ln w="12700">
+            <a:solidFill>
+              <a:srgbClr val="DB2777"/>
+            </a:solidFill>
+            <a:prstDash val="solid"/>
+          </a:ln>
+        </p:spPr>
+      </p:sp>
+      <p:sp>
+        <p:nvSpPr>
+          <p:cNvPr id="34" name="Text 32"/>
+          <p:cNvSpPr/>
+          <p:nvPr/>
+        </p:nvSpPr>
+        <p:spPr>
+          <a:xfrm>
+            <a:off x="2254649" y="4169664"/>
+            <a:ext cx="685800" cy="384048"/>
+          </a:xfrm>
+          <a:prstGeom prst="rect">
+            <a:avLst/>
+          </a:prstGeom>
+          <a:noFill/>
+          <a:ln/>
+        </p:spPr>
+        <p:txBody>
+          <a:bodyPr wrap="square" lIns="0" tIns="0" rIns="0" bIns="0" rtlCol="0" anchor="ctr"/>
+          <a:lstStyle/>
+          <a:p>
+            <a:pPr algn="ctr" indent="0" marL="0">
+              <a:buNone/>
+            </a:pPr>
+            <a:r>
+              <a:rPr lang="en-US" sz="900" b="1" dirty="0">
+                <a:solidFill>
+                  <a:srgbClr val="9D174D"/>
+                </a:solidFill>
+                <a:latin typeface="Trebuchet MS" pitchFamily="34" charset="0"/>
+                <a:ea typeface="Trebuchet MS" pitchFamily="34" charset="-122"/>
+                <a:cs typeface="Trebuchet MS" pitchFamily="34" charset="-120"/>
+              </a:rPr>
+              <a:t>a</a:t>
+            </a:r>
+            <a:endParaRPr lang="en-US" sz="900" dirty="0"/>
+          </a:p>
+        </p:txBody>
+      </p:sp>
+      <p:sp>
+        <p:nvSpPr>
+          <p:cNvPr id="35" name="Shape 33"/>
+          <p:cNvSpPr/>
+          <p:nvPr/>
+        </p:nvSpPr>
+        <p:spPr>
+          <a:xfrm>
+            <a:off x="3293146" y="4169664"/>
+            <a:ext cx="685800" cy="384048"/>
+          </a:xfrm>
+          <a:prstGeom prst="rect">
+            <a:avLst>
+              <a:gd name="adj" fmla="val 9524"/>
+            </a:avLst>
+          </a:prstGeom>
+          <a:solidFill>
+            <a:srgbClr val="FFFFFF"/>
+          </a:solidFill>
+          <a:ln w="12700">
+            <a:solidFill>
+              <a:srgbClr val="DB2777"/>
+            </a:solidFill>
+            <a:prstDash val="solid"/>
+          </a:ln>
+        </p:spPr>
+      </p:sp>
+      <p:sp>
+        <p:nvSpPr>
+          <p:cNvPr id="36" name="Text 34"/>
+          <p:cNvSpPr/>
+          <p:nvPr/>
+        </p:nvSpPr>
+        <p:spPr>
+          <a:xfrm>
+            <a:off x="3293146" y="4169664"/>
+            <a:ext cx="685800" cy="384048"/>
+          </a:xfrm>
+          <a:prstGeom prst="rect">
+            <a:avLst/>
+          </a:prstGeom>
+          <a:noFill/>
+          <a:ln/>
+        </p:spPr>
+        <p:txBody>
+          <a:bodyPr wrap="square" lIns="0" tIns="0" rIns="0" bIns="0" rtlCol="0" anchor="ctr"/>
+          <a:lstStyle/>
+          <a:p>
+            <a:pPr algn="ctr" indent="0" marL="0">
+              <a:buNone/>
+            </a:pPr>
+            <a:r>
+              <a:rPr lang="en-US" sz="900" b="1" dirty="0">
+                <a:solidFill>
+                  <a:srgbClr val="9D174D"/>
+                </a:solidFill>
+                <a:latin typeface="Trebuchet MS" pitchFamily="34" charset="0"/>
+                <a:ea typeface="Trebuchet MS" pitchFamily="34" charset="-122"/>
+                <a:cs typeface="Trebuchet MS" pitchFamily="34" charset="-120"/>
+              </a:rPr>
+              <a:t>d</a:t>
+            </a:r>
+            <a:endParaRPr lang="en-US" sz="900" dirty="0"/>
+          </a:p>
+        </p:txBody>
+      </p:sp>
+      <p:sp>
+        <p:nvSpPr>
+          <p:cNvPr id="37" name="Shape 35"/>
+          <p:cNvSpPr/>
+          <p:nvPr/>
+        </p:nvSpPr>
+        <p:spPr>
+          <a:xfrm>
+            <a:off x="4331643" y="4169664"/>
+            <a:ext cx="685800" cy="384048"/>
+          </a:xfrm>
+          <a:prstGeom prst="rect">
+            <a:avLst>
+              <a:gd name="adj" fmla="val 9524"/>
+            </a:avLst>
+          </a:prstGeom>
+          <a:solidFill>
+            <a:srgbClr val="FFFFFF"/>
+          </a:solidFill>
+          <a:ln w="12700">
+            <a:solidFill>
+              <a:srgbClr val="DB2777"/>
+            </a:solidFill>
+            <a:prstDash val="solid"/>
+          </a:ln>
+        </p:spPr>
+      </p:sp>
+      <p:sp>
+        <p:nvSpPr>
+          <p:cNvPr id="38" name="Text 36"/>
+          <p:cNvSpPr/>
+          <p:nvPr/>
+        </p:nvSpPr>
+        <p:spPr>
+          <a:xfrm>
+            <a:off x="4331643" y="4169664"/>
+            <a:ext cx="685800" cy="384048"/>
+          </a:xfrm>
+          <a:prstGeom prst="rect">
+            <a:avLst/>
+          </a:prstGeom>
+          <a:noFill/>
+          <a:ln/>
+        </p:spPr>
+        <p:txBody>
+          <a:bodyPr wrap="square" lIns="0" tIns="0" rIns="0" bIns="0" rtlCol="0" anchor="ctr"/>
+          <a:lstStyle/>
+          <a:p>
+            <a:pPr algn="ctr" indent="0" marL="0">
+              <a:buNone/>
+            </a:pPr>
+            <a:r>
+              <a:rPr lang="en-US" sz="900" b="1" dirty="0">
+                <a:solidFill>
+                  <a:srgbClr val="9D174D"/>
+                </a:solidFill>
+                <a:latin typeface="Trebuchet MS" pitchFamily="34" charset="0"/>
+                <a:ea typeface="Trebuchet MS" pitchFamily="34" charset="-122"/>
+                <a:cs typeface="Trebuchet MS" pitchFamily="34" charset="-120"/>
+              </a:rPr>
+              <a:t>v</a:t>
+            </a:r>
+            <a:endParaRPr lang="en-US" sz="900" dirty="0"/>
+          </a:p>
+        </p:txBody>
+      </p:sp>
+      <p:sp>
+        <p:nvSpPr>
+          <p:cNvPr id="39" name="Shape 37"/>
+          <p:cNvSpPr/>
+          <p:nvPr/>
+        </p:nvSpPr>
+        <p:spPr>
+          <a:xfrm>
+            <a:off x="5370141" y="4169664"/>
+            <a:ext cx="685800" cy="384048"/>
+          </a:xfrm>
+          <a:prstGeom prst="rect">
+            <a:avLst>
+              <a:gd name="adj" fmla="val 9524"/>
+            </a:avLst>
+          </a:prstGeom>
+          <a:solidFill>
+            <a:srgbClr val="FFFFFF"/>
+          </a:solidFill>
+          <a:ln w="12700">
+            <a:solidFill>
+              <a:srgbClr val="DB2777"/>
+            </a:solidFill>
+            <a:prstDash val="solid"/>
+          </a:ln>
+        </p:spPr>
+      </p:sp>
+      <p:sp>
+        <p:nvSpPr>
+          <p:cNvPr id="40" name="Text 38"/>
+          <p:cNvSpPr/>
+          <p:nvPr/>
+        </p:nvSpPr>
+        <p:spPr>
+          <a:xfrm>
+            <a:off x="5370141" y="4169664"/>
+            <a:ext cx="685800" cy="384048"/>
+          </a:xfrm>
+          <a:prstGeom prst="rect">
+            <a:avLst/>
+          </a:prstGeom>
+          <a:noFill/>
+          <a:ln/>
+        </p:spPr>
+        <p:txBody>
+          <a:bodyPr wrap="square" lIns="0" tIns="0" rIns="0" bIns="0" rtlCol="0" anchor="ctr"/>
+          <a:lstStyle/>
+          <a:p>
+            <a:pPr algn="ctr" indent="0" marL="0">
+              <a:buNone/>
+            </a:pPr>
+            <a:r>
+              <a:rPr lang="en-US" sz="900" b="1" dirty="0">
+                <a:solidFill>
+                  <a:srgbClr val="9D174D"/>
+                </a:solidFill>
+                <a:latin typeface="Trebuchet MS" pitchFamily="34" charset="0"/>
+                <a:ea typeface="Trebuchet MS" pitchFamily="34" charset="-122"/>
+                <a:cs typeface="Trebuchet MS" pitchFamily="34" charset="-120"/>
+              </a:rPr>
+              <a:t>a</a:t>
+            </a:r>
+            <a:endParaRPr lang="en-US" sz="900" dirty="0"/>
+          </a:p>
+        </p:txBody>
+      </p:sp>
+      <p:sp>
+        <p:nvSpPr>
+          <p:cNvPr id="41" name="Shape 39"/>
+          <p:cNvSpPr/>
+          <p:nvPr/>
+        </p:nvSpPr>
+        <p:spPr>
+          <a:xfrm>
+            <a:off x="6408638" y="4169664"/>
+            <a:ext cx="685800" cy="384048"/>
+          </a:xfrm>
+          <a:prstGeom prst="rect">
+            <a:avLst>
+              <a:gd name="adj" fmla="val 9524"/>
+            </a:avLst>
+          </a:prstGeom>
+          <a:solidFill>
+            <a:srgbClr val="FFFFFF"/>
+          </a:solidFill>
+          <a:ln w="12700">
+            <a:solidFill>
+              <a:srgbClr val="DB2777"/>
+            </a:solidFill>
+            <a:prstDash val="solid"/>
+          </a:ln>
+        </p:spPr>
+      </p:sp>
+      <p:sp>
+        <p:nvSpPr>
+          <p:cNvPr id="42" name="Text 40"/>
+          <p:cNvSpPr/>
+          <p:nvPr/>
+        </p:nvSpPr>
+        <p:spPr>
+          <a:xfrm>
+            <a:off x="6408638" y="4169664"/>
+            <a:ext cx="685800" cy="384048"/>
+          </a:xfrm>
+          <a:prstGeom prst="rect">
+            <a:avLst/>
+          </a:prstGeom>
+          <a:noFill/>
+          <a:ln/>
+        </p:spPr>
+        <p:txBody>
+          <a:bodyPr wrap="square" lIns="0" tIns="0" rIns="0" bIns="0" rtlCol="0" anchor="ctr"/>
+          <a:lstStyle/>
+          <a:p>
+            <a:pPr algn="ctr" indent="0" marL="0">
+              <a:buNone/>
+            </a:pPr>
+            <a:r>
+              <a:rPr lang="en-US" sz="900" b="1" dirty="0">
+                <a:solidFill>
+                  <a:srgbClr val="9D174D"/>
+                </a:solidFill>
+                <a:latin typeface="Trebuchet MS" pitchFamily="34" charset="0"/>
+                <a:ea typeface="Trebuchet MS" pitchFamily="34" charset="-122"/>
+                <a:cs typeface="Trebuchet MS" pitchFamily="34" charset="-120"/>
+              </a:rPr>
+              <a:t>n</a:t>
+            </a:r>
+            <a:endParaRPr lang="en-US" sz="900" dirty="0"/>
+          </a:p>
+        </p:txBody>
+      </p:sp>
+      <p:sp>
+        <p:nvSpPr>
+          <p:cNvPr id="43" name="Shape 41"/>
+          <p:cNvSpPr/>
+          <p:nvPr/>
+        </p:nvSpPr>
+        <p:spPr>
+          <a:xfrm>
+            <a:off x="7447135" y="4169664"/>
+            <a:ext cx="685800" cy="384048"/>
+          </a:xfrm>
+          <a:prstGeom prst="rect">
+            <a:avLst>
+              <a:gd name="adj" fmla="val 9524"/>
+            </a:avLst>
+          </a:prstGeom>
+          <a:solidFill>
+            <a:srgbClr val="FFFFFF"/>
+          </a:solidFill>
+          <a:ln w="12700">
+            <a:solidFill>
+              <a:srgbClr val="DB2777"/>
+            </a:solidFill>
+            <a:prstDash val="solid"/>
+          </a:ln>
+        </p:spPr>
+      </p:sp>
+      <p:sp>
+        <p:nvSpPr>
+          <p:cNvPr id="44" name="Text 42"/>
+          <p:cNvSpPr/>
+          <p:nvPr/>
+        </p:nvSpPr>
+        <p:spPr>
+          <a:xfrm>
+            <a:off x="7447135" y="4169664"/>
+            <a:ext cx="685800" cy="384048"/>
+          </a:xfrm>
+          <a:prstGeom prst="rect">
+            <a:avLst/>
+          </a:prstGeom>
+          <a:noFill/>
+          <a:ln/>
+        </p:spPr>
+        <p:txBody>
+          <a:bodyPr wrap="square" lIns="0" tIns="0" rIns="0" bIns="0" rtlCol="0" anchor="ctr"/>
+          <a:lstStyle/>
+          <a:p>
+            <a:pPr algn="ctr" indent="0" marL="0">
+              <a:buNone/>
+            </a:pPr>
+            <a:r>
+              <a:rPr lang="en-US" sz="900" b="1" dirty="0">
+                <a:solidFill>
+                  <a:srgbClr val="9D174D"/>
+                </a:solidFill>
+                <a:latin typeface="Trebuchet MS" pitchFamily="34" charset="0"/>
+                <a:ea typeface="Trebuchet MS" pitchFamily="34" charset="-122"/>
+                <a:cs typeface="Trebuchet MS" pitchFamily="34" charset="-120"/>
+              </a:rPr>
+              <a:t>ce</a:t>
+            </a:r>
+            <a:endParaRPr lang="en-US" sz="900" dirty="0"/>
+          </a:p>
+        </p:txBody>
+      </p:sp>
+      <p:sp>
+        <p:nvSpPr>
+          <p:cNvPr id="45" name="Text 43"/>
+          <p:cNvSpPr/>
+          <p:nvPr/>
+        </p:nvSpPr>
+        <p:spPr>
+          <a:xfrm>
+            <a:off x="7447135" y="4572000"/>
+            <a:ext cx="685800" cy="219456"/>
           </a:xfrm>
           <a:prstGeom prst="rect">
             <a:avLst/>
@@ -15175,941 +15526,17 @@
               <a:buNone/>
             </a:pPr>
             <a:r>
-              <a:rPr lang="en-US" sz="850" dirty="0">
-                <a:solidFill>
-                  <a:srgbClr val="475569"/>
+              <a:rPr lang="en-US" sz="750" i="1" dirty="0">
+                <a:solidFill>
+                  <a:srgbClr val="94A3B8"/>
                 </a:solidFill>
                 <a:latin typeface="Calibri" pitchFamily="34" charset="0"/>
                 <a:ea typeface="Calibri" pitchFamily="34" charset="-122"/>
                 <a:cs typeface="Calibri" pitchFamily="34" charset="-120"/>
               </a:rPr>
-              <a:t>state or result of</a:t>
-            </a:r>
-            <a:endParaRPr lang="en-US" sz="850" dirty="0"/>
-          </a:p>
-        </p:txBody>
-      </p:sp>
-      <p:sp>
-        <p:nvSpPr>
-          <p:cNvPr id="25" name="Shape 23"/>
-          <p:cNvSpPr/>
-          <p:nvPr/>
-        </p:nvSpPr>
-        <p:spPr>
-          <a:xfrm>
-            <a:off x="365760" y="3273552"/>
-            <a:ext cx="1371600" cy="658368"/>
-          </a:xfrm>
-          <a:prstGeom prst="rect">
-            <a:avLst>
-              <a:gd name="adj" fmla="val 8333"/>
-            </a:avLst>
-          </a:prstGeom>
-          <a:solidFill>
-            <a:srgbClr val="E2E8F0"/>
-          </a:solidFill>
-          <a:ln w="12700">
-            <a:solidFill>
-              <a:srgbClr val="E2E8F0"/>
-            </a:solidFill>
-            <a:prstDash val="solid"/>
-          </a:ln>
-        </p:spPr>
-      </p:sp>
-      <p:sp>
-        <p:nvSpPr>
-          <p:cNvPr id="26" name="Text 24"/>
-          <p:cNvSpPr/>
-          <p:nvPr/>
-        </p:nvSpPr>
-        <p:spPr>
-          <a:xfrm>
-            <a:off x="365760" y="3273552"/>
-            <a:ext cx="1371600" cy="658368"/>
-          </a:xfrm>
-          <a:prstGeom prst="rect">
-            <a:avLst/>
-          </a:prstGeom>
-          <a:noFill/>
-          <a:ln/>
-        </p:spPr>
-        <p:txBody>
-          <a:bodyPr wrap="square" lIns="0" tIns="0" rIns="0" bIns="0" rtlCol="0" anchor="ctr"/>
-          <a:lstStyle/>
-          <a:p>
-            <a:pPr algn="ctr" indent="0" marL="0">
-              <a:buNone/>
-            </a:pPr>
-            <a:r>
-              <a:rPr lang="en-US" sz="1100" b="1" dirty="0">
-                <a:solidFill>
-                  <a:srgbClr val="475569"/>
-                </a:solidFill>
-                <a:latin typeface="Trebuchet MS" pitchFamily="34" charset="0"/>
-                <a:ea typeface="Trebuchet MS" pitchFamily="34" charset="-122"/>
-                <a:cs typeface="Trebuchet MS" pitchFamily="34" charset="-120"/>
-              </a:rPr>
-              <a:t>Syllables</a:t>
-            </a:r>
-            <a:endParaRPr lang="en-US" sz="1100" dirty="0"/>
-          </a:p>
-        </p:txBody>
-      </p:sp>
-      <p:sp>
-        <p:nvSpPr>
-          <p:cNvPr id="27" name="Shape 25"/>
-          <p:cNvSpPr/>
-          <p:nvPr/>
-        </p:nvSpPr>
-        <p:spPr>
-          <a:xfrm>
-            <a:off x="1874520" y="3273552"/>
-            <a:ext cx="6903720" cy="658368"/>
-          </a:xfrm>
-          <a:prstGeom prst="rect">
-            <a:avLst>
-              <a:gd name="adj" fmla="val 8333"/>
-            </a:avLst>
-          </a:prstGeom>
-          <a:solidFill>
-            <a:srgbClr val="CCFBF1"/>
-          </a:solidFill>
-          <a:ln w="12700">
-            <a:solidFill>
-              <a:srgbClr val="0D9488"/>
-            </a:solidFill>
-            <a:prstDash val="solid"/>
-          </a:ln>
-        </p:spPr>
-      </p:sp>
-      <p:sp>
-        <p:nvSpPr>
-          <p:cNvPr id="28" name="Shape 26"/>
-          <p:cNvSpPr/>
-          <p:nvPr/>
-        </p:nvSpPr>
-        <p:spPr>
-          <a:xfrm>
-            <a:off x="2313432" y="3364992"/>
-            <a:ext cx="1645920" cy="475488"/>
-          </a:xfrm>
-          <a:prstGeom prst="rect">
-            <a:avLst>
-              <a:gd name="adj" fmla="val 9615"/>
-            </a:avLst>
-          </a:prstGeom>
-          <a:solidFill>
-            <a:srgbClr val="FFFFFF"/>
-          </a:solidFill>
-          <a:ln w="12700">
-            <a:solidFill>
-              <a:srgbClr val="0D9488"/>
-            </a:solidFill>
-            <a:prstDash val="solid"/>
-          </a:ln>
-        </p:spPr>
-      </p:sp>
-      <p:sp>
-        <p:nvSpPr>
-          <p:cNvPr id="29" name="Text 27"/>
-          <p:cNvSpPr/>
-          <p:nvPr/>
-        </p:nvSpPr>
-        <p:spPr>
-          <a:xfrm>
-            <a:off x="2313432" y="3364992"/>
-            <a:ext cx="1645920" cy="475488"/>
-          </a:xfrm>
-          <a:prstGeom prst="rect">
-            <a:avLst/>
-          </a:prstGeom>
-          <a:noFill/>
-          <a:ln/>
-        </p:spPr>
-        <p:txBody>
-          <a:bodyPr wrap="square" lIns="0" tIns="0" rIns="0" bIns="0" rtlCol="0" anchor="ctr"/>
-          <a:lstStyle/>
-          <a:p>
-            <a:pPr algn="ctr" indent="0" marL="0">
-              <a:buNone/>
-            </a:pPr>
-            <a:r>
-              <a:rPr lang="en-US" sz="1400" b="1" dirty="0">
-                <a:solidFill>
-                  <a:srgbClr val="0D9488"/>
-                </a:solidFill>
-                <a:latin typeface="Trebuchet MS" pitchFamily="34" charset="0"/>
-                <a:ea typeface="Trebuchet MS" pitchFamily="34" charset="-122"/>
-                <a:cs typeface="Trebuchet MS" pitchFamily="34" charset="-120"/>
-              </a:rPr>
-              <a:t>ad</a:t>
-            </a:r>
-            <a:endParaRPr lang="en-US" sz="1400" dirty="0"/>
-          </a:p>
-        </p:txBody>
-      </p:sp>
-      <p:sp>
-        <p:nvSpPr>
-          <p:cNvPr id="30" name="Text 28"/>
-          <p:cNvSpPr/>
-          <p:nvPr/>
-        </p:nvSpPr>
-        <p:spPr>
-          <a:xfrm>
-            <a:off x="3959352" y="3364992"/>
-            <a:ext cx="411480" cy="475488"/>
-          </a:xfrm>
-          <a:prstGeom prst="rect">
-            <a:avLst/>
-          </a:prstGeom>
-          <a:noFill/>
-          <a:ln/>
-        </p:spPr>
-        <p:txBody>
-          <a:bodyPr wrap="square" lIns="0" tIns="0" rIns="0" bIns="0" rtlCol="0" anchor="ctr"/>
-          <a:lstStyle/>
-          <a:p>
-            <a:pPr algn="ctr" indent="0" marL="0">
-              <a:buNone/>
-            </a:pPr>
-            <a:r>
-              <a:rPr lang="en-US" sz="1600" b="1" dirty="0">
-                <a:solidFill>
-                  <a:srgbClr val="0D9488"/>
-                </a:solidFill>
-                <a:latin typeface="Trebuchet MS" pitchFamily="34" charset="0"/>
-                <a:ea typeface="Trebuchet MS" pitchFamily="34" charset="-122"/>
-                <a:cs typeface="Trebuchet MS" pitchFamily="34" charset="-120"/>
-              </a:rPr>
-              <a:t>·</a:t>
-            </a:r>
-            <a:endParaRPr lang="en-US" sz="1600" dirty="0"/>
-          </a:p>
-        </p:txBody>
-      </p:sp>
-      <p:sp>
-        <p:nvSpPr>
-          <p:cNvPr id="31" name="Shape 29"/>
-          <p:cNvSpPr/>
-          <p:nvPr/>
-        </p:nvSpPr>
-        <p:spPr>
-          <a:xfrm>
-            <a:off x="4370832" y="3364992"/>
-            <a:ext cx="1645920" cy="475488"/>
-          </a:xfrm>
-          <a:prstGeom prst="rect">
-            <a:avLst>
-              <a:gd name="adj" fmla="val 9615"/>
-            </a:avLst>
-          </a:prstGeom>
-          <a:solidFill>
-            <a:srgbClr val="FFFFFF"/>
-          </a:solidFill>
-          <a:ln w="12700">
-            <a:solidFill>
-              <a:srgbClr val="0D9488"/>
-            </a:solidFill>
-            <a:prstDash val="solid"/>
-          </a:ln>
-        </p:spPr>
-      </p:sp>
-      <p:sp>
-        <p:nvSpPr>
-          <p:cNvPr id="32" name="Text 30"/>
-          <p:cNvSpPr/>
-          <p:nvPr/>
-        </p:nvSpPr>
-        <p:spPr>
-          <a:xfrm>
-            <a:off x="4370832" y="3364992"/>
-            <a:ext cx="1645920" cy="475488"/>
-          </a:xfrm>
-          <a:prstGeom prst="rect">
-            <a:avLst/>
-          </a:prstGeom>
-          <a:noFill/>
-          <a:ln/>
-        </p:spPr>
-        <p:txBody>
-          <a:bodyPr wrap="square" lIns="0" tIns="0" rIns="0" bIns="0" rtlCol="0" anchor="ctr"/>
-          <a:lstStyle/>
-          <a:p>
-            <a:pPr algn="ctr" indent="0" marL="0">
-              <a:buNone/>
-            </a:pPr>
-            <a:r>
-              <a:rPr lang="en-US" sz="1400" b="1" dirty="0">
-                <a:solidFill>
-                  <a:srgbClr val="0D9488"/>
-                </a:solidFill>
-                <a:latin typeface="Trebuchet MS" pitchFamily="34" charset="0"/>
-                <a:ea typeface="Trebuchet MS" pitchFamily="34" charset="-122"/>
-                <a:cs typeface="Trebuchet MS" pitchFamily="34" charset="-120"/>
-              </a:rPr>
-              <a:t>ven</a:t>
-            </a:r>
-            <a:endParaRPr lang="en-US" sz="1400" dirty="0"/>
-          </a:p>
-        </p:txBody>
-      </p:sp>
-      <p:sp>
-        <p:nvSpPr>
-          <p:cNvPr id="33" name="Text 31"/>
-          <p:cNvSpPr/>
-          <p:nvPr/>
-        </p:nvSpPr>
-        <p:spPr>
-          <a:xfrm>
-            <a:off x="6016752" y="3364992"/>
-            <a:ext cx="411480" cy="475488"/>
-          </a:xfrm>
-          <a:prstGeom prst="rect">
-            <a:avLst/>
-          </a:prstGeom>
-          <a:noFill/>
-          <a:ln/>
-        </p:spPr>
-        <p:txBody>
-          <a:bodyPr wrap="square" lIns="0" tIns="0" rIns="0" bIns="0" rtlCol="0" anchor="ctr"/>
-          <a:lstStyle/>
-          <a:p>
-            <a:pPr algn="ctr" indent="0" marL="0">
-              <a:buNone/>
-            </a:pPr>
-            <a:r>
-              <a:rPr lang="en-US" sz="1600" b="1" dirty="0">
-                <a:solidFill>
-                  <a:srgbClr val="0D9488"/>
-                </a:solidFill>
-                <a:latin typeface="Trebuchet MS" pitchFamily="34" charset="0"/>
-                <a:ea typeface="Trebuchet MS" pitchFamily="34" charset="-122"/>
-                <a:cs typeface="Trebuchet MS" pitchFamily="34" charset="-120"/>
-              </a:rPr>
-              <a:t>·</a:t>
-            </a:r>
-            <a:endParaRPr lang="en-US" sz="1600" dirty="0"/>
-          </a:p>
-        </p:txBody>
-      </p:sp>
-      <p:sp>
-        <p:nvSpPr>
-          <p:cNvPr id="34" name="Shape 32"/>
-          <p:cNvSpPr/>
-          <p:nvPr/>
-        </p:nvSpPr>
-        <p:spPr>
-          <a:xfrm>
-            <a:off x="6428232" y="3364992"/>
-            <a:ext cx="1645920" cy="475488"/>
-          </a:xfrm>
-          <a:prstGeom prst="rect">
-            <a:avLst>
-              <a:gd name="adj" fmla="val 9615"/>
-            </a:avLst>
-          </a:prstGeom>
-          <a:solidFill>
-            <a:srgbClr val="FFFFFF"/>
-          </a:solidFill>
-          <a:ln w="12700">
-            <a:solidFill>
-              <a:srgbClr val="0D9488"/>
-            </a:solidFill>
-            <a:prstDash val="solid"/>
-          </a:ln>
-        </p:spPr>
-      </p:sp>
-      <p:sp>
-        <p:nvSpPr>
-          <p:cNvPr id="35" name="Text 33"/>
-          <p:cNvSpPr/>
-          <p:nvPr/>
-        </p:nvSpPr>
-        <p:spPr>
-          <a:xfrm>
-            <a:off x="6428232" y="3364992"/>
-            <a:ext cx="1645920" cy="475488"/>
-          </a:xfrm>
-          <a:prstGeom prst="rect">
-            <a:avLst/>
-          </a:prstGeom>
-          <a:noFill/>
-          <a:ln/>
-        </p:spPr>
-        <p:txBody>
-          <a:bodyPr wrap="square" lIns="0" tIns="0" rIns="0" bIns="0" rtlCol="0" anchor="ctr"/>
-          <a:lstStyle/>
-          <a:p>
-            <a:pPr algn="ctr" indent="0" marL="0">
-              <a:buNone/>
-            </a:pPr>
-            <a:r>
-              <a:rPr lang="en-US" sz="1400" b="1" dirty="0">
-                <a:solidFill>
-                  <a:srgbClr val="0D9488"/>
-                </a:solidFill>
-                <a:latin typeface="Trebuchet MS" pitchFamily="34" charset="0"/>
-                <a:ea typeface="Trebuchet MS" pitchFamily="34" charset="-122"/>
-                <a:cs typeface="Trebuchet MS" pitchFamily="34" charset="-120"/>
-              </a:rPr>
-              <a:t>ture</a:t>
-            </a:r>
-            <a:endParaRPr lang="en-US" sz="1400" dirty="0"/>
-          </a:p>
-        </p:txBody>
-      </p:sp>
-      <p:sp>
-        <p:nvSpPr>
-          <p:cNvPr id="36" name="Shape 34"/>
-          <p:cNvSpPr/>
-          <p:nvPr/>
-        </p:nvSpPr>
-        <p:spPr>
-          <a:xfrm>
-            <a:off x="365760" y="4096512"/>
-            <a:ext cx="1371600" cy="804672"/>
-          </a:xfrm>
-          <a:prstGeom prst="rect">
-            <a:avLst>
-              <a:gd name="adj" fmla="val 6818"/>
-            </a:avLst>
-          </a:prstGeom>
-          <a:solidFill>
-            <a:srgbClr val="E2E8F0"/>
-          </a:solidFill>
-          <a:ln w="12700">
-            <a:solidFill>
-              <a:srgbClr val="E2E8F0"/>
-            </a:solidFill>
-            <a:prstDash val="solid"/>
-          </a:ln>
-        </p:spPr>
-      </p:sp>
-      <p:sp>
-        <p:nvSpPr>
-          <p:cNvPr id="37" name="Text 35"/>
-          <p:cNvSpPr/>
-          <p:nvPr/>
-        </p:nvSpPr>
-        <p:spPr>
-          <a:xfrm>
-            <a:off x="365760" y="4096512"/>
-            <a:ext cx="1371600" cy="804672"/>
-          </a:xfrm>
-          <a:prstGeom prst="rect">
-            <a:avLst/>
-          </a:prstGeom>
-          <a:noFill/>
-          <a:ln/>
-        </p:spPr>
-        <p:txBody>
-          <a:bodyPr wrap="square" lIns="0" tIns="0" rIns="0" bIns="0" rtlCol="0" anchor="ctr"/>
-          <a:lstStyle/>
-          <a:p>
-            <a:pPr algn="ctr" indent="0" marL="0">
-              <a:buNone/>
-            </a:pPr>
-            <a:r>
-              <a:rPr lang="en-US" sz="1100" b="1" dirty="0">
-                <a:solidFill>
-                  <a:srgbClr val="475569"/>
-                </a:solidFill>
-                <a:latin typeface="Trebuchet MS" pitchFamily="34" charset="0"/>
-                <a:ea typeface="Trebuchet MS" pitchFamily="34" charset="-122"/>
-                <a:cs typeface="Trebuchet MS" pitchFamily="34" charset="-120"/>
-              </a:rPr>
-              <a:t>Phonemes</a:t>
-            </a:r>
-            <a:endParaRPr lang="en-US" sz="1100" dirty="0"/>
-          </a:p>
-        </p:txBody>
-      </p:sp>
-      <p:sp>
-        <p:nvSpPr>
-          <p:cNvPr id="38" name="Shape 36"/>
-          <p:cNvSpPr/>
-          <p:nvPr/>
-        </p:nvSpPr>
-        <p:spPr>
-          <a:xfrm>
-            <a:off x="1874520" y="4096512"/>
-            <a:ext cx="6903720" cy="658368"/>
-          </a:xfrm>
-          <a:prstGeom prst="rect">
-            <a:avLst>
-              <a:gd name="adj" fmla="val 8333"/>
-            </a:avLst>
-          </a:prstGeom>
-          <a:solidFill>
-            <a:srgbClr val="FCE7F3"/>
-          </a:solidFill>
-          <a:ln w="12700">
-            <a:solidFill>
-              <a:srgbClr val="DB2777"/>
-            </a:solidFill>
-            <a:prstDash val="solid"/>
-          </a:ln>
-        </p:spPr>
-      </p:sp>
-      <p:sp>
-        <p:nvSpPr>
-          <p:cNvPr id="39" name="Shape 37"/>
-          <p:cNvSpPr/>
-          <p:nvPr/>
-        </p:nvSpPr>
-        <p:spPr>
-          <a:xfrm>
-            <a:off x="2124837" y="4169664"/>
-            <a:ext cx="685800" cy="475488"/>
-          </a:xfrm>
-          <a:prstGeom prst="rect">
-            <a:avLst>
-              <a:gd name="adj" fmla="val 7692"/>
-            </a:avLst>
-          </a:prstGeom>
-          <a:solidFill>
-            <a:srgbClr val="FFFFFF"/>
-          </a:solidFill>
-          <a:ln w="12700">
-            <a:solidFill>
-              <a:srgbClr val="DB2777"/>
-            </a:solidFill>
-            <a:prstDash val="solid"/>
-          </a:ln>
-        </p:spPr>
-      </p:sp>
-      <p:sp>
-        <p:nvSpPr>
-          <p:cNvPr id="40" name="Text 38"/>
-          <p:cNvSpPr/>
-          <p:nvPr/>
-        </p:nvSpPr>
-        <p:spPr>
-          <a:xfrm>
-            <a:off x="2124837" y="4169664"/>
-            <a:ext cx="685800" cy="475488"/>
-          </a:xfrm>
-          <a:prstGeom prst="rect">
-            <a:avLst/>
-          </a:prstGeom>
-          <a:noFill/>
-          <a:ln/>
-        </p:spPr>
-        <p:txBody>
-          <a:bodyPr wrap="square" lIns="0" tIns="0" rIns="0" bIns="0" rtlCol="0" anchor="ctr"/>
-          <a:lstStyle/>
-          <a:p>
-            <a:pPr algn="ctr" indent="0" marL="0">
-              <a:buNone/>
-            </a:pPr>
-            <a:r>
-              <a:rPr lang="en-US" sz="900" b="1" dirty="0">
-                <a:solidFill>
-                  <a:srgbClr val="9D174D"/>
-                </a:solidFill>
-                <a:latin typeface="Trebuchet MS" pitchFamily="34" charset="0"/>
-                <a:ea typeface="Trebuchet MS" pitchFamily="34" charset="-122"/>
-                <a:cs typeface="Trebuchet MS" pitchFamily="34" charset="-120"/>
-              </a:rPr>
-              <a:t>a</a:t>
-            </a:r>
-            <a:endParaRPr lang="en-US" sz="900" dirty="0"/>
-          </a:p>
-        </p:txBody>
-      </p:sp>
-      <p:sp>
-        <p:nvSpPr>
-          <p:cNvPr id="41" name="Shape 39"/>
-          <p:cNvSpPr/>
-          <p:nvPr/>
-        </p:nvSpPr>
-        <p:spPr>
-          <a:xfrm>
-            <a:off x="3033522" y="4169664"/>
-            <a:ext cx="685800" cy="475488"/>
-          </a:xfrm>
-          <a:prstGeom prst="rect">
-            <a:avLst>
-              <a:gd name="adj" fmla="val 7692"/>
-            </a:avLst>
-          </a:prstGeom>
-          <a:solidFill>
-            <a:srgbClr val="FFFFFF"/>
-          </a:solidFill>
-          <a:ln w="12700">
-            <a:solidFill>
-              <a:srgbClr val="DB2777"/>
-            </a:solidFill>
-            <a:prstDash val="solid"/>
-          </a:ln>
-        </p:spPr>
-      </p:sp>
-      <p:sp>
-        <p:nvSpPr>
-          <p:cNvPr id="42" name="Text 40"/>
-          <p:cNvSpPr/>
-          <p:nvPr/>
-        </p:nvSpPr>
-        <p:spPr>
-          <a:xfrm>
-            <a:off x="3033522" y="4169664"/>
-            <a:ext cx="685800" cy="475488"/>
-          </a:xfrm>
-          <a:prstGeom prst="rect">
-            <a:avLst/>
-          </a:prstGeom>
-          <a:noFill/>
-          <a:ln/>
-        </p:spPr>
-        <p:txBody>
-          <a:bodyPr wrap="square" lIns="0" tIns="0" rIns="0" bIns="0" rtlCol="0" anchor="ctr"/>
-          <a:lstStyle/>
-          <a:p>
-            <a:pPr algn="ctr" indent="0" marL="0">
-              <a:buNone/>
-            </a:pPr>
-            <a:r>
-              <a:rPr lang="en-US" sz="900" b="1" dirty="0">
-                <a:solidFill>
-                  <a:srgbClr val="9D174D"/>
-                </a:solidFill>
-                <a:latin typeface="Trebuchet MS" pitchFamily="34" charset="0"/>
-                <a:ea typeface="Trebuchet MS" pitchFamily="34" charset="-122"/>
-                <a:cs typeface="Trebuchet MS" pitchFamily="34" charset="-120"/>
-              </a:rPr>
-              <a:t>d</a:t>
-            </a:r>
-            <a:endParaRPr lang="en-US" sz="900" dirty="0"/>
-          </a:p>
-        </p:txBody>
-      </p:sp>
-      <p:sp>
-        <p:nvSpPr>
-          <p:cNvPr id="43" name="Shape 41"/>
-          <p:cNvSpPr/>
-          <p:nvPr/>
-        </p:nvSpPr>
-        <p:spPr>
-          <a:xfrm>
-            <a:off x="3942207" y="4169664"/>
-            <a:ext cx="685800" cy="475488"/>
-          </a:xfrm>
-          <a:prstGeom prst="rect">
-            <a:avLst>
-              <a:gd name="adj" fmla="val 7692"/>
-            </a:avLst>
-          </a:prstGeom>
-          <a:solidFill>
-            <a:srgbClr val="FFFFFF"/>
-          </a:solidFill>
-          <a:ln w="12700">
-            <a:solidFill>
-              <a:srgbClr val="DB2777"/>
-            </a:solidFill>
-            <a:prstDash val="solid"/>
-          </a:ln>
-        </p:spPr>
-      </p:sp>
-      <p:sp>
-        <p:nvSpPr>
-          <p:cNvPr id="44" name="Text 42"/>
-          <p:cNvSpPr/>
-          <p:nvPr/>
-        </p:nvSpPr>
-        <p:spPr>
-          <a:xfrm>
-            <a:off x="3942207" y="4169664"/>
-            <a:ext cx="685800" cy="475488"/>
-          </a:xfrm>
-          <a:prstGeom prst="rect">
-            <a:avLst/>
-          </a:prstGeom>
-          <a:noFill/>
-          <a:ln/>
-        </p:spPr>
-        <p:txBody>
-          <a:bodyPr wrap="square" lIns="0" tIns="0" rIns="0" bIns="0" rtlCol="0" anchor="ctr"/>
-          <a:lstStyle/>
-          <a:p>
-            <a:pPr algn="ctr" indent="0" marL="0">
-              <a:buNone/>
-            </a:pPr>
-            <a:r>
-              <a:rPr lang="en-US" sz="900" b="1" dirty="0">
-                <a:solidFill>
-                  <a:srgbClr val="9D174D"/>
-                </a:solidFill>
-                <a:latin typeface="Trebuchet MS" pitchFamily="34" charset="0"/>
-                <a:ea typeface="Trebuchet MS" pitchFamily="34" charset="-122"/>
-                <a:cs typeface="Trebuchet MS" pitchFamily="34" charset="-120"/>
-              </a:rPr>
-              <a:t>v</a:t>
-            </a:r>
-            <a:endParaRPr lang="en-US" sz="900" dirty="0"/>
-          </a:p>
-        </p:txBody>
-      </p:sp>
-      <p:sp>
-        <p:nvSpPr>
-          <p:cNvPr id="45" name="Shape 43"/>
-          <p:cNvSpPr/>
-          <p:nvPr/>
-        </p:nvSpPr>
-        <p:spPr>
-          <a:xfrm>
-            <a:off x="4850892" y="4169664"/>
-            <a:ext cx="685800" cy="475488"/>
-          </a:xfrm>
-          <a:prstGeom prst="rect">
-            <a:avLst>
-              <a:gd name="adj" fmla="val 7692"/>
-            </a:avLst>
-          </a:prstGeom>
-          <a:solidFill>
-            <a:srgbClr val="FFFFFF"/>
-          </a:solidFill>
-          <a:ln w="12700">
-            <a:solidFill>
-              <a:srgbClr val="DB2777"/>
-            </a:solidFill>
-            <a:prstDash val="solid"/>
-          </a:ln>
-        </p:spPr>
-      </p:sp>
-      <p:sp>
-        <p:nvSpPr>
-          <p:cNvPr id="46" name="Text 44"/>
-          <p:cNvSpPr/>
-          <p:nvPr/>
-        </p:nvSpPr>
-        <p:spPr>
-          <a:xfrm>
-            <a:off x="4850892" y="4169664"/>
-            <a:ext cx="685800" cy="475488"/>
-          </a:xfrm>
-          <a:prstGeom prst="rect">
-            <a:avLst/>
-          </a:prstGeom>
-          <a:noFill/>
-          <a:ln/>
-        </p:spPr>
-        <p:txBody>
-          <a:bodyPr wrap="square" lIns="0" tIns="0" rIns="0" bIns="0" rtlCol="0" anchor="ctr"/>
-          <a:lstStyle/>
-          <a:p>
-            <a:pPr algn="ctr" indent="0" marL="0">
-              <a:buNone/>
-            </a:pPr>
-            <a:r>
-              <a:rPr lang="en-US" sz="900" b="1" dirty="0">
-                <a:solidFill>
-                  <a:srgbClr val="9D174D"/>
-                </a:solidFill>
-                <a:latin typeface="Trebuchet MS" pitchFamily="34" charset="0"/>
-                <a:ea typeface="Trebuchet MS" pitchFamily="34" charset="-122"/>
-                <a:cs typeface="Trebuchet MS" pitchFamily="34" charset="-120"/>
-              </a:rPr>
-              <a:t>e</a:t>
-            </a:r>
-            <a:endParaRPr lang="en-US" sz="900" dirty="0"/>
-          </a:p>
-        </p:txBody>
-      </p:sp>
-      <p:sp>
-        <p:nvSpPr>
-          <p:cNvPr id="47" name="Shape 45"/>
-          <p:cNvSpPr/>
-          <p:nvPr/>
-        </p:nvSpPr>
-        <p:spPr>
-          <a:xfrm>
-            <a:off x="5759577" y="4169664"/>
-            <a:ext cx="685800" cy="475488"/>
-          </a:xfrm>
-          <a:prstGeom prst="rect">
-            <a:avLst>
-              <a:gd name="adj" fmla="val 7692"/>
-            </a:avLst>
-          </a:prstGeom>
-          <a:solidFill>
-            <a:srgbClr val="FFFFFF"/>
-          </a:solidFill>
-          <a:ln w="12700">
-            <a:solidFill>
-              <a:srgbClr val="DB2777"/>
-            </a:solidFill>
-            <a:prstDash val="solid"/>
-          </a:ln>
-        </p:spPr>
-      </p:sp>
-      <p:sp>
-        <p:nvSpPr>
-          <p:cNvPr id="48" name="Text 46"/>
-          <p:cNvSpPr/>
-          <p:nvPr/>
-        </p:nvSpPr>
-        <p:spPr>
-          <a:xfrm>
-            <a:off x="5759577" y="4169664"/>
-            <a:ext cx="685800" cy="475488"/>
-          </a:xfrm>
-          <a:prstGeom prst="rect">
-            <a:avLst/>
-          </a:prstGeom>
-          <a:noFill/>
-          <a:ln/>
-        </p:spPr>
-        <p:txBody>
-          <a:bodyPr wrap="square" lIns="0" tIns="0" rIns="0" bIns="0" rtlCol="0" anchor="ctr"/>
-          <a:lstStyle/>
-          <a:p>
-            <a:pPr algn="ctr" indent="0" marL="0">
-              <a:buNone/>
-            </a:pPr>
-            <a:r>
-              <a:rPr lang="en-US" sz="900" b="1" dirty="0">
-                <a:solidFill>
-                  <a:srgbClr val="9D174D"/>
-                </a:solidFill>
-                <a:latin typeface="Trebuchet MS" pitchFamily="34" charset="0"/>
-                <a:ea typeface="Trebuchet MS" pitchFamily="34" charset="-122"/>
-                <a:cs typeface="Trebuchet MS" pitchFamily="34" charset="-120"/>
-              </a:rPr>
-              <a:t>n</a:t>
-            </a:r>
-            <a:endParaRPr lang="en-US" sz="900" dirty="0"/>
-          </a:p>
-        </p:txBody>
-      </p:sp>
-      <p:sp>
-        <p:nvSpPr>
-          <p:cNvPr id="49" name="Shape 47"/>
-          <p:cNvSpPr/>
-          <p:nvPr/>
-        </p:nvSpPr>
-        <p:spPr>
-          <a:xfrm>
-            <a:off x="6668262" y="4169664"/>
-            <a:ext cx="685800" cy="475488"/>
-          </a:xfrm>
-          <a:prstGeom prst="rect">
-            <a:avLst>
-              <a:gd name="adj" fmla="val 7692"/>
-            </a:avLst>
-          </a:prstGeom>
-          <a:solidFill>
-            <a:srgbClr val="FFFFFF"/>
-          </a:solidFill>
-          <a:ln w="12700">
-            <a:solidFill>
-              <a:srgbClr val="DB2777"/>
-            </a:solidFill>
-            <a:prstDash val="solid"/>
-          </a:ln>
-        </p:spPr>
-      </p:sp>
-      <p:sp>
-        <p:nvSpPr>
-          <p:cNvPr id="50" name="Text 48"/>
-          <p:cNvSpPr/>
-          <p:nvPr/>
-        </p:nvSpPr>
-        <p:spPr>
-          <a:xfrm>
-            <a:off x="6668262" y="4169664"/>
-            <a:ext cx="685800" cy="475488"/>
-          </a:xfrm>
-          <a:prstGeom prst="rect">
-            <a:avLst/>
-          </a:prstGeom>
-          <a:noFill/>
-          <a:ln/>
-        </p:spPr>
-        <p:txBody>
-          <a:bodyPr wrap="square" lIns="0" tIns="0" rIns="0" bIns="0" rtlCol="0" anchor="ctr"/>
-          <a:lstStyle/>
-          <a:p>
-            <a:pPr algn="ctr" indent="0" marL="0">
-              <a:buNone/>
-            </a:pPr>
-            <a:r>
-              <a:rPr lang="en-US" sz="900" b="1" dirty="0">
-                <a:solidFill>
-                  <a:srgbClr val="9D174D"/>
-                </a:solidFill>
-                <a:latin typeface="Trebuchet MS" pitchFamily="34" charset="0"/>
-                <a:ea typeface="Trebuchet MS" pitchFamily="34" charset="-122"/>
-                <a:cs typeface="Trebuchet MS" pitchFamily="34" charset="-120"/>
-              </a:rPr>
-              <a:t>t</a:t>
-            </a:r>
-            <a:endParaRPr lang="en-US" sz="900" dirty="0"/>
-          </a:p>
-        </p:txBody>
-      </p:sp>
-      <p:sp>
-        <p:nvSpPr>
-          <p:cNvPr id="51" name="Shape 49"/>
-          <p:cNvSpPr/>
-          <p:nvPr/>
-        </p:nvSpPr>
-        <p:spPr>
-          <a:xfrm>
-            <a:off x="7576947" y="4169664"/>
-            <a:ext cx="685800" cy="475488"/>
-          </a:xfrm>
-          <a:prstGeom prst="rect">
-            <a:avLst>
-              <a:gd name="adj" fmla="val 7692"/>
-            </a:avLst>
-          </a:prstGeom>
-          <a:solidFill>
-            <a:srgbClr val="FFFFFF"/>
-          </a:solidFill>
-          <a:ln w="12700">
-            <a:solidFill>
-              <a:srgbClr val="DB2777"/>
-            </a:solidFill>
-            <a:prstDash val="solid"/>
-          </a:ln>
-        </p:spPr>
-      </p:sp>
-      <p:sp>
-        <p:nvSpPr>
-          <p:cNvPr id="52" name="Text 50"/>
-          <p:cNvSpPr/>
-          <p:nvPr/>
-        </p:nvSpPr>
-        <p:spPr>
-          <a:xfrm>
-            <a:off x="7576947" y="4169664"/>
-            <a:ext cx="685800" cy="475488"/>
-          </a:xfrm>
-          <a:prstGeom prst="rect">
-            <a:avLst/>
-          </a:prstGeom>
-          <a:noFill/>
-          <a:ln/>
-        </p:spPr>
-        <p:txBody>
-          <a:bodyPr wrap="square" lIns="0" tIns="0" rIns="0" bIns="0" rtlCol="0" anchor="ctr"/>
-          <a:lstStyle/>
-          <a:p>
-            <a:pPr algn="ctr" indent="0" marL="0">
-              <a:buNone/>
-            </a:pPr>
-            <a:r>
-              <a:rPr lang="en-US" sz="900" b="1" dirty="0">
-                <a:solidFill>
-                  <a:srgbClr val="9D174D"/>
-                </a:solidFill>
-                <a:latin typeface="Trebuchet MS" pitchFamily="34" charset="0"/>
-                <a:ea typeface="Trebuchet MS" pitchFamily="34" charset="-122"/>
-                <a:cs typeface="Trebuchet MS" pitchFamily="34" charset="-120"/>
-              </a:rPr>
-              <a:t>ure</a:t>
-            </a:r>
-            <a:endParaRPr lang="en-US" sz="900" dirty="0"/>
+              <a:t>/s/</a:t>
+            </a:r>
+            <a:endParaRPr lang="en-US" sz="750" dirty="0"/>
           </a:p>
         </p:txBody>
       </p:sp>
@@ -16681,7 +16108,7 @@
                 <a:ea typeface="Calibri" pitchFamily="34" charset="-122"/>
                 <a:cs typeface="Calibri" pitchFamily="34" charset="-120"/>
               </a:rPr>
-              <a:t>Word Labs  •  wordlabs.app  •  Prefix: 'ad-' = to, towards, near</a:t>
+              <a:t>Word Labs  •  wordlabs.app  •  Prefix: 'ad-' = to, toward, near</a:t>
             </a:r>
             <a:endParaRPr lang="en-US" sz="800" dirty="0"/>
           </a:p>
@@ -17321,7 +16748,7 @@
                 <a:ea typeface="Calibri" pitchFamily="34" charset="-122"/>
                 <a:cs typeface="Calibri" pitchFamily="34" charset="-120"/>
               </a:rPr>
-              <a:t>Word Labs  •  wordlabs.app  •  Prefix: 'ad-' = to, towards, near</a:t>
+              <a:t>Word Labs  •  wordlabs.app  •  Prefix: 'ad-' = to, toward, near</a:t>
             </a:r>
             <a:endParaRPr lang="en-US" sz="800" dirty="0"/>
           </a:p>
@@ -17433,7 +16860,7 @@
                 <a:ea typeface="Calibri" pitchFamily="34" charset="-122"/>
                 <a:cs typeface="Calibri" pitchFamily="34" charset="-120"/>
               </a:rPr>
-              <a:t>The coach gave us </a:t>
+              <a:t>The team hoped to </a:t>
             </a:r>
             <a:pPr algn="l" indent="0" marL="0">
               <a:buNone/>
@@ -17450,7 +16877,7 @@
                 <a:ea typeface="Calibri" pitchFamily="34" charset="-122"/>
                 <a:cs typeface="Calibri" pitchFamily="34" charset="-120"/>
               </a:rPr>
-              <a:t>advice</a:t>
+              <a:t>admire</a:t>
             </a:r>
             <a:pPr algn="l" indent="0" marL="0">
               <a:buNone/>
@@ -17464,7 +16891,7 @@
                 <a:ea typeface="Calibri" pitchFamily="34" charset="-122"/>
                 <a:cs typeface="Calibri" pitchFamily="34" charset="-120"/>
               </a:rPr>
-              <a:t> on how to </a:t>
+              <a:t> the trophy after their </a:t>
             </a:r>
             <a:pPr algn="l" indent="0" marL="0">
               <a:buNone/>
@@ -17481,7 +16908,7 @@
                 <a:ea typeface="Calibri" pitchFamily="34" charset="-122"/>
                 <a:cs typeface="Calibri" pitchFamily="34" charset="-120"/>
               </a:rPr>
-              <a:t>advance</a:t>
+              <a:t>adoption</a:t>
             </a:r>
             <a:pPr algn="l" indent="0" marL="0">
               <a:buNone/>
@@ -17495,7 +16922,7 @@
                 <a:ea typeface="Calibri" pitchFamily="34" charset="-122"/>
                 <a:cs typeface="Calibri" pitchFamily="34" charset="-120"/>
               </a:rPr>
-              <a:t> our skills, and we all tried to </a:t>
+              <a:t> of a new strategy paid off during the </a:t>
             </a:r>
             <a:pPr algn="l" indent="0" marL="0">
               <a:buNone/>
@@ -17512,7 +16939,7 @@
                 <a:ea typeface="Calibri" pitchFamily="34" charset="-122"/>
                 <a:cs typeface="Calibri" pitchFamily="34" charset="-120"/>
               </a:rPr>
-              <a:t>adopt</a:t>
+              <a:t>adventure</a:t>
             </a:r>
             <a:pPr algn="l" indent="0" marL="0">
               <a:buNone/>
@@ -17526,7 +16953,7 @@
                 <a:ea typeface="Calibri" pitchFamily="34" charset="-122"/>
                 <a:cs typeface="Calibri" pitchFamily="34" charset="-120"/>
               </a:rPr>
-              <a:t> her new training method.</a:t>
+              <a:t>.</a:t>
             </a:r>
             <a:endParaRPr lang="en-US" sz="1800" dirty="0"/>
           </a:p>
@@ -17681,7 +17108,7 @@
                 <a:ea typeface="Trebuchet MS" pitchFamily="34" charset="-122"/>
                 <a:cs typeface="Trebuchet MS" pitchFamily="34" charset="-120"/>
               </a:rPr>
-              <a:t>advice</a:t>
+              <a:t>admire</a:t>
             </a:r>
             <a:endParaRPr lang="en-US" sz="1400" dirty="0"/>
           </a:p>
@@ -17809,7 +17236,7 @@
                 <a:ea typeface="Trebuchet MS" pitchFamily="34" charset="-122"/>
                 <a:cs typeface="Trebuchet MS" pitchFamily="34" charset="-120"/>
               </a:rPr>
-              <a:t>advance</a:t>
+              <a:t>adoption</a:t>
             </a:r>
             <a:endParaRPr lang="en-US" sz="1400" dirty="0"/>
           </a:p>
@@ -17937,7 +17364,7 @@
                 <a:ea typeface="Trebuchet MS" pitchFamily="34" charset="-122"/>
                 <a:cs typeface="Trebuchet MS" pitchFamily="34" charset="-120"/>
               </a:rPr>
-              <a:t>adopt</a:t>
+              <a:t>adventure</a:t>
             </a:r>
             <a:endParaRPr lang="en-US" sz="1400" dirty="0"/>
           </a:p>
@@ -18268,7 +17695,7 @@
                 <a:ea typeface="Calibri" pitchFamily="34" charset="-122"/>
                 <a:cs typeface="Calibri" pitchFamily="34" charset="-120"/>
               </a:rPr>
-              <a:t>Word Labs  •  wordlabs.app  •  Prefix: 'ad-' = to, towards, near</a:t>
+              <a:t>Word Labs  •  wordlabs.app  •  Prefix: 'ad-' = to, toward, near</a:t>
             </a:r>
             <a:endParaRPr lang="en-US" sz="800" dirty="0"/>
           </a:p>
@@ -18407,7 +17834,7 @@
                 <a:ea typeface="Trebuchet MS" pitchFamily="34" charset="-122"/>
                 <a:cs typeface="Trebuchet MS" pitchFamily="34" charset="-120"/>
               </a:rPr>
-              <a:t>advice</a:t>
+              <a:t>admire</a:t>
             </a:r>
             <a:endParaRPr lang="en-US" sz="2800" dirty="0"/>
           </a:p>
@@ -19095,7 +18522,7 @@
                 <a:ea typeface="Calibri" pitchFamily="34" charset="-122"/>
                 <a:cs typeface="Calibri" pitchFamily="34" charset="-120"/>
               </a:rPr>
-              <a:t>Word Labs  •  wordlabs.app  •  Prefix: 'ad-' = to, towards, near</a:t>
+              <a:t>Word Labs  •  wordlabs.app  •  Prefix: 'ad-' = to, toward, near</a:t>
             </a:r>
             <a:endParaRPr lang="en-US" sz="800" dirty="0"/>
           </a:p>
@@ -19234,7 +18661,7 @@
                 <a:ea typeface="Trebuchet MS" pitchFamily="34" charset="-122"/>
                 <a:cs typeface="Trebuchet MS" pitchFamily="34" charset="-120"/>
               </a:rPr>
-              <a:t>advice</a:t>
+              <a:t>admire</a:t>
             </a:r>
             <a:endParaRPr lang="en-US" sz="2800" dirty="0"/>
           </a:p>
@@ -19412,7 +18839,7 @@
                 <a:ea typeface="Calibri" pitchFamily="34" charset="-122"/>
                 <a:cs typeface="Calibri" pitchFamily="34" charset="-120"/>
               </a:rPr>
-              <a:t>to, towards</a:t>
+              <a:t>toward</a:t>
             </a:r>
             <a:endParaRPr lang="en-US" sz="850" dirty="0"/>
           </a:p>
@@ -19485,7 +18912,7 @@
                 <a:ea typeface="Trebuchet MS" pitchFamily="34" charset="-122"/>
                 <a:cs typeface="Trebuchet MS" pitchFamily="34" charset="-120"/>
               </a:rPr>
-              <a:t>vice</a:t>
+              <a:t>mire</a:t>
             </a:r>
             <a:endParaRPr lang="en-US" sz="1300" dirty="0"/>
           </a:p>
@@ -19524,7 +18951,7 @@
                 <a:ea typeface="Calibri" pitchFamily="34" charset="-122"/>
                 <a:cs typeface="Calibri" pitchFamily="34" charset="-120"/>
               </a:rPr>
-              <a:t>see, observe</a:t>
+              <a:t>look, wonder</a:t>
             </a:r>
             <a:endParaRPr lang="en-US" sz="850" dirty="0"/>
           </a:p>
@@ -20080,7 +19507,7 @@
                 <a:ea typeface="Calibri" pitchFamily="34" charset="-122"/>
                 <a:cs typeface="Calibri" pitchFamily="34" charset="-120"/>
               </a:rPr>
-              <a:t>Word Labs  •  wordlabs.app  •  Prefix: 'ad-' = to, towards, near</a:t>
+              <a:t>Word Labs  •  wordlabs.app  •  Prefix: 'ad-' = to, toward, near</a:t>
             </a:r>
             <a:endParaRPr lang="en-US" sz="800" dirty="0"/>
           </a:p>
@@ -20219,7 +19646,7 @@
                 <a:ea typeface="Trebuchet MS" pitchFamily="34" charset="-122"/>
                 <a:cs typeface="Trebuchet MS" pitchFamily="34" charset="-120"/>
               </a:rPr>
-              <a:t>advice</a:t>
+              <a:t>admire</a:t>
             </a:r>
             <a:endParaRPr lang="en-US" sz="2800" dirty="0"/>
           </a:p>
@@ -20397,7 +19824,7 @@
                 <a:ea typeface="Calibri" pitchFamily="34" charset="-122"/>
                 <a:cs typeface="Calibri" pitchFamily="34" charset="-120"/>
               </a:rPr>
-              <a:t>to, towards</a:t>
+              <a:t>toward</a:t>
             </a:r>
             <a:endParaRPr lang="en-US" sz="850" dirty="0"/>
           </a:p>
@@ -20470,7 +19897,7 @@
                 <a:ea typeface="Trebuchet MS" pitchFamily="34" charset="-122"/>
                 <a:cs typeface="Trebuchet MS" pitchFamily="34" charset="-120"/>
               </a:rPr>
-              <a:t>vice</a:t>
+              <a:t>mire</a:t>
             </a:r>
             <a:endParaRPr lang="en-US" sz="1300" dirty="0"/>
           </a:p>
@@ -20509,7 +19936,7 @@
                 <a:ea typeface="Calibri" pitchFamily="34" charset="-122"/>
                 <a:cs typeface="Calibri" pitchFamily="34" charset="-120"/>
               </a:rPr>
-              <a:t>see, observe</a:t>
+              <a:t>look, wonder</a:t>
             </a:r>
             <a:endParaRPr lang="en-US" sz="850" dirty="0"/>
           </a:p>
@@ -20773,7 +20200,7 @@
                 <a:ea typeface="Trebuchet MS" pitchFamily="34" charset="-122"/>
                 <a:cs typeface="Trebuchet MS" pitchFamily="34" charset="-120"/>
               </a:rPr>
-              <a:t>vice</a:t>
+              <a:t>mire</a:t>
             </a:r>
             <a:endParaRPr lang="en-US" sz="1400" dirty="0"/>
           </a:p>
@@ -21197,7 +20624,7 @@
                 <a:ea typeface="Calibri" pitchFamily="34" charset="-122"/>
                 <a:cs typeface="Calibri" pitchFamily="34" charset="-120"/>
               </a:rPr>
-              <a:t>Word Labs  •  wordlabs.app  •  Prefix: 'ad-' = to, towards, near</a:t>
+              <a:t>Word Labs  •  wordlabs.app  •  Prefix: 'ad-' = to, toward, near</a:t>
             </a:r>
             <a:endParaRPr lang="en-US" sz="800" dirty="0"/>
           </a:p>
@@ -21336,7 +20763,7 @@
                 <a:ea typeface="Trebuchet MS" pitchFamily="34" charset="-122"/>
                 <a:cs typeface="Trebuchet MS" pitchFamily="34" charset="-120"/>
               </a:rPr>
-              <a:t>advice</a:t>
+              <a:t>admire</a:t>
             </a:r>
             <a:endParaRPr lang="en-US" sz="2800" dirty="0"/>
           </a:p>
@@ -21514,7 +20941,7 @@
                 <a:ea typeface="Calibri" pitchFamily="34" charset="-122"/>
                 <a:cs typeface="Calibri" pitchFamily="34" charset="-120"/>
               </a:rPr>
-              <a:t>to, towards</a:t>
+              <a:t>toward</a:t>
             </a:r>
             <a:endParaRPr lang="en-US" sz="850" dirty="0"/>
           </a:p>
@@ -21587,7 +21014,7 @@
                 <a:ea typeface="Trebuchet MS" pitchFamily="34" charset="-122"/>
                 <a:cs typeface="Trebuchet MS" pitchFamily="34" charset="-120"/>
               </a:rPr>
-              <a:t>vice</a:t>
+              <a:t>mire</a:t>
             </a:r>
             <a:endParaRPr lang="en-US" sz="1300" dirty="0"/>
           </a:p>
@@ -21626,7 +21053,7 @@
                 <a:ea typeface="Calibri" pitchFamily="34" charset="-122"/>
                 <a:cs typeface="Calibri" pitchFamily="34" charset="-120"/>
               </a:rPr>
-              <a:t>see, observe</a:t>
+              <a:t>look, wonder</a:t>
             </a:r>
             <a:endParaRPr lang="en-US" sz="850" dirty="0"/>
           </a:p>
@@ -21890,7 +21317,7 @@
                 <a:ea typeface="Trebuchet MS" pitchFamily="34" charset="-122"/>
                 <a:cs typeface="Trebuchet MS" pitchFamily="34" charset="-120"/>
               </a:rPr>
-              <a:t>vice</a:t>
+              <a:t>mire</a:t>
             </a:r>
             <a:endParaRPr lang="en-US" sz="1400" dirty="0"/>
           </a:p>
@@ -21971,11 +21398,11 @@
         <p:spPr>
           <a:xfrm>
             <a:off x="1874520" y="4096512"/>
-            <a:ext cx="6903720" cy="804672"/>
+            <a:ext cx="6903720" cy="658368"/>
           </a:xfrm>
           <a:prstGeom prst="rect">
             <a:avLst>
-              <a:gd name="adj" fmla="val 6818"/>
+              <a:gd name="adj" fmla="val 8333"/>
             </a:avLst>
           </a:prstGeom>
           <a:solidFill>
@@ -21998,11 +21425,11 @@
         <p:spPr>
           <a:xfrm>
             <a:off x="2427732" y="4169664"/>
-            <a:ext cx="685800" cy="384048"/>
+            <a:ext cx="685800" cy="475488"/>
           </a:xfrm>
           <a:prstGeom prst="rect">
             <a:avLst>
-              <a:gd name="adj" fmla="val 9524"/>
+              <a:gd name="adj" fmla="val 7692"/>
             </a:avLst>
           </a:prstGeom>
           <a:solidFill>
@@ -22025,7 +21452,7 @@
         <p:spPr>
           <a:xfrm>
             <a:off x="2427732" y="4169664"/>
-            <a:ext cx="685800" cy="384048"/>
+            <a:ext cx="685800" cy="475488"/>
           </a:xfrm>
           <a:prstGeom prst="rect">
             <a:avLst/>
@@ -22064,11 +21491,11 @@
         <p:spPr>
           <a:xfrm>
             <a:off x="3639312" y="4169664"/>
-            <a:ext cx="685800" cy="384048"/>
+            <a:ext cx="685800" cy="475488"/>
           </a:xfrm>
           <a:prstGeom prst="rect">
             <a:avLst>
-              <a:gd name="adj" fmla="val 9524"/>
+              <a:gd name="adj" fmla="val 7692"/>
             </a:avLst>
           </a:prstGeom>
           <a:solidFill>
@@ -22091,7 +21518,7 @@
         <p:spPr>
           <a:xfrm>
             <a:off x="3639312" y="4169664"/>
-            <a:ext cx="685800" cy="384048"/>
+            <a:ext cx="685800" cy="475488"/>
           </a:xfrm>
           <a:prstGeom prst="rect">
             <a:avLst/>
@@ -22130,11 +21557,11 @@
         <p:spPr>
           <a:xfrm>
             <a:off x="4850892" y="4169664"/>
-            <a:ext cx="685800" cy="384048"/>
+            <a:ext cx="685800" cy="475488"/>
           </a:xfrm>
           <a:prstGeom prst="rect">
             <a:avLst>
-              <a:gd name="adj" fmla="val 9524"/>
+              <a:gd name="adj" fmla="val 7692"/>
             </a:avLst>
           </a:prstGeom>
           <a:solidFill>
@@ -22157,7 +21584,7 @@
         <p:spPr>
           <a:xfrm>
             <a:off x="4850892" y="4169664"/>
-            <a:ext cx="685800" cy="384048"/>
+            <a:ext cx="685800" cy="475488"/>
           </a:xfrm>
           <a:prstGeom prst="rect">
             <a:avLst/>
@@ -22181,7 +21608,7 @@
                 <a:ea typeface="Trebuchet MS" pitchFamily="34" charset="-122"/>
                 <a:cs typeface="Trebuchet MS" pitchFamily="34" charset="-120"/>
               </a:rPr>
-              <a:t>v</a:t>
+              <a:t>m</a:t>
             </a:r>
             <a:endParaRPr lang="en-US" sz="900" dirty="0"/>
           </a:p>
@@ -22196,11 +21623,11 @@
         <p:spPr>
           <a:xfrm>
             <a:off x="6062472" y="4169664"/>
-            <a:ext cx="685800" cy="384048"/>
+            <a:ext cx="685800" cy="475488"/>
           </a:xfrm>
           <a:prstGeom prst="rect">
             <a:avLst>
-              <a:gd name="adj" fmla="val 9524"/>
+              <a:gd name="adj" fmla="val 7692"/>
             </a:avLst>
           </a:prstGeom>
           <a:solidFill>
@@ -22223,7 +21650,7 @@
         <p:spPr>
           <a:xfrm>
             <a:off x="6062472" y="4169664"/>
-            <a:ext cx="685800" cy="384048"/>
+            <a:ext cx="685800" cy="475488"/>
           </a:xfrm>
           <a:prstGeom prst="rect">
             <a:avLst/>
@@ -22262,11 +21689,11 @@
         <p:spPr>
           <a:xfrm>
             <a:off x="7274052" y="4169664"/>
-            <a:ext cx="685800" cy="384048"/>
+            <a:ext cx="685800" cy="475488"/>
           </a:xfrm>
           <a:prstGeom prst="rect">
             <a:avLst>
-              <a:gd name="adj" fmla="val 9524"/>
+              <a:gd name="adj" fmla="val 7692"/>
             </a:avLst>
           </a:prstGeom>
           <a:solidFill>
@@ -22289,7 +21716,7 @@
         <p:spPr>
           <a:xfrm>
             <a:off x="7274052" y="4169664"/>
-            <a:ext cx="685800" cy="384048"/>
+            <a:ext cx="685800" cy="475488"/>
           </a:xfrm>
           <a:prstGeom prst="rect">
             <a:avLst/>
@@ -22313,48 +21740,9 @@
                 <a:ea typeface="Trebuchet MS" pitchFamily="34" charset="-122"/>
                 <a:cs typeface="Trebuchet MS" pitchFamily="34" charset="-120"/>
               </a:rPr>
-              <a:t>ce</a:t>
+              <a:t>re</a:t>
             </a:r>
             <a:endParaRPr lang="en-US" sz="900" dirty="0"/>
-          </a:p>
-        </p:txBody>
-      </p:sp>
-      <p:sp>
-        <p:nvSpPr>
-          <p:cNvPr id="43" name="Text 41"/>
-          <p:cNvSpPr/>
-          <p:nvPr/>
-        </p:nvSpPr>
-        <p:spPr>
-          <a:xfrm>
-            <a:off x="7274052" y="4572000"/>
-            <a:ext cx="685800" cy="219456"/>
-          </a:xfrm>
-          <a:prstGeom prst="rect">
-            <a:avLst/>
-          </a:prstGeom>
-          <a:noFill/>
-          <a:ln/>
-        </p:spPr>
-        <p:txBody>
-          <a:bodyPr wrap="square" lIns="0" tIns="0" rIns="0" bIns="0" rtlCol="0" anchor="t"/>
-          <a:lstStyle/>
-          <a:p>
-            <a:pPr algn="ctr" indent="0" marL="0">
-              <a:buNone/>
-            </a:pPr>
-            <a:r>
-              <a:rPr lang="en-US" sz="750" i="1" dirty="0">
-                <a:solidFill>
-                  <a:srgbClr val="94A3B8"/>
-                </a:solidFill>
-                <a:latin typeface="Calibri" pitchFamily="34" charset="0"/>
-                <a:ea typeface="Calibri" pitchFamily="34" charset="-122"/>
-                <a:cs typeface="Calibri" pitchFamily="34" charset="-120"/>
-              </a:rPr>
-              <a:t>/s/</a:t>
-            </a:r>
-            <a:endParaRPr lang="en-US" sz="750" dirty="0"/>
           </a:p>
         </p:txBody>
       </p:sp>
@@ -22644,7 +22032,7 @@
                 <a:ea typeface="Calibri" pitchFamily="34" charset="-122"/>
                 <a:cs typeface="Calibri" pitchFamily="34" charset="-120"/>
               </a:rPr>
-              <a:t>Word Labs  •  wordlabs.app  •  Prefix: 'ad-' = to, towards, near</a:t>
+              <a:t>Word Labs  •  wordlabs.app  •  Prefix: 'ad-' = to, toward, near</a:t>
             </a:r>
             <a:endParaRPr lang="en-US" sz="800" dirty="0"/>
           </a:p>
@@ -22783,7 +22171,7 @@
                 <a:ea typeface="Trebuchet MS" pitchFamily="34" charset="-122"/>
                 <a:cs typeface="Trebuchet MS" pitchFamily="34" charset="-120"/>
               </a:rPr>
-              <a:t>advance</a:t>
+              <a:t>adoption</a:t>
             </a:r>
             <a:endParaRPr lang="en-US" sz="2800" dirty="0"/>
           </a:p>
@@ -23471,7 +22859,7 @@
                 <a:ea typeface="Calibri" pitchFamily="34" charset="-122"/>
                 <a:cs typeface="Calibri" pitchFamily="34" charset="-120"/>
               </a:rPr>
-              <a:t>Word Labs  •  wordlabs.app  •  Prefix: 'ad-' = to, towards, near</a:t>
+              <a:t>Word Labs  •  wordlabs.app  •  Prefix: 'ad-' = to, toward, near</a:t>
             </a:r>
             <a:endParaRPr lang="en-US" sz="800" dirty="0"/>
           </a:p>
@@ -23610,7 +22998,7 @@
                 <a:ea typeface="Trebuchet MS" pitchFamily="34" charset="-122"/>
                 <a:cs typeface="Trebuchet MS" pitchFamily="34" charset="-120"/>
               </a:rPr>
-              <a:t>advance</a:t>
+              <a:t>adoption</a:t>
             </a:r>
             <a:endParaRPr lang="en-US" sz="2800" dirty="0"/>
           </a:p>
@@ -23690,7 +23078,7 @@
         </p:nvSpPr>
         <p:spPr>
           <a:xfrm>
-            <a:off x="2938272" y="2258568"/>
+            <a:off x="2221992" y="2258568"/>
             <a:ext cx="1828800" cy="292608"/>
           </a:xfrm>
           <a:prstGeom prst="rect">
@@ -23724,7 +23112,7 @@
         </p:nvSpPr>
         <p:spPr>
           <a:xfrm>
-            <a:off x="2938272" y="2258568"/>
+            <a:off x="2221992" y="2258568"/>
             <a:ext cx="1828800" cy="292608"/>
           </a:xfrm>
           <a:prstGeom prst="rect">
@@ -23763,7 +23151,7 @@
         </p:nvSpPr>
         <p:spPr>
           <a:xfrm>
-            <a:off x="2938272" y="2569464"/>
+            <a:off x="2221992" y="2569464"/>
             <a:ext cx="1828800" cy="201168"/>
           </a:xfrm>
           <a:prstGeom prst="rect">
@@ -23788,7 +23176,7 @@
                 <a:ea typeface="Calibri" pitchFamily="34" charset="-122"/>
                 <a:cs typeface="Calibri" pitchFamily="34" charset="-120"/>
               </a:rPr>
-              <a:t>to, towards</a:t>
+              <a:t>toward</a:t>
             </a:r>
             <a:endParaRPr lang="en-US" sz="850" dirty="0"/>
           </a:p>
@@ -23802,7 +23190,7 @@
         </p:nvSpPr>
         <p:spPr>
           <a:xfrm>
-            <a:off x="5803392" y="2258568"/>
+            <a:off x="4370832" y="2258568"/>
             <a:ext cx="1828800" cy="292608"/>
           </a:xfrm>
           <a:prstGeom prst="rect">
@@ -23836,7 +23224,7 @@
         </p:nvSpPr>
         <p:spPr>
           <a:xfrm>
-            <a:off x="5803392" y="2258568"/>
+            <a:off x="4370832" y="2258568"/>
             <a:ext cx="1828800" cy="292608"/>
           </a:xfrm>
           <a:prstGeom prst="rect">
@@ -23861,7 +23249,7 @@
                 <a:ea typeface="Trebuchet MS" pitchFamily="34" charset="-122"/>
                 <a:cs typeface="Trebuchet MS" pitchFamily="34" charset="-120"/>
               </a:rPr>
-              <a:t>vance</a:t>
+              <a:t>opt</a:t>
             </a:r>
             <a:endParaRPr lang="en-US" sz="1300" dirty="0"/>
           </a:p>
@@ -23875,7 +23263,7 @@
         </p:nvSpPr>
         <p:spPr>
           <a:xfrm>
-            <a:off x="5803392" y="2569464"/>
+            <a:off x="4370832" y="2569464"/>
             <a:ext cx="1828800" cy="201168"/>
           </a:xfrm>
           <a:prstGeom prst="rect">
@@ -23900,7 +23288,7 @@
                 <a:ea typeface="Calibri" pitchFamily="34" charset="-122"/>
                 <a:cs typeface="Calibri" pitchFamily="34" charset="-120"/>
               </a:rPr>
-              <a:t>go forward</a:t>
+              <a:t>choose</a:t>
             </a:r>
             <a:endParaRPr lang="en-US" sz="850" dirty="0"/>
           </a:p>
@@ -23909,6 +23297,118 @@
       <p:sp>
         <p:nvSpPr>
           <p:cNvPr id="22" name="Shape 20"/>
+          <p:cNvSpPr/>
+          <p:nvPr/>
+        </p:nvSpPr>
+        <p:spPr>
+          <a:xfrm>
+            <a:off x="6519672" y="2258568"/>
+            <a:ext cx="1828800" cy="292608"/>
+          </a:xfrm>
+          <a:prstGeom prst="rect">
+            <a:avLst>
+              <a:gd name="adj" fmla="val 25000"/>
+            </a:avLst>
+          </a:prstGeom>
+          <a:solidFill>
+            <a:srgbClr val="FCE7F3"/>
+          </a:solidFill>
+          <a:ln w="19050">
+            <a:solidFill>
+              <a:srgbClr val="DB2777"/>
+            </a:solidFill>
+            <a:prstDash val="solid"/>
+          </a:ln>
+          <a:effectLst>
+            <a:outerShdw sx="100000" sy="100000" kx="0" ky="0" algn="bl" rotWithShape="0" blurRad="101600" dist="38100" dir="8100000">
+              <a:srgbClr val="000000">
+                <a:alpha val="12000"/>
+              </a:srgbClr>
+            </a:outerShdw>
+          </a:effectLst>
+        </p:spPr>
+      </p:sp>
+      <p:sp>
+        <p:nvSpPr>
+          <p:cNvPr id="23" name="Text 21"/>
+          <p:cNvSpPr/>
+          <p:nvPr/>
+        </p:nvSpPr>
+        <p:spPr>
+          <a:xfrm>
+            <a:off x="6519672" y="2258568"/>
+            <a:ext cx="1828800" cy="292608"/>
+          </a:xfrm>
+          <a:prstGeom prst="rect">
+            <a:avLst/>
+          </a:prstGeom>
+          <a:noFill/>
+          <a:ln/>
+        </p:spPr>
+        <p:txBody>
+          <a:bodyPr wrap="square" lIns="0" tIns="0" rIns="0" bIns="0" rtlCol="0" anchor="ctr"/>
+          <a:lstStyle/>
+          <a:p>
+            <a:pPr algn="ctr" indent="0" marL="0">
+              <a:buNone/>
+            </a:pPr>
+            <a:r>
+              <a:rPr lang="en-US" sz="1300" b="1" dirty="0">
+                <a:solidFill>
+                  <a:srgbClr val="9D174D"/>
+                </a:solidFill>
+                <a:latin typeface="Trebuchet MS" pitchFamily="34" charset="0"/>
+                <a:ea typeface="Trebuchet MS" pitchFamily="34" charset="-122"/>
+                <a:cs typeface="Trebuchet MS" pitchFamily="34" charset="-120"/>
+              </a:rPr>
+              <a:t>ion</a:t>
+            </a:r>
+            <a:endParaRPr lang="en-US" sz="1300" dirty="0"/>
+          </a:p>
+        </p:txBody>
+      </p:sp>
+      <p:sp>
+        <p:nvSpPr>
+          <p:cNvPr id="24" name="Text 22"/>
+          <p:cNvSpPr/>
+          <p:nvPr/>
+        </p:nvSpPr>
+        <p:spPr>
+          <a:xfrm>
+            <a:off x="6519672" y="2569464"/>
+            <a:ext cx="1828800" cy="201168"/>
+          </a:xfrm>
+          <a:prstGeom prst="rect">
+            <a:avLst/>
+          </a:prstGeom>
+          <a:noFill/>
+          <a:ln/>
+        </p:spPr>
+        <p:txBody>
+          <a:bodyPr wrap="square" lIns="0" tIns="0" rIns="0" bIns="0" rtlCol="0" anchor="t"/>
+          <a:lstStyle/>
+          <a:p>
+            <a:pPr algn="ctr" indent="0" marL="0">
+              <a:buNone/>
+            </a:pPr>
+            <a:r>
+              <a:rPr lang="en-US" sz="850" dirty="0">
+                <a:solidFill>
+                  <a:srgbClr val="475569"/>
+                </a:solidFill>
+                <a:latin typeface="Calibri" pitchFamily="34" charset="0"/>
+                <a:ea typeface="Calibri" pitchFamily="34" charset="-122"/>
+                <a:cs typeface="Calibri" pitchFamily="34" charset="-120"/>
+              </a:rPr>
+              <a:t>act or process of</a:t>
+            </a:r>
+            <a:endParaRPr lang="en-US" sz="850" dirty="0"/>
+          </a:p>
+        </p:txBody>
+      </p:sp>
+      <p:sp>
+        <p:nvSpPr>
+          <p:cNvPr id="25" name="Shape 23"/>
           <p:cNvSpPr/>
           <p:nvPr/>
         </p:nvSpPr>
@@ -23935,7 +23435,7 @@
       </p:sp>
       <p:sp>
         <p:nvSpPr>
-          <p:cNvPr id="23" name="Text 21"/>
+          <p:cNvPr id="26" name="Text 24"/>
           <p:cNvSpPr/>
           <p:nvPr/>
         </p:nvSpPr>
@@ -23974,7 +23474,7 @@
       </p:sp>
       <p:sp>
         <p:nvSpPr>
-          <p:cNvPr id="24" name="Shape 22"/>
+          <p:cNvPr id="27" name="Shape 25"/>
           <p:cNvSpPr/>
           <p:nvPr/>
         </p:nvSpPr>
@@ -24001,7 +23501,7 @@
       </p:sp>
       <p:sp>
         <p:nvSpPr>
-          <p:cNvPr id="25" name="Text 23"/>
+          <p:cNvPr id="28" name="Text 26"/>
           <p:cNvSpPr/>
           <p:nvPr/>
         </p:nvSpPr>
@@ -24040,7 +23540,7 @@
       </p:sp>
       <p:sp>
         <p:nvSpPr>
-          <p:cNvPr id="26" name="Shape 24"/>
+          <p:cNvPr id="29" name="Shape 27"/>
           <p:cNvSpPr/>
           <p:nvPr/>
         </p:nvSpPr>
@@ -24067,7 +23567,7 @@
       </p:sp>
       <p:sp>
         <p:nvSpPr>
-          <p:cNvPr id="27" name="Text 25"/>
+          <p:cNvPr id="30" name="Text 28"/>
           <p:cNvSpPr/>
           <p:nvPr/>
         </p:nvSpPr>
@@ -24106,7 +23606,7 @@
       </p:sp>
       <p:sp>
         <p:nvSpPr>
-          <p:cNvPr id="28" name="Shape 26"/>
+          <p:cNvPr id="31" name="Shape 29"/>
           <p:cNvSpPr/>
           <p:nvPr/>
         </p:nvSpPr>
@@ -24133,7 +23633,7 @@
       </p:sp>
       <p:sp>
         <p:nvSpPr>
-          <p:cNvPr id="29" name="Text 27"/>
+          <p:cNvPr id="32" name="Text 30"/>
           <p:cNvSpPr/>
           <p:nvPr/>
         </p:nvSpPr>
@@ -24456,7 +23956,7 @@
                 <a:ea typeface="Calibri" pitchFamily="34" charset="-122"/>
                 <a:cs typeface="Calibri" pitchFamily="34" charset="-120"/>
               </a:rPr>
-              <a:t>Word Labs  •  wordlabs.app  •  Prefix: 'ad-' = to, towards, near</a:t>
+              <a:t>Word Labs  •  wordlabs.app  •  Prefix: 'ad-' = to, toward, near</a:t>
             </a:r>
             <a:endParaRPr lang="en-US" sz="800" dirty="0"/>
           </a:p>
@@ -24529,7 +24029,7 @@
                 <a:ea typeface="Trebuchet MS" pitchFamily="34" charset="-122"/>
                 <a:cs typeface="Trebuchet MS" pitchFamily="34" charset="-120"/>
               </a:rPr>
-              <a:t>We are learning that the prefix 'ad-' means 'to, towards, near'.</a:t>
+              <a:t>We are learning that the prefix 'ad-' means 'to, toward, near'.</a:t>
             </a:r>
             <a:endParaRPr lang="en-US" sz="2000" dirty="0"/>
           </a:p>
@@ -25175,7 +24675,7 @@
                 <a:ea typeface="Calibri" pitchFamily="34" charset="-122"/>
                 <a:cs typeface="Calibri" pitchFamily="34" charset="-120"/>
               </a:rPr>
-              <a:t>Word Labs  •  wordlabs.app  •  Prefix: 'ad-' = to, towards, near</a:t>
+              <a:t>Word Labs  •  wordlabs.app  •  Prefix: 'ad-' = to, toward, near</a:t>
             </a:r>
             <a:endParaRPr lang="en-US" sz="800" dirty="0"/>
           </a:p>
@@ -25314,7 +24814,7 @@
                 <a:ea typeface="Trebuchet MS" pitchFamily="34" charset="-122"/>
                 <a:cs typeface="Trebuchet MS" pitchFamily="34" charset="-120"/>
               </a:rPr>
-              <a:t>advance</a:t>
+              <a:t>adoption</a:t>
             </a:r>
             <a:endParaRPr lang="en-US" sz="2800" dirty="0"/>
           </a:p>
@@ -25394,7 +24894,7 @@
         </p:nvSpPr>
         <p:spPr>
           <a:xfrm>
-            <a:off x="2938272" y="2258568"/>
+            <a:off x="2221992" y="2258568"/>
             <a:ext cx="1828800" cy="292608"/>
           </a:xfrm>
           <a:prstGeom prst="rect">
@@ -25428,7 +24928,7 @@
         </p:nvSpPr>
         <p:spPr>
           <a:xfrm>
-            <a:off x="2938272" y="2258568"/>
+            <a:off x="2221992" y="2258568"/>
             <a:ext cx="1828800" cy="292608"/>
           </a:xfrm>
           <a:prstGeom prst="rect">
@@ -25467,7 +24967,7 @@
         </p:nvSpPr>
         <p:spPr>
           <a:xfrm>
-            <a:off x="2938272" y="2569464"/>
+            <a:off x="2221992" y="2569464"/>
             <a:ext cx="1828800" cy="201168"/>
           </a:xfrm>
           <a:prstGeom prst="rect">
@@ -25492,7 +24992,7 @@
                 <a:ea typeface="Calibri" pitchFamily="34" charset="-122"/>
                 <a:cs typeface="Calibri" pitchFamily="34" charset="-120"/>
               </a:rPr>
-              <a:t>to, towards</a:t>
+              <a:t>toward</a:t>
             </a:r>
             <a:endParaRPr lang="en-US" sz="850" dirty="0"/>
           </a:p>
@@ -25506,7 +25006,7 @@
         </p:nvSpPr>
         <p:spPr>
           <a:xfrm>
-            <a:off x="5803392" y="2258568"/>
+            <a:off x="4370832" y="2258568"/>
             <a:ext cx="1828800" cy="292608"/>
           </a:xfrm>
           <a:prstGeom prst="rect">
@@ -25540,7 +25040,7 @@
         </p:nvSpPr>
         <p:spPr>
           <a:xfrm>
-            <a:off x="5803392" y="2258568"/>
+            <a:off x="4370832" y="2258568"/>
             <a:ext cx="1828800" cy="292608"/>
           </a:xfrm>
           <a:prstGeom prst="rect">
@@ -25565,7 +25065,7 @@
                 <a:ea typeface="Trebuchet MS" pitchFamily="34" charset="-122"/>
                 <a:cs typeface="Trebuchet MS" pitchFamily="34" charset="-120"/>
               </a:rPr>
-              <a:t>vance</a:t>
+              <a:t>opt</a:t>
             </a:r>
             <a:endParaRPr lang="en-US" sz="1300" dirty="0"/>
           </a:p>
@@ -25579,7 +25079,7 @@
         </p:nvSpPr>
         <p:spPr>
           <a:xfrm>
-            <a:off x="5803392" y="2569464"/>
+            <a:off x="4370832" y="2569464"/>
             <a:ext cx="1828800" cy="201168"/>
           </a:xfrm>
           <a:prstGeom prst="rect">
@@ -25604,7 +25104,7 @@
                 <a:ea typeface="Calibri" pitchFamily="34" charset="-122"/>
                 <a:cs typeface="Calibri" pitchFamily="34" charset="-120"/>
               </a:rPr>
-              <a:t>go forward</a:t>
+              <a:t>choose</a:t>
             </a:r>
             <a:endParaRPr lang="en-US" sz="850" dirty="0"/>
           </a:p>
@@ -25613,6 +25113,118 @@
       <p:sp>
         <p:nvSpPr>
           <p:cNvPr id="22" name="Shape 20"/>
+          <p:cNvSpPr/>
+          <p:nvPr/>
+        </p:nvSpPr>
+        <p:spPr>
+          <a:xfrm>
+            <a:off x="6519672" y="2258568"/>
+            <a:ext cx="1828800" cy="292608"/>
+          </a:xfrm>
+          <a:prstGeom prst="rect">
+            <a:avLst>
+              <a:gd name="adj" fmla="val 25000"/>
+            </a:avLst>
+          </a:prstGeom>
+          <a:solidFill>
+            <a:srgbClr val="FCE7F3"/>
+          </a:solidFill>
+          <a:ln w="19050">
+            <a:solidFill>
+              <a:srgbClr val="DB2777"/>
+            </a:solidFill>
+            <a:prstDash val="solid"/>
+          </a:ln>
+          <a:effectLst>
+            <a:outerShdw sx="100000" sy="100000" kx="0" ky="0" algn="bl" rotWithShape="0" blurRad="101600" dist="38100" dir="8100000">
+              <a:srgbClr val="000000">
+                <a:alpha val="12000"/>
+              </a:srgbClr>
+            </a:outerShdw>
+          </a:effectLst>
+        </p:spPr>
+      </p:sp>
+      <p:sp>
+        <p:nvSpPr>
+          <p:cNvPr id="23" name="Text 21"/>
+          <p:cNvSpPr/>
+          <p:nvPr/>
+        </p:nvSpPr>
+        <p:spPr>
+          <a:xfrm>
+            <a:off x="6519672" y="2258568"/>
+            <a:ext cx="1828800" cy="292608"/>
+          </a:xfrm>
+          <a:prstGeom prst="rect">
+            <a:avLst/>
+          </a:prstGeom>
+          <a:noFill/>
+          <a:ln/>
+        </p:spPr>
+        <p:txBody>
+          <a:bodyPr wrap="square" lIns="0" tIns="0" rIns="0" bIns="0" rtlCol="0" anchor="ctr"/>
+          <a:lstStyle/>
+          <a:p>
+            <a:pPr algn="ctr" indent="0" marL="0">
+              <a:buNone/>
+            </a:pPr>
+            <a:r>
+              <a:rPr lang="en-US" sz="1300" b="1" dirty="0">
+                <a:solidFill>
+                  <a:srgbClr val="9D174D"/>
+                </a:solidFill>
+                <a:latin typeface="Trebuchet MS" pitchFamily="34" charset="0"/>
+                <a:ea typeface="Trebuchet MS" pitchFamily="34" charset="-122"/>
+                <a:cs typeface="Trebuchet MS" pitchFamily="34" charset="-120"/>
+              </a:rPr>
+              <a:t>ion</a:t>
+            </a:r>
+            <a:endParaRPr lang="en-US" sz="1300" dirty="0"/>
+          </a:p>
+        </p:txBody>
+      </p:sp>
+      <p:sp>
+        <p:nvSpPr>
+          <p:cNvPr id="24" name="Text 22"/>
+          <p:cNvSpPr/>
+          <p:nvPr/>
+        </p:nvSpPr>
+        <p:spPr>
+          <a:xfrm>
+            <a:off x="6519672" y="2569464"/>
+            <a:ext cx="1828800" cy="201168"/>
+          </a:xfrm>
+          <a:prstGeom prst="rect">
+            <a:avLst/>
+          </a:prstGeom>
+          <a:noFill/>
+          <a:ln/>
+        </p:spPr>
+        <p:txBody>
+          <a:bodyPr wrap="square" lIns="0" tIns="0" rIns="0" bIns="0" rtlCol="0" anchor="t"/>
+          <a:lstStyle/>
+          <a:p>
+            <a:pPr algn="ctr" indent="0" marL="0">
+              <a:buNone/>
+            </a:pPr>
+            <a:r>
+              <a:rPr lang="en-US" sz="850" dirty="0">
+                <a:solidFill>
+                  <a:srgbClr val="475569"/>
+                </a:solidFill>
+                <a:latin typeface="Calibri" pitchFamily="34" charset="0"/>
+                <a:ea typeface="Calibri" pitchFamily="34" charset="-122"/>
+                <a:cs typeface="Calibri" pitchFamily="34" charset="-120"/>
+              </a:rPr>
+              <a:t>act or process of</a:t>
+            </a:r>
+            <a:endParaRPr lang="en-US" sz="850" dirty="0"/>
+          </a:p>
+        </p:txBody>
+      </p:sp>
+      <p:sp>
+        <p:nvSpPr>
+          <p:cNvPr id="25" name="Shape 23"/>
           <p:cNvSpPr/>
           <p:nvPr/>
         </p:nvSpPr>
@@ -25639,7 +25251,7 @@
       </p:sp>
       <p:sp>
         <p:nvSpPr>
-          <p:cNvPr id="23" name="Text 21"/>
+          <p:cNvPr id="26" name="Text 24"/>
           <p:cNvSpPr/>
           <p:nvPr/>
         </p:nvSpPr>
@@ -25678,7 +25290,7 @@
       </p:sp>
       <p:sp>
         <p:nvSpPr>
-          <p:cNvPr id="24" name="Shape 22"/>
+          <p:cNvPr id="27" name="Shape 25"/>
           <p:cNvSpPr/>
           <p:nvPr/>
         </p:nvSpPr>
@@ -25705,13 +25317,13 @@
       </p:sp>
       <p:sp>
         <p:nvSpPr>
-          <p:cNvPr id="25" name="Shape 23"/>
-          <p:cNvSpPr/>
-          <p:nvPr/>
-        </p:nvSpPr>
-        <p:spPr>
-          <a:xfrm>
-            <a:off x="2999232" y="3364992"/>
+          <p:cNvPr id="28" name="Shape 26"/>
+          <p:cNvSpPr/>
+          <p:nvPr/>
+        </p:nvSpPr>
+        <p:spPr>
+          <a:xfrm>
+            <a:off x="2313432" y="3364992"/>
             <a:ext cx="1645920" cy="475488"/>
           </a:xfrm>
           <a:prstGeom prst="rect">
@@ -25732,13 +25344,13 @@
       </p:sp>
       <p:sp>
         <p:nvSpPr>
-          <p:cNvPr id="26" name="Text 24"/>
-          <p:cNvSpPr/>
-          <p:nvPr/>
-        </p:nvSpPr>
-        <p:spPr>
-          <a:xfrm>
-            <a:off x="2999232" y="3364992"/>
+          <p:cNvPr id="29" name="Text 27"/>
+          <p:cNvSpPr/>
+          <p:nvPr/>
+        </p:nvSpPr>
+        <p:spPr>
+          <a:xfrm>
+            <a:off x="2313432" y="3364992"/>
             <a:ext cx="1645920" cy="475488"/>
           </a:xfrm>
           <a:prstGeom prst="rect">
@@ -25763,7 +25375,7 @@
                 <a:ea typeface="Trebuchet MS" pitchFamily="34" charset="-122"/>
                 <a:cs typeface="Trebuchet MS" pitchFamily="34" charset="-120"/>
               </a:rPr>
-              <a:t>ad</a:t>
+              <a:t>a</a:t>
             </a:r>
             <a:endParaRPr lang="en-US" sz="1400" dirty="0"/>
           </a:p>
@@ -25771,14 +25383,14 @@
       </p:sp>
       <p:sp>
         <p:nvSpPr>
-          <p:cNvPr id="27" name="Text 25"/>
-          <p:cNvSpPr/>
-          <p:nvPr/>
-        </p:nvSpPr>
-        <p:spPr>
-          <a:xfrm>
-            <a:off x="4645152" y="3364992"/>
-            <a:ext cx="1097280" cy="475488"/>
+          <p:cNvPr id="30" name="Text 28"/>
+          <p:cNvSpPr/>
+          <p:nvPr/>
+        </p:nvSpPr>
+        <p:spPr>
+          <a:xfrm>
+            <a:off x="3959352" y="3364992"/>
+            <a:ext cx="411480" cy="475488"/>
           </a:xfrm>
           <a:prstGeom prst="rect">
             <a:avLst/>
@@ -25810,13 +25422,13 @@
       </p:sp>
       <p:sp>
         <p:nvSpPr>
-          <p:cNvPr id="28" name="Shape 26"/>
-          <p:cNvSpPr/>
-          <p:nvPr/>
-        </p:nvSpPr>
-        <p:spPr>
-          <a:xfrm>
-            <a:off x="5742432" y="3364992"/>
+          <p:cNvPr id="31" name="Shape 29"/>
+          <p:cNvSpPr/>
+          <p:nvPr/>
+        </p:nvSpPr>
+        <p:spPr>
+          <a:xfrm>
+            <a:off x="4370832" y="3364992"/>
             <a:ext cx="1645920" cy="475488"/>
           </a:xfrm>
           <a:prstGeom prst="rect">
@@ -25837,13 +25449,13 @@
       </p:sp>
       <p:sp>
         <p:nvSpPr>
-          <p:cNvPr id="29" name="Text 27"/>
-          <p:cNvSpPr/>
-          <p:nvPr/>
-        </p:nvSpPr>
-        <p:spPr>
-          <a:xfrm>
-            <a:off x="5742432" y="3364992"/>
+          <p:cNvPr id="32" name="Text 30"/>
+          <p:cNvSpPr/>
+          <p:nvPr/>
+        </p:nvSpPr>
+        <p:spPr>
+          <a:xfrm>
+            <a:off x="4370832" y="3364992"/>
             <a:ext cx="1645920" cy="475488"/>
           </a:xfrm>
           <a:prstGeom prst="rect">
@@ -25868,7 +25480,7 @@
                 <a:ea typeface="Trebuchet MS" pitchFamily="34" charset="-122"/>
                 <a:cs typeface="Trebuchet MS" pitchFamily="34" charset="-120"/>
               </a:rPr>
-              <a:t>vance</a:t>
+              <a:t>dop</a:t>
             </a:r>
             <a:endParaRPr lang="en-US" sz="1400" dirty="0"/>
           </a:p>
@@ -25876,7 +25488,112 @@
       </p:sp>
       <p:sp>
         <p:nvSpPr>
-          <p:cNvPr id="30" name="Shape 28"/>
+          <p:cNvPr id="33" name="Text 31"/>
+          <p:cNvSpPr/>
+          <p:nvPr/>
+        </p:nvSpPr>
+        <p:spPr>
+          <a:xfrm>
+            <a:off x="6016752" y="3364992"/>
+            <a:ext cx="411480" cy="475488"/>
+          </a:xfrm>
+          <a:prstGeom prst="rect">
+            <a:avLst/>
+          </a:prstGeom>
+          <a:noFill/>
+          <a:ln/>
+        </p:spPr>
+        <p:txBody>
+          <a:bodyPr wrap="square" lIns="0" tIns="0" rIns="0" bIns="0" rtlCol="0" anchor="ctr"/>
+          <a:lstStyle/>
+          <a:p>
+            <a:pPr algn="ctr" indent="0" marL="0">
+              <a:buNone/>
+            </a:pPr>
+            <a:r>
+              <a:rPr lang="en-US" sz="1600" b="1" dirty="0">
+                <a:solidFill>
+                  <a:srgbClr val="0D9488"/>
+                </a:solidFill>
+                <a:latin typeface="Trebuchet MS" pitchFamily="34" charset="0"/>
+                <a:ea typeface="Trebuchet MS" pitchFamily="34" charset="-122"/>
+                <a:cs typeface="Trebuchet MS" pitchFamily="34" charset="-120"/>
+              </a:rPr>
+              <a:t>·</a:t>
+            </a:r>
+            <a:endParaRPr lang="en-US" sz="1600" dirty="0"/>
+          </a:p>
+        </p:txBody>
+      </p:sp>
+      <p:sp>
+        <p:nvSpPr>
+          <p:cNvPr id="34" name="Shape 32"/>
+          <p:cNvSpPr/>
+          <p:nvPr/>
+        </p:nvSpPr>
+        <p:spPr>
+          <a:xfrm>
+            <a:off x="6428232" y="3364992"/>
+            <a:ext cx="1645920" cy="475488"/>
+          </a:xfrm>
+          <a:prstGeom prst="rect">
+            <a:avLst>
+              <a:gd name="adj" fmla="val 9615"/>
+            </a:avLst>
+          </a:prstGeom>
+          <a:solidFill>
+            <a:srgbClr val="FFFFFF"/>
+          </a:solidFill>
+          <a:ln w="12700">
+            <a:solidFill>
+              <a:srgbClr val="0D9488"/>
+            </a:solidFill>
+            <a:prstDash val="solid"/>
+          </a:ln>
+        </p:spPr>
+      </p:sp>
+      <p:sp>
+        <p:nvSpPr>
+          <p:cNvPr id="35" name="Text 33"/>
+          <p:cNvSpPr/>
+          <p:nvPr/>
+        </p:nvSpPr>
+        <p:spPr>
+          <a:xfrm>
+            <a:off x="6428232" y="3364992"/>
+            <a:ext cx="1645920" cy="475488"/>
+          </a:xfrm>
+          <a:prstGeom prst="rect">
+            <a:avLst/>
+          </a:prstGeom>
+          <a:noFill/>
+          <a:ln/>
+        </p:spPr>
+        <p:txBody>
+          <a:bodyPr wrap="square" lIns="0" tIns="0" rIns="0" bIns="0" rtlCol="0" anchor="ctr"/>
+          <a:lstStyle/>
+          <a:p>
+            <a:pPr algn="ctr" indent="0" marL="0">
+              <a:buNone/>
+            </a:pPr>
+            <a:r>
+              <a:rPr lang="en-US" sz="1400" b="1" dirty="0">
+                <a:solidFill>
+                  <a:srgbClr val="0D9488"/>
+                </a:solidFill>
+                <a:latin typeface="Trebuchet MS" pitchFamily="34" charset="0"/>
+                <a:ea typeface="Trebuchet MS" pitchFamily="34" charset="-122"/>
+                <a:cs typeface="Trebuchet MS" pitchFamily="34" charset="-120"/>
+              </a:rPr>
+              <a:t>tion</a:t>
+            </a:r>
+            <a:endParaRPr lang="en-US" sz="1400" dirty="0"/>
+          </a:p>
+        </p:txBody>
+      </p:sp>
+      <p:sp>
+        <p:nvSpPr>
+          <p:cNvPr id="36" name="Shape 34"/>
           <p:cNvSpPr/>
           <p:nvPr/>
         </p:nvSpPr>
@@ -25903,7 +25620,7 @@
       </p:sp>
       <p:sp>
         <p:nvSpPr>
-          <p:cNvPr id="31" name="Text 29"/>
+          <p:cNvPr id="37" name="Text 35"/>
           <p:cNvSpPr/>
           <p:nvPr/>
         </p:nvSpPr>
@@ -25942,7 +25659,7 @@
       </p:sp>
       <p:sp>
         <p:nvSpPr>
-          <p:cNvPr id="32" name="Shape 30"/>
+          <p:cNvPr id="38" name="Shape 36"/>
           <p:cNvSpPr/>
           <p:nvPr/>
         </p:nvSpPr>
@@ -25969,7 +25686,7 @@
       </p:sp>
       <p:sp>
         <p:nvSpPr>
-          <p:cNvPr id="33" name="Text 31"/>
+          <p:cNvPr id="39" name="Text 37"/>
           <p:cNvSpPr/>
           <p:nvPr/>
         </p:nvSpPr>
@@ -26292,7 +26009,7 @@
                 <a:ea typeface="Calibri" pitchFamily="34" charset="-122"/>
                 <a:cs typeface="Calibri" pitchFamily="34" charset="-120"/>
               </a:rPr>
-              <a:t>Word Labs  •  wordlabs.app  •  Prefix: 'ad-' = to, towards, near</a:t>
+              <a:t>Word Labs  •  wordlabs.app  •  Prefix: 'ad-' = to, toward, near</a:t>
             </a:r>
             <a:endParaRPr lang="en-US" sz="800" dirty="0"/>
           </a:p>
@@ -26431,7 +26148,7 @@
                 <a:ea typeface="Trebuchet MS" pitchFamily="34" charset="-122"/>
                 <a:cs typeface="Trebuchet MS" pitchFamily="34" charset="-120"/>
               </a:rPr>
-              <a:t>advance</a:t>
+              <a:t>adoption</a:t>
             </a:r>
             <a:endParaRPr lang="en-US" sz="2800" dirty="0"/>
           </a:p>
@@ -26511,7 +26228,7 @@
         </p:nvSpPr>
         <p:spPr>
           <a:xfrm>
-            <a:off x="2938272" y="2258568"/>
+            <a:off x="2221992" y="2258568"/>
             <a:ext cx="1828800" cy="292608"/>
           </a:xfrm>
           <a:prstGeom prst="rect">
@@ -26545,7 +26262,7 @@
         </p:nvSpPr>
         <p:spPr>
           <a:xfrm>
-            <a:off x="2938272" y="2258568"/>
+            <a:off x="2221992" y="2258568"/>
             <a:ext cx="1828800" cy="292608"/>
           </a:xfrm>
           <a:prstGeom prst="rect">
@@ -26584,7 +26301,7 @@
         </p:nvSpPr>
         <p:spPr>
           <a:xfrm>
-            <a:off x="2938272" y="2569464"/>
+            <a:off x="2221992" y="2569464"/>
             <a:ext cx="1828800" cy="201168"/>
           </a:xfrm>
           <a:prstGeom prst="rect">
@@ -26609,7 +26326,7 @@
                 <a:ea typeface="Calibri" pitchFamily="34" charset="-122"/>
                 <a:cs typeface="Calibri" pitchFamily="34" charset="-120"/>
               </a:rPr>
-              <a:t>to, towards</a:t>
+              <a:t>toward</a:t>
             </a:r>
             <a:endParaRPr lang="en-US" sz="850" dirty="0"/>
           </a:p>
@@ -26623,7 +26340,7 @@
         </p:nvSpPr>
         <p:spPr>
           <a:xfrm>
-            <a:off x="5803392" y="2258568"/>
+            <a:off x="4370832" y="2258568"/>
             <a:ext cx="1828800" cy="292608"/>
           </a:xfrm>
           <a:prstGeom prst="rect">
@@ -26657,7 +26374,7 @@
         </p:nvSpPr>
         <p:spPr>
           <a:xfrm>
-            <a:off x="5803392" y="2258568"/>
+            <a:off x="4370832" y="2258568"/>
             <a:ext cx="1828800" cy="292608"/>
           </a:xfrm>
           <a:prstGeom prst="rect">
@@ -26682,7 +26399,7 @@
                 <a:ea typeface="Trebuchet MS" pitchFamily="34" charset="-122"/>
                 <a:cs typeface="Trebuchet MS" pitchFamily="34" charset="-120"/>
               </a:rPr>
-              <a:t>vance</a:t>
+              <a:t>opt</a:t>
             </a:r>
             <a:endParaRPr lang="en-US" sz="1300" dirty="0"/>
           </a:p>
@@ -26696,7 +26413,7 @@
         </p:nvSpPr>
         <p:spPr>
           <a:xfrm>
-            <a:off x="5803392" y="2569464"/>
+            <a:off x="4370832" y="2569464"/>
             <a:ext cx="1828800" cy="201168"/>
           </a:xfrm>
           <a:prstGeom prst="rect">
@@ -26721,7 +26438,7 @@
                 <a:ea typeface="Calibri" pitchFamily="34" charset="-122"/>
                 <a:cs typeface="Calibri" pitchFamily="34" charset="-120"/>
               </a:rPr>
-              <a:t>go forward</a:t>
+              <a:t>choose</a:t>
             </a:r>
             <a:endParaRPr lang="en-US" sz="850" dirty="0"/>
           </a:p>
@@ -26730,6 +26447,118 @@
       <p:sp>
         <p:nvSpPr>
           <p:cNvPr id="22" name="Shape 20"/>
+          <p:cNvSpPr/>
+          <p:nvPr/>
+        </p:nvSpPr>
+        <p:spPr>
+          <a:xfrm>
+            <a:off x="6519672" y="2258568"/>
+            <a:ext cx="1828800" cy="292608"/>
+          </a:xfrm>
+          <a:prstGeom prst="rect">
+            <a:avLst>
+              <a:gd name="adj" fmla="val 25000"/>
+            </a:avLst>
+          </a:prstGeom>
+          <a:solidFill>
+            <a:srgbClr val="FCE7F3"/>
+          </a:solidFill>
+          <a:ln w="19050">
+            <a:solidFill>
+              <a:srgbClr val="DB2777"/>
+            </a:solidFill>
+            <a:prstDash val="solid"/>
+          </a:ln>
+          <a:effectLst>
+            <a:outerShdw sx="100000" sy="100000" kx="0" ky="0" algn="bl" rotWithShape="0" blurRad="101600" dist="38100" dir="8100000">
+              <a:srgbClr val="000000">
+                <a:alpha val="12000"/>
+              </a:srgbClr>
+            </a:outerShdw>
+          </a:effectLst>
+        </p:spPr>
+      </p:sp>
+      <p:sp>
+        <p:nvSpPr>
+          <p:cNvPr id="23" name="Text 21"/>
+          <p:cNvSpPr/>
+          <p:nvPr/>
+        </p:nvSpPr>
+        <p:spPr>
+          <a:xfrm>
+            <a:off x="6519672" y="2258568"/>
+            <a:ext cx="1828800" cy="292608"/>
+          </a:xfrm>
+          <a:prstGeom prst="rect">
+            <a:avLst/>
+          </a:prstGeom>
+          <a:noFill/>
+          <a:ln/>
+        </p:spPr>
+        <p:txBody>
+          <a:bodyPr wrap="square" lIns="0" tIns="0" rIns="0" bIns="0" rtlCol="0" anchor="ctr"/>
+          <a:lstStyle/>
+          <a:p>
+            <a:pPr algn="ctr" indent="0" marL="0">
+              <a:buNone/>
+            </a:pPr>
+            <a:r>
+              <a:rPr lang="en-US" sz="1300" b="1" dirty="0">
+                <a:solidFill>
+                  <a:srgbClr val="9D174D"/>
+                </a:solidFill>
+                <a:latin typeface="Trebuchet MS" pitchFamily="34" charset="0"/>
+                <a:ea typeface="Trebuchet MS" pitchFamily="34" charset="-122"/>
+                <a:cs typeface="Trebuchet MS" pitchFamily="34" charset="-120"/>
+              </a:rPr>
+              <a:t>ion</a:t>
+            </a:r>
+            <a:endParaRPr lang="en-US" sz="1300" dirty="0"/>
+          </a:p>
+        </p:txBody>
+      </p:sp>
+      <p:sp>
+        <p:nvSpPr>
+          <p:cNvPr id="24" name="Text 22"/>
+          <p:cNvSpPr/>
+          <p:nvPr/>
+        </p:nvSpPr>
+        <p:spPr>
+          <a:xfrm>
+            <a:off x="6519672" y="2569464"/>
+            <a:ext cx="1828800" cy="201168"/>
+          </a:xfrm>
+          <a:prstGeom prst="rect">
+            <a:avLst/>
+          </a:prstGeom>
+          <a:noFill/>
+          <a:ln/>
+        </p:spPr>
+        <p:txBody>
+          <a:bodyPr wrap="square" lIns="0" tIns="0" rIns="0" bIns="0" rtlCol="0" anchor="t"/>
+          <a:lstStyle/>
+          <a:p>
+            <a:pPr algn="ctr" indent="0" marL="0">
+              <a:buNone/>
+            </a:pPr>
+            <a:r>
+              <a:rPr lang="en-US" sz="850" dirty="0">
+                <a:solidFill>
+                  <a:srgbClr val="475569"/>
+                </a:solidFill>
+                <a:latin typeface="Calibri" pitchFamily="34" charset="0"/>
+                <a:ea typeface="Calibri" pitchFamily="34" charset="-122"/>
+                <a:cs typeface="Calibri" pitchFamily="34" charset="-120"/>
+              </a:rPr>
+              <a:t>act or process of</a:t>
+            </a:r>
+            <a:endParaRPr lang="en-US" sz="850" dirty="0"/>
+          </a:p>
+        </p:txBody>
+      </p:sp>
+      <p:sp>
+        <p:nvSpPr>
+          <p:cNvPr id="25" name="Shape 23"/>
           <p:cNvSpPr/>
           <p:nvPr/>
         </p:nvSpPr>
@@ -26756,7 +26585,7 @@
       </p:sp>
       <p:sp>
         <p:nvSpPr>
-          <p:cNvPr id="23" name="Text 21"/>
+          <p:cNvPr id="26" name="Text 24"/>
           <p:cNvSpPr/>
           <p:nvPr/>
         </p:nvSpPr>
@@ -26795,7 +26624,7 @@
       </p:sp>
       <p:sp>
         <p:nvSpPr>
-          <p:cNvPr id="24" name="Shape 22"/>
+          <p:cNvPr id="27" name="Shape 25"/>
           <p:cNvSpPr/>
           <p:nvPr/>
         </p:nvSpPr>
@@ -26822,13 +26651,13 @@
       </p:sp>
       <p:sp>
         <p:nvSpPr>
-          <p:cNvPr id="25" name="Shape 23"/>
-          <p:cNvSpPr/>
-          <p:nvPr/>
-        </p:nvSpPr>
-        <p:spPr>
-          <a:xfrm>
-            <a:off x="2999232" y="3364992"/>
+          <p:cNvPr id="28" name="Shape 26"/>
+          <p:cNvSpPr/>
+          <p:nvPr/>
+        </p:nvSpPr>
+        <p:spPr>
+          <a:xfrm>
+            <a:off x="2313432" y="3364992"/>
             <a:ext cx="1645920" cy="475488"/>
           </a:xfrm>
           <a:prstGeom prst="rect">
@@ -26849,13 +26678,13 @@
       </p:sp>
       <p:sp>
         <p:nvSpPr>
-          <p:cNvPr id="26" name="Text 24"/>
-          <p:cNvSpPr/>
-          <p:nvPr/>
-        </p:nvSpPr>
-        <p:spPr>
-          <a:xfrm>
-            <a:off x="2999232" y="3364992"/>
+          <p:cNvPr id="29" name="Text 27"/>
+          <p:cNvSpPr/>
+          <p:nvPr/>
+        </p:nvSpPr>
+        <p:spPr>
+          <a:xfrm>
+            <a:off x="2313432" y="3364992"/>
             <a:ext cx="1645920" cy="475488"/>
           </a:xfrm>
           <a:prstGeom prst="rect">
@@ -26880,7 +26709,7 @@
                 <a:ea typeface="Trebuchet MS" pitchFamily="34" charset="-122"/>
                 <a:cs typeface="Trebuchet MS" pitchFamily="34" charset="-120"/>
               </a:rPr>
-              <a:t>ad</a:t>
+              <a:t>a</a:t>
             </a:r>
             <a:endParaRPr lang="en-US" sz="1400" dirty="0"/>
           </a:p>
@@ -26888,14 +26717,14 @@
       </p:sp>
       <p:sp>
         <p:nvSpPr>
-          <p:cNvPr id="27" name="Text 25"/>
-          <p:cNvSpPr/>
-          <p:nvPr/>
-        </p:nvSpPr>
-        <p:spPr>
-          <a:xfrm>
-            <a:off x="4645152" y="3364992"/>
-            <a:ext cx="1097280" cy="475488"/>
+          <p:cNvPr id="30" name="Text 28"/>
+          <p:cNvSpPr/>
+          <p:nvPr/>
+        </p:nvSpPr>
+        <p:spPr>
+          <a:xfrm>
+            <a:off x="3959352" y="3364992"/>
+            <a:ext cx="411480" cy="475488"/>
           </a:xfrm>
           <a:prstGeom prst="rect">
             <a:avLst/>
@@ -26927,13 +26756,13 @@
       </p:sp>
       <p:sp>
         <p:nvSpPr>
-          <p:cNvPr id="28" name="Shape 26"/>
-          <p:cNvSpPr/>
-          <p:nvPr/>
-        </p:nvSpPr>
-        <p:spPr>
-          <a:xfrm>
-            <a:off x="5742432" y="3364992"/>
+          <p:cNvPr id="31" name="Shape 29"/>
+          <p:cNvSpPr/>
+          <p:nvPr/>
+        </p:nvSpPr>
+        <p:spPr>
+          <a:xfrm>
+            <a:off x="4370832" y="3364992"/>
             <a:ext cx="1645920" cy="475488"/>
           </a:xfrm>
           <a:prstGeom prst="rect">
@@ -26954,13 +26783,13 @@
       </p:sp>
       <p:sp>
         <p:nvSpPr>
-          <p:cNvPr id="29" name="Text 27"/>
-          <p:cNvSpPr/>
-          <p:nvPr/>
-        </p:nvSpPr>
-        <p:spPr>
-          <a:xfrm>
-            <a:off x="5742432" y="3364992"/>
+          <p:cNvPr id="32" name="Text 30"/>
+          <p:cNvSpPr/>
+          <p:nvPr/>
+        </p:nvSpPr>
+        <p:spPr>
+          <a:xfrm>
+            <a:off x="4370832" y="3364992"/>
             <a:ext cx="1645920" cy="475488"/>
           </a:xfrm>
           <a:prstGeom prst="rect">
@@ -26985,7 +26814,7 @@
                 <a:ea typeface="Trebuchet MS" pitchFamily="34" charset="-122"/>
                 <a:cs typeface="Trebuchet MS" pitchFamily="34" charset="-120"/>
               </a:rPr>
-              <a:t>vance</a:t>
+              <a:t>dop</a:t>
             </a:r>
             <a:endParaRPr lang="en-US" sz="1400" dirty="0"/>
           </a:p>
@@ -26993,7 +26822,112 @@
       </p:sp>
       <p:sp>
         <p:nvSpPr>
-          <p:cNvPr id="30" name="Shape 28"/>
+          <p:cNvPr id="33" name="Text 31"/>
+          <p:cNvSpPr/>
+          <p:nvPr/>
+        </p:nvSpPr>
+        <p:spPr>
+          <a:xfrm>
+            <a:off x="6016752" y="3364992"/>
+            <a:ext cx="411480" cy="475488"/>
+          </a:xfrm>
+          <a:prstGeom prst="rect">
+            <a:avLst/>
+          </a:prstGeom>
+          <a:noFill/>
+          <a:ln/>
+        </p:spPr>
+        <p:txBody>
+          <a:bodyPr wrap="square" lIns="0" tIns="0" rIns="0" bIns="0" rtlCol="0" anchor="ctr"/>
+          <a:lstStyle/>
+          <a:p>
+            <a:pPr algn="ctr" indent="0" marL="0">
+              <a:buNone/>
+            </a:pPr>
+            <a:r>
+              <a:rPr lang="en-US" sz="1600" b="1" dirty="0">
+                <a:solidFill>
+                  <a:srgbClr val="0D9488"/>
+                </a:solidFill>
+                <a:latin typeface="Trebuchet MS" pitchFamily="34" charset="0"/>
+                <a:ea typeface="Trebuchet MS" pitchFamily="34" charset="-122"/>
+                <a:cs typeface="Trebuchet MS" pitchFamily="34" charset="-120"/>
+              </a:rPr>
+              <a:t>·</a:t>
+            </a:r>
+            <a:endParaRPr lang="en-US" sz="1600" dirty="0"/>
+          </a:p>
+        </p:txBody>
+      </p:sp>
+      <p:sp>
+        <p:nvSpPr>
+          <p:cNvPr id="34" name="Shape 32"/>
+          <p:cNvSpPr/>
+          <p:nvPr/>
+        </p:nvSpPr>
+        <p:spPr>
+          <a:xfrm>
+            <a:off x="6428232" y="3364992"/>
+            <a:ext cx="1645920" cy="475488"/>
+          </a:xfrm>
+          <a:prstGeom prst="rect">
+            <a:avLst>
+              <a:gd name="adj" fmla="val 9615"/>
+            </a:avLst>
+          </a:prstGeom>
+          <a:solidFill>
+            <a:srgbClr val="FFFFFF"/>
+          </a:solidFill>
+          <a:ln w="12700">
+            <a:solidFill>
+              <a:srgbClr val="0D9488"/>
+            </a:solidFill>
+            <a:prstDash val="solid"/>
+          </a:ln>
+        </p:spPr>
+      </p:sp>
+      <p:sp>
+        <p:nvSpPr>
+          <p:cNvPr id="35" name="Text 33"/>
+          <p:cNvSpPr/>
+          <p:nvPr/>
+        </p:nvSpPr>
+        <p:spPr>
+          <a:xfrm>
+            <a:off x="6428232" y="3364992"/>
+            <a:ext cx="1645920" cy="475488"/>
+          </a:xfrm>
+          <a:prstGeom prst="rect">
+            <a:avLst/>
+          </a:prstGeom>
+          <a:noFill/>
+          <a:ln/>
+        </p:spPr>
+        <p:txBody>
+          <a:bodyPr wrap="square" lIns="0" tIns="0" rIns="0" bIns="0" rtlCol="0" anchor="ctr"/>
+          <a:lstStyle/>
+          <a:p>
+            <a:pPr algn="ctr" indent="0" marL="0">
+              <a:buNone/>
+            </a:pPr>
+            <a:r>
+              <a:rPr lang="en-US" sz="1400" b="1" dirty="0">
+                <a:solidFill>
+                  <a:srgbClr val="0D9488"/>
+                </a:solidFill>
+                <a:latin typeface="Trebuchet MS" pitchFamily="34" charset="0"/>
+                <a:ea typeface="Trebuchet MS" pitchFamily="34" charset="-122"/>
+                <a:cs typeface="Trebuchet MS" pitchFamily="34" charset="-120"/>
+              </a:rPr>
+              <a:t>tion</a:t>
+            </a:r>
+            <a:endParaRPr lang="en-US" sz="1400" dirty="0"/>
+          </a:p>
+        </p:txBody>
+      </p:sp>
+      <p:sp>
+        <p:nvSpPr>
+          <p:cNvPr id="36" name="Shape 34"/>
           <p:cNvSpPr/>
           <p:nvPr/>
         </p:nvSpPr>
@@ -27020,7 +26954,7 @@
       </p:sp>
       <p:sp>
         <p:nvSpPr>
-          <p:cNvPr id="31" name="Text 29"/>
+          <p:cNvPr id="37" name="Text 35"/>
           <p:cNvSpPr/>
           <p:nvPr/>
         </p:nvSpPr>
@@ -27059,7 +26993,7 @@
       </p:sp>
       <p:sp>
         <p:nvSpPr>
-          <p:cNvPr id="32" name="Shape 30"/>
+          <p:cNvPr id="38" name="Shape 36"/>
           <p:cNvSpPr/>
           <p:nvPr/>
         </p:nvSpPr>
@@ -27086,7 +27020,7 @@
       </p:sp>
       <p:sp>
         <p:nvSpPr>
-          <p:cNvPr id="33" name="Shape 31"/>
+          <p:cNvPr id="39" name="Shape 37"/>
           <p:cNvSpPr/>
           <p:nvPr/>
         </p:nvSpPr>
@@ -27113,7 +27047,7 @@
       </p:sp>
       <p:sp>
         <p:nvSpPr>
-          <p:cNvPr id="34" name="Text 32"/>
+          <p:cNvPr id="40" name="Text 38"/>
           <p:cNvSpPr/>
           <p:nvPr/>
         </p:nvSpPr>
@@ -27152,7 +27086,7 @@
       </p:sp>
       <p:sp>
         <p:nvSpPr>
-          <p:cNvPr id="35" name="Shape 33"/>
+          <p:cNvPr id="41" name="Shape 39"/>
           <p:cNvSpPr/>
           <p:nvPr/>
         </p:nvSpPr>
@@ -27179,7 +27113,7 @@
       </p:sp>
       <p:sp>
         <p:nvSpPr>
-          <p:cNvPr id="36" name="Text 34"/>
+          <p:cNvPr id="42" name="Text 40"/>
           <p:cNvSpPr/>
           <p:nvPr/>
         </p:nvSpPr>
@@ -27218,7 +27152,7 @@
       </p:sp>
       <p:sp>
         <p:nvSpPr>
-          <p:cNvPr id="37" name="Shape 35"/>
+          <p:cNvPr id="43" name="Shape 41"/>
           <p:cNvSpPr/>
           <p:nvPr/>
         </p:nvSpPr>
@@ -27245,7 +27179,7 @@
       </p:sp>
       <p:sp>
         <p:nvSpPr>
-          <p:cNvPr id="38" name="Text 36"/>
+          <p:cNvPr id="44" name="Text 42"/>
           <p:cNvSpPr/>
           <p:nvPr/>
         </p:nvSpPr>
@@ -27276,7 +27210,7 @@
                 <a:ea typeface="Trebuchet MS" pitchFamily="34" charset="-122"/>
                 <a:cs typeface="Trebuchet MS" pitchFamily="34" charset="-120"/>
               </a:rPr>
-              <a:t>v</a:t>
+              <a:t>o</a:t>
             </a:r>
             <a:endParaRPr lang="en-US" sz="900" dirty="0"/>
           </a:p>
@@ -27284,7 +27218,7 @@
       </p:sp>
       <p:sp>
         <p:nvSpPr>
-          <p:cNvPr id="39" name="Shape 37"/>
+          <p:cNvPr id="45" name="Shape 43"/>
           <p:cNvSpPr/>
           <p:nvPr/>
         </p:nvSpPr>
@@ -27311,7 +27245,7 @@
       </p:sp>
       <p:sp>
         <p:nvSpPr>
-          <p:cNvPr id="40" name="Text 38"/>
+          <p:cNvPr id="46" name="Text 44"/>
           <p:cNvSpPr/>
           <p:nvPr/>
         </p:nvSpPr>
@@ -27342,7 +27276,7 @@
                 <a:ea typeface="Trebuchet MS" pitchFamily="34" charset="-122"/>
                 <a:cs typeface="Trebuchet MS" pitchFamily="34" charset="-120"/>
               </a:rPr>
-              <a:t>a</a:t>
+              <a:t>p</a:t>
             </a:r>
             <a:endParaRPr lang="en-US" sz="900" dirty="0"/>
           </a:p>
@@ -27350,7 +27284,7 @@
       </p:sp>
       <p:sp>
         <p:nvSpPr>
-          <p:cNvPr id="41" name="Shape 39"/>
+          <p:cNvPr id="47" name="Shape 45"/>
           <p:cNvSpPr/>
           <p:nvPr/>
         </p:nvSpPr>
@@ -27377,7 +27311,7 @@
       </p:sp>
       <p:sp>
         <p:nvSpPr>
-          <p:cNvPr id="42" name="Text 40"/>
+          <p:cNvPr id="48" name="Text 46"/>
           <p:cNvSpPr/>
           <p:nvPr/>
         </p:nvSpPr>
@@ -27408,7 +27342,7 @@
                 <a:ea typeface="Trebuchet MS" pitchFamily="34" charset="-122"/>
                 <a:cs typeface="Trebuchet MS" pitchFamily="34" charset="-120"/>
               </a:rPr>
-              <a:t>n</a:t>
+              <a:t>t</a:t>
             </a:r>
             <a:endParaRPr lang="en-US" sz="900" dirty="0"/>
           </a:p>
@@ -27416,7 +27350,7 @@
       </p:sp>
       <p:sp>
         <p:nvSpPr>
-          <p:cNvPr id="43" name="Shape 41"/>
+          <p:cNvPr id="49" name="Shape 47"/>
           <p:cNvSpPr/>
           <p:nvPr/>
         </p:nvSpPr>
@@ -27443,7 +27377,7 @@
       </p:sp>
       <p:sp>
         <p:nvSpPr>
-          <p:cNvPr id="44" name="Text 42"/>
+          <p:cNvPr id="50" name="Text 48"/>
           <p:cNvSpPr/>
           <p:nvPr/>
         </p:nvSpPr>
@@ -27474,7 +27408,7 @@
                 <a:ea typeface="Trebuchet MS" pitchFamily="34" charset="-122"/>
                 <a:cs typeface="Trebuchet MS" pitchFamily="34" charset="-120"/>
               </a:rPr>
-              <a:t>ce</a:t>
+              <a:t>ion</a:t>
             </a:r>
             <a:endParaRPr lang="en-US" sz="900" dirty="0"/>
           </a:p>
@@ -27482,7 +27416,7 @@
       </p:sp>
       <p:sp>
         <p:nvSpPr>
-          <p:cNvPr id="45" name="Text 43"/>
+          <p:cNvPr id="51" name="Text 49"/>
           <p:cNvSpPr/>
           <p:nvPr/>
         </p:nvSpPr>
@@ -27513,7 +27447,7 @@
                 <a:ea typeface="Calibri" pitchFamily="34" charset="-122"/>
                 <a:cs typeface="Calibri" pitchFamily="34" charset="-120"/>
               </a:rPr>
-              <a:t>/s/</a:t>
+              <a:t>/shun/</a:t>
             </a:r>
             <a:endParaRPr lang="en-US" sz="750" dirty="0"/>
           </a:p>
@@ -27805,7 +27739,7 @@
                 <a:ea typeface="Calibri" pitchFamily="34" charset="-122"/>
                 <a:cs typeface="Calibri" pitchFamily="34" charset="-120"/>
               </a:rPr>
-              <a:t>Word Labs  •  wordlabs.app  •  Prefix: 'ad-' = to, towards, near</a:t>
+              <a:t>Word Labs  •  wordlabs.app  •  Prefix: 'ad-' = to, toward, near</a:t>
             </a:r>
             <a:endParaRPr lang="en-US" sz="800" dirty="0"/>
           </a:p>
@@ -27944,7 +27878,7 @@
                 <a:ea typeface="Trebuchet MS" pitchFamily="34" charset="-122"/>
                 <a:cs typeface="Trebuchet MS" pitchFamily="34" charset="-120"/>
               </a:rPr>
-              <a:t>adopt</a:t>
+              <a:t>adventure</a:t>
             </a:r>
             <a:endParaRPr lang="en-US" sz="2800" dirty="0"/>
           </a:p>
@@ -28632,7 +28566,7 @@
                 <a:ea typeface="Calibri" pitchFamily="34" charset="-122"/>
                 <a:cs typeface="Calibri" pitchFamily="34" charset="-120"/>
               </a:rPr>
-              <a:t>Word Labs  •  wordlabs.app  •  Prefix: 'ad-' = to, towards, near</a:t>
+              <a:t>Word Labs  •  wordlabs.app  •  Prefix: 'ad-' = to, toward, near</a:t>
             </a:r>
             <a:endParaRPr lang="en-US" sz="800" dirty="0"/>
           </a:p>
@@ -28771,7 +28705,7 @@
                 <a:ea typeface="Trebuchet MS" pitchFamily="34" charset="-122"/>
                 <a:cs typeface="Trebuchet MS" pitchFamily="34" charset="-120"/>
               </a:rPr>
-              <a:t>adopt</a:t>
+              <a:t>adventure</a:t>
             </a:r>
             <a:endParaRPr lang="en-US" sz="2800" dirty="0"/>
           </a:p>
@@ -28851,7 +28785,7 @@
         </p:nvSpPr>
         <p:spPr>
           <a:xfrm>
-            <a:off x="2938272" y="2258568"/>
+            <a:off x="2221992" y="2258568"/>
             <a:ext cx="1828800" cy="292608"/>
           </a:xfrm>
           <a:prstGeom prst="rect">
@@ -28885,7 +28819,7 @@
         </p:nvSpPr>
         <p:spPr>
           <a:xfrm>
-            <a:off x="2938272" y="2258568"/>
+            <a:off x="2221992" y="2258568"/>
             <a:ext cx="1828800" cy="292608"/>
           </a:xfrm>
           <a:prstGeom prst="rect">
@@ -28924,7 +28858,7 @@
         </p:nvSpPr>
         <p:spPr>
           <a:xfrm>
-            <a:off x="2938272" y="2569464"/>
+            <a:off x="2221992" y="2569464"/>
             <a:ext cx="1828800" cy="201168"/>
           </a:xfrm>
           <a:prstGeom prst="rect">
@@ -28949,7 +28883,7 @@
                 <a:ea typeface="Calibri" pitchFamily="34" charset="-122"/>
                 <a:cs typeface="Calibri" pitchFamily="34" charset="-120"/>
               </a:rPr>
-              <a:t>to, towards</a:t>
+              <a:t>toward</a:t>
             </a:r>
             <a:endParaRPr lang="en-US" sz="850" dirty="0"/>
           </a:p>
@@ -28963,7 +28897,7 @@
         </p:nvSpPr>
         <p:spPr>
           <a:xfrm>
-            <a:off x="5803392" y="2258568"/>
+            <a:off x="4370832" y="2258568"/>
             <a:ext cx="1828800" cy="292608"/>
           </a:xfrm>
           <a:prstGeom prst="rect">
@@ -28997,7 +28931,7 @@
         </p:nvSpPr>
         <p:spPr>
           <a:xfrm>
-            <a:off x="5803392" y="2258568"/>
+            <a:off x="4370832" y="2258568"/>
             <a:ext cx="1828800" cy="292608"/>
           </a:xfrm>
           <a:prstGeom prst="rect">
@@ -29022,7 +28956,7 @@
                 <a:ea typeface="Trebuchet MS" pitchFamily="34" charset="-122"/>
                 <a:cs typeface="Trebuchet MS" pitchFamily="34" charset="-120"/>
               </a:rPr>
-              <a:t>opt</a:t>
+              <a:t>vent</a:t>
             </a:r>
             <a:endParaRPr lang="en-US" sz="1300" dirty="0"/>
           </a:p>
@@ -29036,7 +28970,7 @@
         </p:nvSpPr>
         <p:spPr>
           <a:xfrm>
-            <a:off x="5803392" y="2569464"/>
+            <a:off x="4370832" y="2569464"/>
             <a:ext cx="1828800" cy="201168"/>
           </a:xfrm>
           <a:prstGeom prst="rect">
@@ -29061,7 +28995,7 @@
                 <a:ea typeface="Calibri" pitchFamily="34" charset="-122"/>
                 <a:cs typeface="Calibri" pitchFamily="34" charset="-120"/>
               </a:rPr>
-              <a:t>choose</a:t>
+              <a:t>come, arrive</a:t>
             </a:r>
             <a:endParaRPr lang="en-US" sz="850" dirty="0"/>
           </a:p>
@@ -29070,6 +29004,118 @@
       <p:sp>
         <p:nvSpPr>
           <p:cNvPr id="22" name="Shape 20"/>
+          <p:cNvSpPr/>
+          <p:nvPr/>
+        </p:nvSpPr>
+        <p:spPr>
+          <a:xfrm>
+            <a:off x="6519672" y="2258568"/>
+            <a:ext cx="1828800" cy="292608"/>
+          </a:xfrm>
+          <a:prstGeom prst="rect">
+            <a:avLst>
+              <a:gd name="adj" fmla="val 25000"/>
+            </a:avLst>
+          </a:prstGeom>
+          <a:solidFill>
+            <a:srgbClr val="FCE7F3"/>
+          </a:solidFill>
+          <a:ln w="19050">
+            <a:solidFill>
+              <a:srgbClr val="DB2777"/>
+            </a:solidFill>
+            <a:prstDash val="solid"/>
+          </a:ln>
+          <a:effectLst>
+            <a:outerShdw sx="100000" sy="100000" kx="0" ky="0" algn="bl" rotWithShape="0" blurRad="101600" dist="38100" dir="8100000">
+              <a:srgbClr val="000000">
+                <a:alpha val="12000"/>
+              </a:srgbClr>
+            </a:outerShdw>
+          </a:effectLst>
+        </p:spPr>
+      </p:sp>
+      <p:sp>
+        <p:nvSpPr>
+          <p:cNvPr id="23" name="Text 21"/>
+          <p:cNvSpPr/>
+          <p:nvPr/>
+        </p:nvSpPr>
+        <p:spPr>
+          <a:xfrm>
+            <a:off x="6519672" y="2258568"/>
+            <a:ext cx="1828800" cy="292608"/>
+          </a:xfrm>
+          <a:prstGeom prst="rect">
+            <a:avLst/>
+          </a:prstGeom>
+          <a:noFill/>
+          <a:ln/>
+        </p:spPr>
+        <p:txBody>
+          <a:bodyPr wrap="square" lIns="0" tIns="0" rIns="0" bIns="0" rtlCol="0" anchor="ctr"/>
+          <a:lstStyle/>
+          <a:p>
+            <a:pPr algn="ctr" indent="0" marL="0">
+              <a:buNone/>
+            </a:pPr>
+            <a:r>
+              <a:rPr lang="en-US" sz="1300" b="1" dirty="0">
+                <a:solidFill>
+                  <a:srgbClr val="9D174D"/>
+                </a:solidFill>
+                <a:latin typeface="Trebuchet MS" pitchFamily="34" charset="0"/>
+                <a:ea typeface="Trebuchet MS" pitchFamily="34" charset="-122"/>
+                <a:cs typeface="Trebuchet MS" pitchFamily="34" charset="-120"/>
+              </a:rPr>
+              <a:t>ure</a:t>
+            </a:r>
+            <a:endParaRPr lang="en-US" sz="1300" dirty="0"/>
+          </a:p>
+        </p:txBody>
+      </p:sp>
+      <p:sp>
+        <p:nvSpPr>
+          <p:cNvPr id="24" name="Text 22"/>
+          <p:cNvSpPr/>
+          <p:nvPr/>
+        </p:nvSpPr>
+        <p:spPr>
+          <a:xfrm>
+            <a:off x="6519672" y="2569464"/>
+            <a:ext cx="1828800" cy="201168"/>
+          </a:xfrm>
+          <a:prstGeom prst="rect">
+            <a:avLst/>
+          </a:prstGeom>
+          <a:noFill/>
+          <a:ln/>
+        </p:spPr>
+        <p:txBody>
+          <a:bodyPr wrap="square" lIns="0" tIns="0" rIns="0" bIns="0" rtlCol="0" anchor="t"/>
+          <a:lstStyle/>
+          <a:p>
+            <a:pPr algn="ctr" indent="0" marL="0">
+              <a:buNone/>
+            </a:pPr>
+            <a:r>
+              <a:rPr lang="en-US" sz="850" dirty="0">
+                <a:solidFill>
+                  <a:srgbClr val="475569"/>
+                </a:solidFill>
+                <a:latin typeface="Calibri" pitchFamily="34" charset="0"/>
+                <a:ea typeface="Calibri" pitchFamily="34" charset="-122"/>
+                <a:cs typeface="Calibri" pitchFamily="34" charset="-120"/>
+              </a:rPr>
+              <a:t>state or result of</a:t>
+            </a:r>
+            <a:endParaRPr lang="en-US" sz="850" dirty="0"/>
+          </a:p>
+        </p:txBody>
+      </p:sp>
+      <p:sp>
+        <p:nvSpPr>
+          <p:cNvPr id="25" name="Shape 23"/>
           <p:cNvSpPr/>
           <p:nvPr/>
         </p:nvSpPr>
@@ -29096,7 +29142,7 @@
       </p:sp>
       <p:sp>
         <p:nvSpPr>
-          <p:cNvPr id="23" name="Text 21"/>
+          <p:cNvPr id="26" name="Text 24"/>
           <p:cNvSpPr/>
           <p:nvPr/>
         </p:nvSpPr>
@@ -29135,7 +29181,7 @@
       </p:sp>
       <p:sp>
         <p:nvSpPr>
-          <p:cNvPr id="24" name="Shape 22"/>
+          <p:cNvPr id="27" name="Shape 25"/>
           <p:cNvSpPr/>
           <p:nvPr/>
         </p:nvSpPr>
@@ -29162,7 +29208,7 @@
       </p:sp>
       <p:sp>
         <p:nvSpPr>
-          <p:cNvPr id="25" name="Text 23"/>
+          <p:cNvPr id="28" name="Text 26"/>
           <p:cNvSpPr/>
           <p:nvPr/>
         </p:nvSpPr>
@@ -29201,7 +29247,7 @@
       </p:sp>
       <p:sp>
         <p:nvSpPr>
-          <p:cNvPr id="26" name="Shape 24"/>
+          <p:cNvPr id="29" name="Shape 27"/>
           <p:cNvSpPr/>
           <p:nvPr/>
         </p:nvSpPr>
@@ -29228,7 +29274,7 @@
       </p:sp>
       <p:sp>
         <p:nvSpPr>
-          <p:cNvPr id="27" name="Text 25"/>
+          <p:cNvPr id="30" name="Text 28"/>
           <p:cNvSpPr/>
           <p:nvPr/>
         </p:nvSpPr>
@@ -29267,7 +29313,7 @@
       </p:sp>
       <p:sp>
         <p:nvSpPr>
-          <p:cNvPr id="28" name="Shape 26"/>
+          <p:cNvPr id="31" name="Shape 29"/>
           <p:cNvSpPr/>
           <p:nvPr/>
         </p:nvSpPr>
@@ -29294,7 +29340,7 @@
       </p:sp>
       <p:sp>
         <p:nvSpPr>
-          <p:cNvPr id="29" name="Text 27"/>
+          <p:cNvPr id="32" name="Text 30"/>
           <p:cNvSpPr/>
           <p:nvPr/>
         </p:nvSpPr>
@@ -29617,7 +29663,7 @@
                 <a:ea typeface="Calibri" pitchFamily="34" charset="-122"/>
                 <a:cs typeface="Calibri" pitchFamily="34" charset="-120"/>
               </a:rPr>
-              <a:t>Word Labs  •  wordlabs.app  •  Prefix: 'ad-' = to, towards, near</a:t>
+              <a:t>Word Labs  •  wordlabs.app  •  Prefix: 'ad-' = to, toward, near</a:t>
             </a:r>
             <a:endParaRPr lang="en-US" sz="800" dirty="0"/>
           </a:p>
@@ -29756,7 +29802,7 @@
                 <a:ea typeface="Trebuchet MS" pitchFamily="34" charset="-122"/>
                 <a:cs typeface="Trebuchet MS" pitchFamily="34" charset="-120"/>
               </a:rPr>
-              <a:t>adopt</a:t>
+              <a:t>adventure</a:t>
             </a:r>
             <a:endParaRPr lang="en-US" sz="2800" dirty="0"/>
           </a:p>
@@ -29836,7 +29882,7 @@
         </p:nvSpPr>
         <p:spPr>
           <a:xfrm>
-            <a:off x="2938272" y="2258568"/>
+            <a:off x="2221992" y="2258568"/>
             <a:ext cx="1828800" cy="292608"/>
           </a:xfrm>
           <a:prstGeom prst="rect">
@@ -29870,7 +29916,7 @@
         </p:nvSpPr>
         <p:spPr>
           <a:xfrm>
-            <a:off x="2938272" y="2258568"/>
+            <a:off x="2221992" y="2258568"/>
             <a:ext cx="1828800" cy="292608"/>
           </a:xfrm>
           <a:prstGeom prst="rect">
@@ -29909,7 +29955,7 @@
         </p:nvSpPr>
         <p:spPr>
           <a:xfrm>
-            <a:off x="2938272" y="2569464"/>
+            <a:off x="2221992" y="2569464"/>
             <a:ext cx="1828800" cy="201168"/>
           </a:xfrm>
           <a:prstGeom prst="rect">
@@ -29934,7 +29980,7 @@
                 <a:ea typeface="Calibri" pitchFamily="34" charset="-122"/>
                 <a:cs typeface="Calibri" pitchFamily="34" charset="-120"/>
               </a:rPr>
-              <a:t>to, towards</a:t>
+              <a:t>toward</a:t>
             </a:r>
             <a:endParaRPr lang="en-US" sz="850" dirty="0"/>
           </a:p>
@@ -29948,7 +29994,7 @@
         </p:nvSpPr>
         <p:spPr>
           <a:xfrm>
-            <a:off x="5803392" y="2258568"/>
+            <a:off x="4370832" y="2258568"/>
             <a:ext cx="1828800" cy="292608"/>
           </a:xfrm>
           <a:prstGeom prst="rect">
@@ -29982,7 +30028,7 @@
         </p:nvSpPr>
         <p:spPr>
           <a:xfrm>
-            <a:off x="5803392" y="2258568"/>
+            <a:off x="4370832" y="2258568"/>
             <a:ext cx="1828800" cy="292608"/>
           </a:xfrm>
           <a:prstGeom prst="rect">
@@ -30007,7 +30053,7 @@
                 <a:ea typeface="Trebuchet MS" pitchFamily="34" charset="-122"/>
                 <a:cs typeface="Trebuchet MS" pitchFamily="34" charset="-120"/>
               </a:rPr>
-              <a:t>opt</a:t>
+              <a:t>vent</a:t>
             </a:r>
             <a:endParaRPr lang="en-US" sz="1300" dirty="0"/>
           </a:p>
@@ -30021,7 +30067,7 @@
         </p:nvSpPr>
         <p:spPr>
           <a:xfrm>
-            <a:off x="5803392" y="2569464"/>
+            <a:off x="4370832" y="2569464"/>
             <a:ext cx="1828800" cy="201168"/>
           </a:xfrm>
           <a:prstGeom prst="rect">
@@ -30046,7 +30092,7 @@
                 <a:ea typeface="Calibri" pitchFamily="34" charset="-122"/>
                 <a:cs typeface="Calibri" pitchFamily="34" charset="-120"/>
               </a:rPr>
-              <a:t>choose</a:t>
+              <a:t>come, arrive</a:t>
             </a:r>
             <a:endParaRPr lang="en-US" sz="850" dirty="0"/>
           </a:p>
@@ -30055,6 +30101,118 @@
       <p:sp>
         <p:nvSpPr>
           <p:cNvPr id="22" name="Shape 20"/>
+          <p:cNvSpPr/>
+          <p:nvPr/>
+        </p:nvSpPr>
+        <p:spPr>
+          <a:xfrm>
+            <a:off x="6519672" y="2258568"/>
+            <a:ext cx="1828800" cy="292608"/>
+          </a:xfrm>
+          <a:prstGeom prst="rect">
+            <a:avLst>
+              <a:gd name="adj" fmla="val 25000"/>
+            </a:avLst>
+          </a:prstGeom>
+          <a:solidFill>
+            <a:srgbClr val="FCE7F3"/>
+          </a:solidFill>
+          <a:ln w="19050">
+            <a:solidFill>
+              <a:srgbClr val="DB2777"/>
+            </a:solidFill>
+            <a:prstDash val="solid"/>
+          </a:ln>
+          <a:effectLst>
+            <a:outerShdw sx="100000" sy="100000" kx="0" ky="0" algn="bl" rotWithShape="0" blurRad="101600" dist="38100" dir="8100000">
+              <a:srgbClr val="000000">
+                <a:alpha val="12000"/>
+              </a:srgbClr>
+            </a:outerShdw>
+          </a:effectLst>
+        </p:spPr>
+      </p:sp>
+      <p:sp>
+        <p:nvSpPr>
+          <p:cNvPr id="23" name="Text 21"/>
+          <p:cNvSpPr/>
+          <p:nvPr/>
+        </p:nvSpPr>
+        <p:spPr>
+          <a:xfrm>
+            <a:off x="6519672" y="2258568"/>
+            <a:ext cx="1828800" cy="292608"/>
+          </a:xfrm>
+          <a:prstGeom prst="rect">
+            <a:avLst/>
+          </a:prstGeom>
+          <a:noFill/>
+          <a:ln/>
+        </p:spPr>
+        <p:txBody>
+          <a:bodyPr wrap="square" lIns="0" tIns="0" rIns="0" bIns="0" rtlCol="0" anchor="ctr"/>
+          <a:lstStyle/>
+          <a:p>
+            <a:pPr algn="ctr" indent="0" marL="0">
+              <a:buNone/>
+            </a:pPr>
+            <a:r>
+              <a:rPr lang="en-US" sz="1300" b="1" dirty="0">
+                <a:solidFill>
+                  <a:srgbClr val="9D174D"/>
+                </a:solidFill>
+                <a:latin typeface="Trebuchet MS" pitchFamily="34" charset="0"/>
+                <a:ea typeface="Trebuchet MS" pitchFamily="34" charset="-122"/>
+                <a:cs typeface="Trebuchet MS" pitchFamily="34" charset="-120"/>
+              </a:rPr>
+              <a:t>ure</a:t>
+            </a:r>
+            <a:endParaRPr lang="en-US" sz="1300" dirty="0"/>
+          </a:p>
+        </p:txBody>
+      </p:sp>
+      <p:sp>
+        <p:nvSpPr>
+          <p:cNvPr id="24" name="Text 22"/>
+          <p:cNvSpPr/>
+          <p:nvPr/>
+        </p:nvSpPr>
+        <p:spPr>
+          <a:xfrm>
+            <a:off x="6519672" y="2569464"/>
+            <a:ext cx="1828800" cy="201168"/>
+          </a:xfrm>
+          <a:prstGeom prst="rect">
+            <a:avLst/>
+          </a:prstGeom>
+          <a:noFill/>
+          <a:ln/>
+        </p:spPr>
+        <p:txBody>
+          <a:bodyPr wrap="square" lIns="0" tIns="0" rIns="0" bIns="0" rtlCol="0" anchor="t"/>
+          <a:lstStyle/>
+          <a:p>
+            <a:pPr algn="ctr" indent="0" marL="0">
+              <a:buNone/>
+            </a:pPr>
+            <a:r>
+              <a:rPr lang="en-US" sz="850" dirty="0">
+                <a:solidFill>
+                  <a:srgbClr val="475569"/>
+                </a:solidFill>
+                <a:latin typeface="Calibri" pitchFamily="34" charset="0"/>
+                <a:ea typeface="Calibri" pitchFamily="34" charset="-122"/>
+                <a:cs typeface="Calibri" pitchFamily="34" charset="-120"/>
+              </a:rPr>
+              <a:t>state or result of</a:t>
+            </a:r>
+            <a:endParaRPr lang="en-US" sz="850" dirty="0"/>
+          </a:p>
+        </p:txBody>
+      </p:sp>
+      <p:sp>
+        <p:nvSpPr>
+          <p:cNvPr id="25" name="Shape 23"/>
           <p:cNvSpPr/>
           <p:nvPr/>
         </p:nvSpPr>
@@ -30081,7 +30239,7 @@
       </p:sp>
       <p:sp>
         <p:nvSpPr>
-          <p:cNvPr id="23" name="Text 21"/>
+          <p:cNvPr id="26" name="Text 24"/>
           <p:cNvSpPr/>
           <p:nvPr/>
         </p:nvSpPr>
@@ -30120,7 +30278,7 @@
       </p:sp>
       <p:sp>
         <p:nvSpPr>
-          <p:cNvPr id="24" name="Shape 22"/>
+          <p:cNvPr id="27" name="Shape 25"/>
           <p:cNvSpPr/>
           <p:nvPr/>
         </p:nvSpPr>
@@ -30147,13 +30305,13 @@
       </p:sp>
       <p:sp>
         <p:nvSpPr>
-          <p:cNvPr id="25" name="Shape 23"/>
-          <p:cNvSpPr/>
-          <p:nvPr/>
-        </p:nvSpPr>
-        <p:spPr>
-          <a:xfrm>
-            <a:off x="2999232" y="3364992"/>
+          <p:cNvPr id="28" name="Shape 26"/>
+          <p:cNvSpPr/>
+          <p:nvPr/>
+        </p:nvSpPr>
+        <p:spPr>
+          <a:xfrm>
+            <a:off x="2313432" y="3364992"/>
             <a:ext cx="1645920" cy="475488"/>
           </a:xfrm>
           <a:prstGeom prst="rect">
@@ -30174,13 +30332,13 @@
       </p:sp>
       <p:sp>
         <p:nvSpPr>
-          <p:cNvPr id="26" name="Text 24"/>
-          <p:cNvSpPr/>
-          <p:nvPr/>
-        </p:nvSpPr>
-        <p:spPr>
-          <a:xfrm>
-            <a:off x="2999232" y="3364992"/>
+          <p:cNvPr id="29" name="Text 27"/>
+          <p:cNvSpPr/>
+          <p:nvPr/>
+        </p:nvSpPr>
+        <p:spPr>
+          <a:xfrm>
+            <a:off x="2313432" y="3364992"/>
             <a:ext cx="1645920" cy="475488"/>
           </a:xfrm>
           <a:prstGeom prst="rect">
@@ -30205,7 +30363,7 @@
                 <a:ea typeface="Trebuchet MS" pitchFamily="34" charset="-122"/>
                 <a:cs typeface="Trebuchet MS" pitchFamily="34" charset="-120"/>
               </a:rPr>
-              <a:t>a</a:t>
+              <a:t>ad</a:t>
             </a:r>
             <a:endParaRPr lang="en-US" sz="1400" dirty="0"/>
           </a:p>
@@ -30213,14 +30371,14 @@
       </p:sp>
       <p:sp>
         <p:nvSpPr>
-          <p:cNvPr id="27" name="Text 25"/>
-          <p:cNvSpPr/>
-          <p:nvPr/>
-        </p:nvSpPr>
-        <p:spPr>
-          <a:xfrm>
-            <a:off x="4645152" y="3364992"/>
-            <a:ext cx="1097280" cy="475488"/>
+          <p:cNvPr id="30" name="Text 28"/>
+          <p:cNvSpPr/>
+          <p:nvPr/>
+        </p:nvSpPr>
+        <p:spPr>
+          <a:xfrm>
+            <a:off x="3959352" y="3364992"/>
+            <a:ext cx="411480" cy="475488"/>
           </a:xfrm>
           <a:prstGeom prst="rect">
             <a:avLst/>
@@ -30252,13 +30410,13 @@
       </p:sp>
       <p:sp>
         <p:nvSpPr>
-          <p:cNvPr id="28" name="Shape 26"/>
-          <p:cNvSpPr/>
-          <p:nvPr/>
-        </p:nvSpPr>
-        <p:spPr>
-          <a:xfrm>
-            <a:off x="5742432" y="3364992"/>
+          <p:cNvPr id="31" name="Shape 29"/>
+          <p:cNvSpPr/>
+          <p:nvPr/>
+        </p:nvSpPr>
+        <p:spPr>
+          <a:xfrm>
+            <a:off x="4370832" y="3364992"/>
             <a:ext cx="1645920" cy="475488"/>
           </a:xfrm>
           <a:prstGeom prst="rect">
@@ -30279,13 +30437,13 @@
       </p:sp>
       <p:sp>
         <p:nvSpPr>
-          <p:cNvPr id="29" name="Text 27"/>
-          <p:cNvSpPr/>
-          <p:nvPr/>
-        </p:nvSpPr>
-        <p:spPr>
-          <a:xfrm>
-            <a:off x="5742432" y="3364992"/>
+          <p:cNvPr id="32" name="Text 30"/>
+          <p:cNvSpPr/>
+          <p:nvPr/>
+        </p:nvSpPr>
+        <p:spPr>
+          <a:xfrm>
+            <a:off x="4370832" y="3364992"/>
             <a:ext cx="1645920" cy="475488"/>
           </a:xfrm>
           <a:prstGeom prst="rect">
@@ -30310,7 +30468,7 @@
                 <a:ea typeface="Trebuchet MS" pitchFamily="34" charset="-122"/>
                 <a:cs typeface="Trebuchet MS" pitchFamily="34" charset="-120"/>
               </a:rPr>
-              <a:t>dopt</a:t>
+              <a:t>ven</a:t>
             </a:r>
             <a:endParaRPr lang="en-US" sz="1400" dirty="0"/>
           </a:p>
@@ -30318,7 +30476,112 @@
       </p:sp>
       <p:sp>
         <p:nvSpPr>
-          <p:cNvPr id="30" name="Shape 28"/>
+          <p:cNvPr id="33" name="Text 31"/>
+          <p:cNvSpPr/>
+          <p:nvPr/>
+        </p:nvSpPr>
+        <p:spPr>
+          <a:xfrm>
+            <a:off x="6016752" y="3364992"/>
+            <a:ext cx="411480" cy="475488"/>
+          </a:xfrm>
+          <a:prstGeom prst="rect">
+            <a:avLst/>
+          </a:prstGeom>
+          <a:noFill/>
+          <a:ln/>
+        </p:spPr>
+        <p:txBody>
+          <a:bodyPr wrap="square" lIns="0" tIns="0" rIns="0" bIns="0" rtlCol="0" anchor="ctr"/>
+          <a:lstStyle/>
+          <a:p>
+            <a:pPr algn="ctr" indent="0" marL="0">
+              <a:buNone/>
+            </a:pPr>
+            <a:r>
+              <a:rPr lang="en-US" sz="1600" b="1" dirty="0">
+                <a:solidFill>
+                  <a:srgbClr val="0D9488"/>
+                </a:solidFill>
+                <a:latin typeface="Trebuchet MS" pitchFamily="34" charset="0"/>
+                <a:ea typeface="Trebuchet MS" pitchFamily="34" charset="-122"/>
+                <a:cs typeface="Trebuchet MS" pitchFamily="34" charset="-120"/>
+              </a:rPr>
+              <a:t>·</a:t>
+            </a:r>
+            <a:endParaRPr lang="en-US" sz="1600" dirty="0"/>
+          </a:p>
+        </p:txBody>
+      </p:sp>
+      <p:sp>
+        <p:nvSpPr>
+          <p:cNvPr id="34" name="Shape 32"/>
+          <p:cNvSpPr/>
+          <p:nvPr/>
+        </p:nvSpPr>
+        <p:spPr>
+          <a:xfrm>
+            <a:off x="6428232" y="3364992"/>
+            <a:ext cx="1645920" cy="475488"/>
+          </a:xfrm>
+          <a:prstGeom prst="rect">
+            <a:avLst>
+              <a:gd name="adj" fmla="val 9615"/>
+            </a:avLst>
+          </a:prstGeom>
+          <a:solidFill>
+            <a:srgbClr val="FFFFFF"/>
+          </a:solidFill>
+          <a:ln w="12700">
+            <a:solidFill>
+              <a:srgbClr val="0D9488"/>
+            </a:solidFill>
+            <a:prstDash val="solid"/>
+          </a:ln>
+        </p:spPr>
+      </p:sp>
+      <p:sp>
+        <p:nvSpPr>
+          <p:cNvPr id="35" name="Text 33"/>
+          <p:cNvSpPr/>
+          <p:nvPr/>
+        </p:nvSpPr>
+        <p:spPr>
+          <a:xfrm>
+            <a:off x="6428232" y="3364992"/>
+            <a:ext cx="1645920" cy="475488"/>
+          </a:xfrm>
+          <a:prstGeom prst="rect">
+            <a:avLst/>
+          </a:prstGeom>
+          <a:noFill/>
+          <a:ln/>
+        </p:spPr>
+        <p:txBody>
+          <a:bodyPr wrap="square" lIns="0" tIns="0" rIns="0" bIns="0" rtlCol="0" anchor="ctr"/>
+          <a:lstStyle/>
+          <a:p>
+            <a:pPr algn="ctr" indent="0" marL="0">
+              <a:buNone/>
+            </a:pPr>
+            <a:r>
+              <a:rPr lang="en-US" sz="1400" b="1" dirty="0">
+                <a:solidFill>
+                  <a:srgbClr val="0D9488"/>
+                </a:solidFill>
+                <a:latin typeface="Trebuchet MS" pitchFamily="34" charset="0"/>
+                <a:ea typeface="Trebuchet MS" pitchFamily="34" charset="-122"/>
+                <a:cs typeface="Trebuchet MS" pitchFamily="34" charset="-120"/>
+              </a:rPr>
+              <a:t>ture</a:t>
+            </a:r>
+            <a:endParaRPr lang="en-US" sz="1400" dirty="0"/>
+          </a:p>
+        </p:txBody>
+      </p:sp>
+      <p:sp>
+        <p:nvSpPr>
+          <p:cNvPr id="36" name="Shape 34"/>
           <p:cNvSpPr/>
           <p:nvPr/>
         </p:nvSpPr>
@@ -30345,7 +30608,7 @@
       </p:sp>
       <p:sp>
         <p:nvSpPr>
-          <p:cNvPr id="31" name="Text 29"/>
+          <p:cNvPr id="37" name="Text 35"/>
           <p:cNvSpPr/>
           <p:nvPr/>
         </p:nvSpPr>
@@ -30384,7 +30647,7 @@
       </p:sp>
       <p:sp>
         <p:nvSpPr>
-          <p:cNvPr id="32" name="Shape 30"/>
+          <p:cNvPr id="38" name="Shape 36"/>
           <p:cNvSpPr/>
           <p:nvPr/>
         </p:nvSpPr>
@@ -30411,7 +30674,7 @@
       </p:sp>
       <p:sp>
         <p:nvSpPr>
-          <p:cNvPr id="33" name="Text 31"/>
+          <p:cNvPr id="39" name="Text 37"/>
           <p:cNvSpPr/>
           <p:nvPr/>
         </p:nvSpPr>
@@ -30734,7 +30997,7 @@
                 <a:ea typeface="Calibri" pitchFamily="34" charset="-122"/>
                 <a:cs typeface="Calibri" pitchFamily="34" charset="-120"/>
               </a:rPr>
-              <a:t>Word Labs  •  wordlabs.app  •  Prefix: 'ad-' = to, towards, near</a:t>
+              <a:t>Word Labs  •  wordlabs.app  •  Prefix: 'ad-' = to, toward, near</a:t>
             </a:r>
             <a:endParaRPr lang="en-US" sz="800" dirty="0"/>
           </a:p>
@@ -30873,7 +31136,7 @@
                 <a:ea typeface="Trebuchet MS" pitchFamily="34" charset="-122"/>
                 <a:cs typeface="Trebuchet MS" pitchFamily="34" charset="-120"/>
               </a:rPr>
-              <a:t>adopt</a:t>
+              <a:t>adventure</a:t>
             </a:r>
             <a:endParaRPr lang="en-US" sz="2800" dirty="0"/>
           </a:p>
@@ -30953,7 +31216,7 @@
         </p:nvSpPr>
         <p:spPr>
           <a:xfrm>
-            <a:off x="2938272" y="2258568"/>
+            <a:off x="2221992" y="2258568"/>
             <a:ext cx="1828800" cy="292608"/>
           </a:xfrm>
           <a:prstGeom prst="rect">
@@ -30987,7 +31250,7 @@
         </p:nvSpPr>
         <p:spPr>
           <a:xfrm>
-            <a:off x="2938272" y="2258568"/>
+            <a:off x="2221992" y="2258568"/>
             <a:ext cx="1828800" cy="292608"/>
           </a:xfrm>
           <a:prstGeom prst="rect">
@@ -31026,7 +31289,7 @@
         </p:nvSpPr>
         <p:spPr>
           <a:xfrm>
-            <a:off x="2938272" y="2569464"/>
+            <a:off x="2221992" y="2569464"/>
             <a:ext cx="1828800" cy="201168"/>
           </a:xfrm>
           <a:prstGeom prst="rect">
@@ -31051,7 +31314,7 @@
                 <a:ea typeface="Calibri" pitchFamily="34" charset="-122"/>
                 <a:cs typeface="Calibri" pitchFamily="34" charset="-120"/>
               </a:rPr>
-              <a:t>to, towards</a:t>
+              <a:t>toward</a:t>
             </a:r>
             <a:endParaRPr lang="en-US" sz="850" dirty="0"/>
           </a:p>
@@ -31065,7 +31328,7 @@
         </p:nvSpPr>
         <p:spPr>
           <a:xfrm>
-            <a:off x="5803392" y="2258568"/>
+            <a:off x="4370832" y="2258568"/>
             <a:ext cx="1828800" cy="292608"/>
           </a:xfrm>
           <a:prstGeom prst="rect">
@@ -31099,7 +31362,7 @@
         </p:nvSpPr>
         <p:spPr>
           <a:xfrm>
-            <a:off x="5803392" y="2258568"/>
+            <a:off x="4370832" y="2258568"/>
             <a:ext cx="1828800" cy="292608"/>
           </a:xfrm>
           <a:prstGeom prst="rect">
@@ -31124,7 +31387,7 @@
                 <a:ea typeface="Trebuchet MS" pitchFamily="34" charset="-122"/>
                 <a:cs typeface="Trebuchet MS" pitchFamily="34" charset="-120"/>
               </a:rPr>
-              <a:t>opt</a:t>
+              <a:t>vent</a:t>
             </a:r>
             <a:endParaRPr lang="en-US" sz="1300" dirty="0"/>
           </a:p>
@@ -31138,7 +31401,7 @@
         </p:nvSpPr>
         <p:spPr>
           <a:xfrm>
-            <a:off x="5803392" y="2569464"/>
+            <a:off x="4370832" y="2569464"/>
             <a:ext cx="1828800" cy="201168"/>
           </a:xfrm>
           <a:prstGeom prst="rect">
@@ -31163,7 +31426,7 @@
                 <a:ea typeface="Calibri" pitchFamily="34" charset="-122"/>
                 <a:cs typeface="Calibri" pitchFamily="34" charset="-120"/>
               </a:rPr>
-              <a:t>choose</a:t>
+              <a:t>come, arrive</a:t>
             </a:r>
             <a:endParaRPr lang="en-US" sz="850" dirty="0"/>
           </a:p>
@@ -31172,6 +31435,118 @@
       <p:sp>
         <p:nvSpPr>
           <p:cNvPr id="22" name="Shape 20"/>
+          <p:cNvSpPr/>
+          <p:nvPr/>
+        </p:nvSpPr>
+        <p:spPr>
+          <a:xfrm>
+            <a:off x="6519672" y="2258568"/>
+            <a:ext cx="1828800" cy="292608"/>
+          </a:xfrm>
+          <a:prstGeom prst="rect">
+            <a:avLst>
+              <a:gd name="adj" fmla="val 25000"/>
+            </a:avLst>
+          </a:prstGeom>
+          <a:solidFill>
+            <a:srgbClr val="FCE7F3"/>
+          </a:solidFill>
+          <a:ln w="19050">
+            <a:solidFill>
+              <a:srgbClr val="DB2777"/>
+            </a:solidFill>
+            <a:prstDash val="solid"/>
+          </a:ln>
+          <a:effectLst>
+            <a:outerShdw sx="100000" sy="100000" kx="0" ky="0" algn="bl" rotWithShape="0" blurRad="101600" dist="38100" dir="8100000">
+              <a:srgbClr val="000000">
+                <a:alpha val="12000"/>
+              </a:srgbClr>
+            </a:outerShdw>
+          </a:effectLst>
+        </p:spPr>
+      </p:sp>
+      <p:sp>
+        <p:nvSpPr>
+          <p:cNvPr id="23" name="Text 21"/>
+          <p:cNvSpPr/>
+          <p:nvPr/>
+        </p:nvSpPr>
+        <p:spPr>
+          <a:xfrm>
+            <a:off x="6519672" y="2258568"/>
+            <a:ext cx="1828800" cy="292608"/>
+          </a:xfrm>
+          <a:prstGeom prst="rect">
+            <a:avLst/>
+          </a:prstGeom>
+          <a:noFill/>
+          <a:ln/>
+        </p:spPr>
+        <p:txBody>
+          <a:bodyPr wrap="square" lIns="0" tIns="0" rIns="0" bIns="0" rtlCol="0" anchor="ctr"/>
+          <a:lstStyle/>
+          <a:p>
+            <a:pPr algn="ctr" indent="0" marL="0">
+              <a:buNone/>
+            </a:pPr>
+            <a:r>
+              <a:rPr lang="en-US" sz="1300" b="1" dirty="0">
+                <a:solidFill>
+                  <a:srgbClr val="9D174D"/>
+                </a:solidFill>
+                <a:latin typeface="Trebuchet MS" pitchFamily="34" charset="0"/>
+                <a:ea typeface="Trebuchet MS" pitchFamily="34" charset="-122"/>
+                <a:cs typeface="Trebuchet MS" pitchFamily="34" charset="-120"/>
+              </a:rPr>
+              <a:t>ure</a:t>
+            </a:r>
+            <a:endParaRPr lang="en-US" sz="1300" dirty="0"/>
+          </a:p>
+        </p:txBody>
+      </p:sp>
+      <p:sp>
+        <p:nvSpPr>
+          <p:cNvPr id="24" name="Text 22"/>
+          <p:cNvSpPr/>
+          <p:nvPr/>
+        </p:nvSpPr>
+        <p:spPr>
+          <a:xfrm>
+            <a:off x="6519672" y="2569464"/>
+            <a:ext cx="1828800" cy="201168"/>
+          </a:xfrm>
+          <a:prstGeom prst="rect">
+            <a:avLst/>
+          </a:prstGeom>
+          <a:noFill/>
+          <a:ln/>
+        </p:spPr>
+        <p:txBody>
+          <a:bodyPr wrap="square" lIns="0" tIns="0" rIns="0" bIns="0" rtlCol="0" anchor="t"/>
+          <a:lstStyle/>
+          <a:p>
+            <a:pPr algn="ctr" indent="0" marL="0">
+              <a:buNone/>
+            </a:pPr>
+            <a:r>
+              <a:rPr lang="en-US" sz="850" dirty="0">
+                <a:solidFill>
+                  <a:srgbClr val="475569"/>
+                </a:solidFill>
+                <a:latin typeface="Calibri" pitchFamily="34" charset="0"/>
+                <a:ea typeface="Calibri" pitchFamily="34" charset="-122"/>
+                <a:cs typeface="Calibri" pitchFamily="34" charset="-120"/>
+              </a:rPr>
+              <a:t>state or result of</a:t>
+            </a:r>
+            <a:endParaRPr lang="en-US" sz="850" dirty="0"/>
+          </a:p>
+        </p:txBody>
+      </p:sp>
+      <p:sp>
+        <p:nvSpPr>
+          <p:cNvPr id="25" name="Shape 23"/>
           <p:cNvSpPr/>
           <p:nvPr/>
         </p:nvSpPr>
@@ -31198,7 +31573,7 @@
       </p:sp>
       <p:sp>
         <p:nvSpPr>
-          <p:cNvPr id="23" name="Text 21"/>
+          <p:cNvPr id="26" name="Text 24"/>
           <p:cNvSpPr/>
           <p:nvPr/>
         </p:nvSpPr>
@@ -31237,7 +31612,7 @@
       </p:sp>
       <p:sp>
         <p:nvSpPr>
-          <p:cNvPr id="24" name="Shape 22"/>
+          <p:cNvPr id="27" name="Shape 25"/>
           <p:cNvSpPr/>
           <p:nvPr/>
         </p:nvSpPr>
@@ -31264,13 +31639,13 @@
       </p:sp>
       <p:sp>
         <p:nvSpPr>
-          <p:cNvPr id="25" name="Shape 23"/>
-          <p:cNvSpPr/>
-          <p:nvPr/>
-        </p:nvSpPr>
-        <p:spPr>
-          <a:xfrm>
-            <a:off x="2999232" y="3364992"/>
+          <p:cNvPr id="28" name="Shape 26"/>
+          <p:cNvSpPr/>
+          <p:nvPr/>
+        </p:nvSpPr>
+        <p:spPr>
+          <a:xfrm>
+            <a:off x="2313432" y="3364992"/>
             <a:ext cx="1645920" cy="475488"/>
           </a:xfrm>
           <a:prstGeom prst="rect">
@@ -31291,13 +31666,13 @@
       </p:sp>
       <p:sp>
         <p:nvSpPr>
-          <p:cNvPr id="26" name="Text 24"/>
-          <p:cNvSpPr/>
-          <p:nvPr/>
-        </p:nvSpPr>
-        <p:spPr>
-          <a:xfrm>
-            <a:off x="2999232" y="3364992"/>
+          <p:cNvPr id="29" name="Text 27"/>
+          <p:cNvSpPr/>
+          <p:nvPr/>
+        </p:nvSpPr>
+        <p:spPr>
+          <a:xfrm>
+            <a:off x="2313432" y="3364992"/>
             <a:ext cx="1645920" cy="475488"/>
           </a:xfrm>
           <a:prstGeom prst="rect">
@@ -31322,7 +31697,7 @@
                 <a:ea typeface="Trebuchet MS" pitchFamily="34" charset="-122"/>
                 <a:cs typeface="Trebuchet MS" pitchFamily="34" charset="-120"/>
               </a:rPr>
-              <a:t>a</a:t>
+              <a:t>ad</a:t>
             </a:r>
             <a:endParaRPr lang="en-US" sz="1400" dirty="0"/>
           </a:p>
@@ -31330,14 +31705,14 @@
       </p:sp>
       <p:sp>
         <p:nvSpPr>
-          <p:cNvPr id="27" name="Text 25"/>
-          <p:cNvSpPr/>
-          <p:nvPr/>
-        </p:nvSpPr>
-        <p:spPr>
-          <a:xfrm>
-            <a:off x="4645152" y="3364992"/>
-            <a:ext cx="1097280" cy="475488"/>
+          <p:cNvPr id="30" name="Text 28"/>
+          <p:cNvSpPr/>
+          <p:nvPr/>
+        </p:nvSpPr>
+        <p:spPr>
+          <a:xfrm>
+            <a:off x="3959352" y="3364992"/>
+            <a:ext cx="411480" cy="475488"/>
           </a:xfrm>
           <a:prstGeom prst="rect">
             <a:avLst/>
@@ -31369,13 +31744,13 @@
       </p:sp>
       <p:sp>
         <p:nvSpPr>
-          <p:cNvPr id="28" name="Shape 26"/>
-          <p:cNvSpPr/>
-          <p:nvPr/>
-        </p:nvSpPr>
-        <p:spPr>
-          <a:xfrm>
-            <a:off x="5742432" y="3364992"/>
+          <p:cNvPr id="31" name="Shape 29"/>
+          <p:cNvSpPr/>
+          <p:nvPr/>
+        </p:nvSpPr>
+        <p:spPr>
+          <a:xfrm>
+            <a:off x="4370832" y="3364992"/>
             <a:ext cx="1645920" cy="475488"/>
           </a:xfrm>
           <a:prstGeom prst="rect">
@@ -31396,13 +31771,13 @@
       </p:sp>
       <p:sp>
         <p:nvSpPr>
-          <p:cNvPr id="29" name="Text 27"/>
-          <p:cNvSpPr/>
-          <p:nvPr/>
-        </p:nvSpPr>
-        <p:spPr>
-          <a:xfrm>
-            <a:off x="5742432" y="3364992"/>
+          <p:cNvPr id="32" name="Text 30"/>
+          <p:cNvSpPr/>
+          <p:nvPr/>
+        </p:nvSpPr>
+        <p:spPr>
+          <a:xfrm>
+            <a:off x="4370832" y="3364992"/>
             <a:ext cx="1645920" cy="475488"/>
           </a:xfrm>
           <a:prstGeom prst="rect">
@@ -31427,7 +31802,7 @@
                 <a:ea typeface="Trebuchet MS" pitchFamily="34" charset="-122"/>
                 <a:cs typeface="Trebuchet MS" pitchFamily="34" charset="-120"/>
               </a:rPr>
-              <a:t>dopt</a:t>
+              <a:t>ven</a:t>
             </a:r>
             <a:endParaRPr lang="en-US" sz="1400" dirty="0"/>
           </a:p>
@@ -31435,7 +31810,112 @@
       </p:sp>
       <p:sp>
         <p:nvSpPr>
-          <p:cNvPr id="30" name="Shape 28"/>
+          <p:cNvPr id="33" name="Text 31"/>
+          <p:cNvSpPr/>
+          <p:nvPr/>
+        </p:nvSpPr>
+        <p:spPr>
+          <a:xfrm>
+            <a:off x="6016752" y="3364992"/>
+            <a:ext cx="411480" cy="475488"/>
+          </a:xfrm>
+          <a:prstGeom prst="rect">
+            <a:avLst/>
+          </a:prstGeom>
+          <a:noFill/>
+          <a:ln/>
+        </p:spPr>
+        <p:txBody>
+          <a:bodyPr wrap="square" lIns="0" tIns="0" rIns="0" bIns="0" rtlCol="0" anchor="ctr"/>
+          <a:lstStyle/>
+          <a:p>
+            <a:pPr algn="ctr" indent="0" marL="0">
+              <a:buNone/>
+            </a:pPr>
+            <a:r>
+              <a:rPr lang="en-US" sz="1600" b="1" dirty="0">
+                <a:solidFill>
+                  <a:srgbClr val="0D9488"/>
+                </a:solidFill>
+                <a:latin typeface="Trebuchet MS" pitchFamily="34" charset="0"/>
+                <a:ea typeface="Trebuchet MS" pitchFamily="34" charset="-122"/>
+                <a:cs typeface="Trebuchet MS" pitchFamily="34" charset="-120"/>
+              </a:rPr>
+              <a:t>·</a:t>
+            </a:r>
+            <a:endParaRPr lang="en-US" sz="1600" dirty="0"/>
+          </a:p>
+        </p:txBody>
+      </p:sp>
+      <p:sp>
+        <p:nvSpPr>
+          <p:cNvPr id="34" name="Shape 32"/>
+          <p:cNvSpPr/>
+          <p:nvPr/>
+        </p:nvSpPr>
+        <p:spPr>
+          <a:xfrm>
+            <a:off x="6428232" y="3364992"/>
+            <a:ext cx="1645920" cy="475488"/>
+          </a:xfrm>
+          <a:prstGeom prst="rect">
+            <a:avLst>
+              <a:gd name="adj" fmla="val 9615"/>
+            </a:avLst>
+          </a:prstGeom>
+          <a:solidFill>
+            <a:srgbClr val="FFFFFF"/>
+          </a:solidFill>
+          <a:ln w="12700">
+            <a:solidFill>
+              <a:srgbClr val="0D9488"/>
+            </a:solidFill>
+            <a:prstDash val="solid"/>
+          </a:ln>
+        </p:spPr>
+      </p:sp>
+      <p:sp>
+        <p:nvSpPr>
+          <p:cNvPr id="35" name="Text 33"/>
+          <p:cNvSpPr/>
+          <p:nvPr/>
+        </p:nvSpPr>
+        <p:spPr>
+          <a:xfrm>
+            <a:off x="6428232" y="3364992"/>
+            <a:ext cx="1645920" cy="475488"/>
+          </a:xfrm>
+          <a:prstGeom prst="rect">
+            <a:avLst/>
+          </a:prstGeom>
+          <a:noFill/>
+          <a:ln/>
+        </p:spPr>
+        <p:txBody>
+          <a:bodyPr wrap="square" lIns="0" tIns="0" rIns="0" bIns="0" rtlCol="0" anchor="ctr"/>
+          <a:lstStyle/>
+          <a:p>
+            <a:pPr algn="ctr" indent="0" marL="0">
+              <a:buNone/>
+            </a:pPr>
+            <a:r>
+              <a:rPr lang="en-US" sz="1400" b="1" dirty="0">
+                <a:solidFill>
+                  <a:srgbClr val="0D9488"/>
+                </a:solidFill>
+                <a:latin typeface="Trebuchet MS" pitchFamily="34" charset="0"/>
+                <a:ea typeface="Trebuchet MS" pitchFamily="34" charset="-122"/>
+                <a:cs typeface="Trebuchet MS" pitchFamily="34" charset="-120"/>
+              </a:rPr>
+              <a:t>ture</a:t>
+            </a:r>
+            <a:endParaRPr lang="en-US" sz="1400" dirty="0"/>
+          </a:p>
+        </p:txBody>
+      </p:sp>
+      <p:sp>
+        <p:nvSpPr>
+          <p:cNvPr id="36" name="Shape 34"/>
           <p:cNvSpPr/>
           <p:nvPr/>
         </p:nvSpPr>
@@ -31462,7 +31942,7 @@
       </p:sp>
       <p:sp>
         <p:nvSpPr>
-          <p:cNvPr id="31" name="Text 29"/>
+          <p:cNvPr id="37" name="Text 35"/>
           <p:cNvSpPr/>
           <p:nvPr/>
         </p:nvSpPr>
@@ -31501,7 +31981,7 @@
       </p:sp>
       <p:sp>
         <p:nvSpPr>
-          <p:cNvPr id="32" name="Shape 30"/>
+          <p:cNvPr id="38" name="Shape 36"/>
           <p:cNvSpPr/>
           <p:nvPr/>
         </p:nvSpPr>
@@ -31528,13 +32008,13 @@
       </p:sp>
       <p:sp>
         <p:nvSpPr>
-          <p:cNvPr id="33" name="Shape 31"/>
-          <p:cNvSpPr/>
-          <p:nvPr/>
-        </p:nvSpPr>
-        <p:spPr>
-          <a:xfrm>
-            <a:off x="2427732" y="4169664"/>
+          <p:cNvPr id="39" name="Shape 37"/>
+          <p:cNvSpPr/>
+          <p:nvPr/>
+        </p:nvSpPr>
+        <p:spPr>
+          <a:xfrm>
+            <a:off x="2023872" y="4169664"/>
             <a:ext cx="685800" cy="475488"/>
           </a:xfrm>
           <a:prstGeom prst="rect">
@@ -31555,13 +32035,13 @@
       </p:sp>
       <p:sp>
         <p:nvSpPr>
-          <p:cNvPr id="34" name="Text 32"/>
-          <p:cNvSpPr/>
-          <p:nvPr/>
-        </p:nvSpPr>
-        <p:spPr>
-          <a:xfrm>
-            <a:off x="2427732" y="4169664"/>
+          <p:cNvPr id="40" name="Text 38"/>
+          <p:cNvSpPr/>
+          <p:nvPr/>
+        </p:nvSpPr>
+        <p:spPr>
+          <a:xfrm>
+            <a:off x="2023872" y="4169664"/>
             <a:ext cx="685800" cy="475488"/>
           </a:xfrm>
           <a:prstGeom prst="rect">
@@ -31594,13 +32074,13 @@
       </p:sp>
       <p:sp>
         <p:nvSpPr>
-          <p:cNvPr id="35" name="Shape 33"/>
-          <p:cNvSpPr/>
-          <p:nvPr/>
-        </p:nvSpPr>
-        <p:spPr>
-          <a:xfrm>
-            <a:off x="3639312" y="4169664"/>
+          <p:cNvPr id="41" name="Shape 39"/>
+          <p:cNvSpPr/>
+          <p:nvPr/>
+        </p:nvSpPr>
+        <p:spPr>
+          <a:xfrm>
+            <a:off x="2831592" y="4169664"/>
             <a:ext cx="685800" cy="475488"/>
           </a:xfrm>
           <a:prstGeom prst="rect">
@@ -31621,13 +32101,13 @@
       </p:sp>
       <p:sp>
         <p:nvSpPr>
-          <p:cNvPr id="36" name="Text 34"/>
-          <p:cNvSpPr/>
-          <p:nvPr/>
-        </p:nvSpPr>
-        <p:spPr>
-          <a:xfrm>
-            <a:off x="3639312" y="4169664"/>
+          <p:cNvPr id="42" name="Text 40"/>
+          <p:cNvSpPr/>
+          <p:nvPr/>
+        </p:nvSpPr>
+        <p:spPr>
+          <a:xfrm>
+            <a:off x="2831592" y="4169664"/>
             <a:ext cx="685800" cy="475488"/>
           </a:xfrm>
           <a:prstGeom prst="rect">
@@ -31660,13 +32140,13 @@
       </p:sp>
       <p:sp>
         <p:nvSpPr>
-          <p:cNvPr id="37" name="Shape 35"/>
-          <p:cNvSpPr/>
-          <p:nvPr/>
-        </p:nvSpPr>
-        <p:spPr>
-          <a:xfrm>
-            <a:off x="4850892" y="4169664"/>
+          <p:cNvPr id="43" name="Shape 41"/>
+          <p:cNvSpPr/>
+          <p:nvPr/>
+        </p:nvSpPr>
+        <p:spPr>
+          <a:xfrm>
+            <a:off x="3639312" y="4169664"/>
             <a:ext cx="685800" cy="475488"/>
           </a:xfrm>
           <a:prstGeom prst="rect">
@@ -31687,13 +32167,13 @@
       </p:sp>
       <p:sp>
         <p:nvSpPr>
-          <p:cNvPr id="38" name="Text 36"/>
-          <p:cNvSpPr/>
-          <p:nvPr/>
-        </p:nvSpPr>
-        <p:spPr>
-          <a:xfrm>
-            <a:off x="4850892" y="4169664"/>
+          <p:cNvPr id="44" name="Text 42"/>
+          <p:cNvSpPr/>
+          <p:nvPr/>
+        </p:nvSpPr>
+        <p:spPr>
+          <a:xfrm>
+            <a:off x="3639312" y="4169664"/>
             <a:ext cx="685800" cy="475488"/>
           </a:xfrm>
           <a:prstGeom prst="rect">
@@ -31718,7 +32198,7 @@
                 <a:ea typeface="Trebuchet MS" pitchFamily="34" charset="-122"/>
                 <a:cs typeface="Trebuchet MS" pitchFamily="34" charset="-120"/>
               </a:rPr>
-              <a:t>o</a:t>
+              <a:t>v</a:t>
             </a:r>
             <a:endParaRPr lang="en-US" sz="900" dirty="0"/>
           </a:p>
@@ -31726,13 +32206,13 @@
       </p:sp>
       <p:sp>
         <p:nvSpPr>
-          <p:cNvPr id="39" name="Shape 37"/>
-          <p:cNvSpPr/>
-          <p:nvPr/>
-        </p:nvSpPr>
-        <p:spPr>
-          <a:xfrm>
-            <a:off x="6062472" y="4169664"/>
+          <p:cNvPr id="45" name="Shape 43"/>
+          <p:cNvSpPr/>
+          <p:nvPr/>
+        </p:nvSpPr>
+        <p:spPr>
+          <a:xfrm>
+            <a:off x="4447032" y="4169664"/>
             <a:ext cx="685800" cy="475488"/>
           </a:xfrm>
           <a:prstGeom prst="rect">
@@ -31753,13 +32233,13 @@
       </p:sp>
       <p:sp>
         <p:nvSpPr>
-          <p:cNvPr id="40" name="Text 38"/>
-          <p:cNvSpPr/>
-          <p:nvPr/>
-        </p:nvSpPr>
-        <p:spPr>
-          <a:xfrm>
-            <a:off x="6062472" y="4169664"/>
+          <p:cNvPr id="46" name="Text 44"/>
+          <p:cNvSpPr/>
+          <p:nvPr/>
+        </p:nvSpPr>
+        <p:spPr>
+          <a:xfrm>
+            <a:off x="4447032" y="4169664"/>
             <a:ext cx="685800" cy="475488"/>
           </a:xfrm>
           <a:prstGeom prst="rect">
@@ -31784,7 +32264,7 @@
                 <a:ea typeface="Trebuchet MS" pitchFamily="34" charset="-122"/>
                 <a:cs typeface="Trebuchet MS" pitchFamily="34" charset="-120"/>
               </a:rPr>
-              <a:t>p</a:t>
+              <a:t>e</a:t>
             </a:r>
             <a:endParaRPr lang="en-US" sz="900" dirty="0"/>
           </a:p>
@@ -31792,13 +32272,13 @@
       </p:sp>
       <p:sp>
         <p:nvSpPr>
-          <p:cNvPr id="41" name="Shape 39"/>
-          <p:cNvSpPr/>
-          <p:nvPr/>
-        </p:nvSpPr>
-        <p:spPr>
-          <a:xfrm>
-            <a:off x="7274052" y="4169664"/>
+          <p:cNvPr id="47" name="Shape 45"/>
+          <p:cNvSpPr/>
+          <p:nvPr/>
+        </p:nvSpPr>
+        <p:spPr>
+          <a:xfrm>
+            <a:off x="5254752" y="4169664"/>
             <a:ext cx="685800" cy="475488"/>
           </a:xfrm>
           <a:prstGeom prst="rect">
@@ -31819,13 +32299,13 @@
       </p:sp>
       <p:sp>
         <p:nvSpPr>
-          <p:cNvPr id="42" name="Text 40"/>
-          <p:cNvSpPr/>
-          <p:nvPr/>
-        </p:nvSpPr>
-        <p:spPr>
-          <a:xfrm>
-            <a:off x="7274052" y="4169664"/>
+          <p:cNvPr id="48" name="Text 46"/>
+          <p:cNvSpPr/>
+          <p:nvPr/>
+        </p:nvSpPr>
+        <p:spPr>
+          <a:xfrm>
+            <a:off x="5254752" y="4169664"/>
             <a:ext cx="685800" cy="475488"/>
           </a:xfrm>
           <a:prstGeom prst="rect">
@@ -31850,7 +32330,205 @@
                 <a:ea typeface="Trebuchet MS" pitchFamily="34" charset="-122"/>
                 <a:cs typeface="Trebuchet MS" pitchFamily="34" charset="-120"/>
               </a:rPr>
+              <a:t>n</a:t>
+            </a:r>
+            <a:endParaRPr lang="en-US" sz="900" dirty="0"/>
+          </a:p>
+        </p:txBody>
+      </p:sp>
+      <p:sp>
+        <p:nvSpPr>
+          <p:cNvPr id="49" name="Shape 47"/>
+          <p:cNvSpPr/>
+          <p:nvPr/>
+        </p:nvSpPr>
+        <p:spPr>
+          <a:xfrm>
+            <a:off x="6062472" y="4169664"/>
+            <a:ext cx="685800" cy="475488"/>
+          </a:xfrm>
+          <a:prstGeom prst="rect">
+            <a:avLst>
+              <a:gd name="adj" fmla="val 7692"/>
+            </a:avLst>
+          </a:prstGeom>
+          <a:solidFill>
+            <a:srgbClr val="FFFFFF"/>
+          </a:solidFill>
+          <a:ln w="12700">
+            <a:solidFill>
+              <a:srgbClr val="DB2777"/>
+            </a:solidFill>
+            <a:prstDash val="solid"/>
+          </a:ln>
+        </p:spPr>
+      </p:sp>
+      <p:sp>
+        <p:nvSpPr>
+          <p:cNvPr id="50" name="Text 48"/>
+          <p:cNvSpPr/>
+          <p:nvPr/>
+        </p:nvSpPr>
+        <p:spPr>
+          <a:xfrm>
+            <a:off x="6062472" y="4169664"/>
+            <a:ext cx="685800" cy="475488"/>
+          </a:xfrm>
+          <a:prstGeom prst="rect">
+            <a:avLst/>
+          </a:prstGeom>
+          <a:noFill/>
+          <a:ln/>
+        </p:spPr>
+        <p:txBody>
+          <a:bodyPr wrap="square" lIns="0" tIns="0" rIns="0" bIns="0" rtlCol="0" anchor="ctr"/>
+          <a:lstStyle/>
+          <a:p>
+            <a:pPr algn="ctr" indent="0" marL="0">
+              <a:buNone/>
+            </a:pPr>
+            <a:r>
+              <a:rPr lang="en-US" sz="900" b="1" dirty="0">
+                <a:solidFill>
+                  <a:srgbClr val="9D174D"/>
+                </a:solidFill>
+                <a:latin typeface="Trebuchet MS" pitchFamily="34" charset="0"/>
+                <a:ea typeface="Trebuchet MS" pitchFamily="34" charset="-122"/>
+                <a:cs typeface="Trebuchet MS" pitchFamily="34" charset="-120"/>
+              </a:rPr>
               <a:t>t</a:t>
+            </a:r>
+            <a:endParaRPr lang="en-US" sz="900" dirty="0"/>
+          </a:p>
+        </p:txBody>
+      </p:sp>
+      <p:sp>
+        <p:nvSpPr>
+          <p:cNvPr id="51" name="Shape 49"/>
+          <p:cNvSpPr/>
+          <p:nvPr/>
+        </p:nvSpPr>
+        <p:spPr>
+          <a:xfrm>
+            <a:off x="6870192" y="4169664"/>
+            <a:ext cx="685800" cy="475488"/>
+          </a:xfrm>
+          <a:prstGeom prst="rect">
+            <a:avLst>
+              <a:gd name="adj" fmla="val 7692"/>
+            </a:avLst>
+          </a:prstGeom>
+          <a:solidFill>
+            <a:srgbClr val="FFFFFF"/>
+          </a:solidFill>
+          <a:ln w="12700">
+            <a:solidFill>
+              <a:srgbClr val="DB2777"/>
+            </a:solidFill>
+            <a:prstDash val="solid"/>
+          </a:ln>
+        </p:spPr>
+      </p:sp>
+      <p:sp>
+        <p:nvSpPr>
+          <p:cNvPr id="52" name="Text 50"/>
+          <p:cNvSpPr/>
+          <p:nvPr/>
+        </p:nvSpPr>
+        <p:spPr>
+          <a:xfrm>
+            <a:off x="6870192" y="4169664"/>
+            <a:ext cx="685800" cy="475488"/>
+          </a:xfrm>
+          <a:prstGeom prst="rect">
+            <a:avLst/>
+          </a:prstGeom>
+          <a:noFill/>
+          <a:ln/>
+        </p:spPr>
+        <p:txBody>
+          <a:bodyPr wrap="square" lIns="0" tIns="0" rIns="0" bIns="0" rtlCol="0" anchor="ctr"/>
+          <a:lstStyle/>
+          <a:p>
+            <a:pPr algn="ctr" indent="0" marL="0">
+              <a:buNone/>
+            </a:pPr>
+            <a:r>
+              <a:rPr lang="en-US" sz="900" b="1" dirty="0">
+                <a:solidFill>
+                  <a:srgbClr val="9D174D"/>
+                </a:solidFill>
+                <a:latin typeface="Trebuchet MS" pitchFamily="34" charset="0"/>
+                <a:ea typeface="Trebuchet MS" pitchFamily="34" charset="-122"/>
+                <a:cs typeface="Trebuchet MS" pitchFamily="34" charset="-120"/>
+              </a:rPr>
+              <a:t>u</a:t>
+            </a:r>
+            <a:endParaRPr lang="en-US" sz="900" dirty="0"/>
+          </a:p>
+        </p:txBody>
+      </p:sp>
+      <p:sp>
+        <p:nvSpPr>
+          <p:cNvPr id="53" name="Shape 51"/>
+          <p:cNvSpPr/>
+          <p:nvPr/>
+        </p:nvSpPr>
+        <p:spPr>
+          <a:xfrm>
+            <a:off x="7677912" y="4169664"/>
+            <a:ext cx="685800" cy="475488"/>
+          </a:xfrm>
+          <a:prstGeom prst="rect">
+            <a:avLst>
+              <a:gd name="adj" fmla="val 7692"/>
+            </a:avLst>
+          </a:prstGeom>
+          <a:solidFill>
+            <a:srgbClr val="FFFFFF"/>
+          </a:solidFill>
+          <a:ln w="12700">
+            <a:solidFill>
+              <a:srgbClr val="DB2777"/>
+            </a:solidFill>
+            <a:prstDash val="solid"/>
+          </a:ln>
+        </p:spPr>
+      </p:sp>
+      <p:sp>
+        <p:nvSpPr>
+          <p:cNvPr id="54" name="Text 52"/>
+          <p:cNvSpPr/>
+          <p:nvPr/>
+        </p:nvSpPr>
+        <p:spPr>
+          <a:xfrm>
+            <a:off x="7677912" y="4169664"/>
+            <a:ext cx="685800" cy="475488"/>
+          </a:xfrm>
+          <a:prstGeom prst="rect">
+            <a:avLst/>
+          </a:prstGeom>
+          <a:noFill/>
+          <a:ln/>
+        </p:spPr>
+        <p:txBody>
+          <a:bodyPr wrap="square" lIns="0" tIns="0" rIns="0" bIns="0" rtlCol="0" anchor="ctr"/>
+          <a:lstStyle/>
+          <a:p>
+            <a:pPr algn="ctr" indent="0" marL="0">
+              <a:buNone/>
+            </a:pPr>
+            <a:r>
+              <a:rPr lang="en-US" sz="900" b="1" dirty="0">
+                <a:solidFill>
+                  <a:srgbClr val="9D174D"/>
+                </a:solidFill>
+                <a:latin typeface="Trebuchet MS" pitchFamily="34" charset="0"/>
+                <a:ea typeface="Trebuchet MS" pitchFamily="34" charset="-122"/>
+                <a:cs typeface="Trebuchet MS" pitchFamily="34" charset="-120"/>
+              </a:rPr>
+              <a:t>re</a:t>
             </a:r>
             <a:endParaRPr lang="en-US" sz="900" dirty="0"/>
           </a:p>
@@ -32142,7 +32820,7 @@
                 <a:ea typeface="Calibri" pitchFamily="34" charset="-122"/>
                 <a:cs typeface="Calibri" pitchFamily="34" charset="-120"/>
               </a:rPr>
-              <a:t>Word Labs  •  wordlabs.app  •  Prefix: 'ad-' = to, towards, near</a:t>
+              <a:t>Word Labs  •  wordlabs.app  •  Prefix: 'ad-' = to, toward, near</a:t>
             </a:r>
             <a:endParaRPr lang="en-US" sz="800" dirty="0"/>
           </a:p>
@@ -33311,7 +33989,7 @@
                 <a:ea typeface="Calibri" pitchFamily="34" charset="-122"/>
                 <a:cs typeface="Calibri" pitchFamily="34" charset="-120"/>
               </a:rPr>
-              <a:t>Word Labs  •  wordlabs.app  •  Prefix: 'ad-' = to, towards, near</a:t>
+              <a:t>Word Labs  •  wordlabs.app  •  Prefix: 'ad-' = to, toward, near</a:t>
             </a:r>
             <a:endParaRPr lang="en-US" sz="800" dirty="0"/>
           </a:p>
@@ -33676,7 +34354,7 @@
                 <a:ea typeface="Trebuchet MS" pitchFamily="34" charset="-122"/>
                 <a:cs typeface="Trebuchet MS" pitchFamily="34" charset="-120"/>
               </a:rPr>
-              <a:t>vent</a:t>
+              <a:t>just</a:t>
             </a:r>
             <a:endParaRPr lang="en-US" sz="1300" dirty="0"/>
           </a:p>
@@ -33829,7 +34507,7 @@
                 <a:ea typeface="Trebuchet MS" pitchFamily="34" charset="-122"/>
                 <a:cs typeface="Trebuchet MS" pitchFamily="34" charset="-120"/>
               </a:rPr>
-              <a:t>just</a:t>
+              <a:t>vent</a:t>
             </a:r>
             <a:endParaRPr lang="en-US" sz="1300" dirty="0"/>
           </a:p>
@@ -34135,7 +34813,7 @@
                 <a:ea typeface="Trebuchet MS" pitchFamily="34" charset="-122"/>
                 <a:cs typeface="Trebuchet MS" pitchFamily="34" charset="-120"/>
               </a:rPr>
-              <a:t>vance</a:t>
+              <a:t>apt</a:t>
             </a:r>
             <a:endParaRPr lang="en-US" sz="1300" dirty="0"/>
           </a:p>
@@ -34288,7 +34966,7 @@
                 <a:ea typeface="Trebuchet MS" pitchFamily="34" charset="-122"/>
                 <a:cs typeface="Trebuchet MS" pitchFamily="34" charset="-120"/>
               </a:rPr>
-              <a:t>apt</a:t>
+              <a:t>vance</a:t>
             </a:r>
             <a:endParaRPr lang="en-US" sz="1300" dirty="0"/>
           </a:p>
@@ -34457,7 +35135,7 @@
                 <a:ea typeface="Trebuchet MS" pitchFamily="34" charset="-122"/>
                 <a:cs typeface="Trebuchet MS" pitchFamily="34" charset="-120"/>
               </a:rPr>
-              <a:t>advance</a:t>
+              <a:t>adjust</a:t>
             </a:r>
             <a:endParaRPr lang="en-US" sz="1200" dirty="0"/>
           </a:p>
@@ -34523,7 +35201,7 @@
                 <a:ea typeface="Trebuchet MS" pitchFamily="34" charset="-122"/>
                 <a:cs typeface="Trebuchet MS" pitchFamily="34" charset="-120"/>
               </a:rPr>
-              <a:t>adjust</a:t>
+              <a:t>advance</a:t>
             </a:r>
             <a:endParaRPr lang="en-US" sz="1200" dirty="0"/>
           </a:p>
@@ -34853,7 +35531,7 @@
                 <a:ea typeface="Trebuchet MS" pitchFamily="34" charset="-122"/>
                 <a:cs typeface="Trebuchet MS" pitchFamily="34" charset="-120"/>
               </a:rPr>
-              <a:t>advise</a:t>
+              <a:t>admit</a:t>
             </a:r>
             <a:endParaRPr lang="en-US" sz="1200" dirty="0"/>
           </a:p>
@@ -34919,7 +35597,7 @@
                 <a:ea typeface="Trebuchet MS" pitchFamily="34" charset="-122"/>
                 <a:cs typeface="Trebuchet MS" pitchFamily="34" charset="-120"/>
               </a:rPr>
-              <a:t>admire</a:t>
+              <a:t>adore</a:t>
             </a:r>
             <a:endParaRPr lang="en-US" sz="1200" dirty="0"/>
           </a:p>
@@ -35211,7 +35889,7 @@
                 <a:ea typeface="Calibri" pitchFamily="34" charset="-122"/>
                 <a:cs typeface="Calibri" pitchFamily="34" charset="-120"/>
               </a:rPr>
-              <a:t>Word Labs  •  wordlabs.app  •  Prefix: 'ad-' = to, towards, near</a:t>
+              <a:t>Word Labs  •  wordlabs.app  •  Prefix: 'ad-' = to, toward, near</a:t>
             </a:r>
             <a:endParaRPr lang="en-US" sz="800" dirty="0"/>
           </a:p>
@@ -35375,7 +36053,7 @@
                 <a:ea typeface="Calibri" pitchFamily="34" charset="-122"/>
                 <a:cs typeface="Calibri" pitchFamily="34" charset="-120"/>
               </a:rPr>
-              <a:t>A meaningful word part added to the beginning of a root to change its meaning. The prefix 'ad-' means 'to, towards, near'.</a:t>
+              <a:t>A meaningful word part added to the beginning of a root to change its meaning. The prefix 'ad-' means 'to, toward, near'.</a:t>
             </a:r>
             <a:endParaRPr lang="en-US" sz="1350" dirty="0"/>
           </a:p>
@@ -35539,7 +36217,7 @@
                 <a:ea typeface="Calibri" pitchFamily="34" charset="-122"/>
                 <a:cs typeface="Calibri" pitchFamily="34" charset="-120"/>
               </a:rPr>
-              <a:t>The core part of a word carrying its basic meaning. In 'advance', the root is the part after the prefix 'ad-'.</a:t>
+              <a:t>The core part of a word carrying its basic meaning. In 'adjust', the root is the part after the prefix 'ad-'.</a:t>
             </a:r>
             <a:endParaRPr lang="en-US" sz="1350" dirty="0"/>
           </a:p>
@@ -35995,7 +36673,7 @@
                 <a:ea typeface="Calibri" pitchFamily="34" charset="-122"/>
                 <a:cs typeface="Calibri" pitchFamily="34" charset="-120"/>
               </a:rPr>
-              <a:t>Word Labs  •  wordlabs.app  •  Prefix: 'ad-' = to, towards, near</a:t>
+              <a:t>Word Labs  •  wordlabs.app  •  Prefix: 'ad-' = to, toward, near</a:t>
             </a:r>
             <a:endParaRPr lang="en-US" sz="800" dirty="0"/>
           </a:p>
@@ -36107,7 +36785,7 @@
                 <a:ea typeface="Calibri" pitchFamily="34" charset="-122"/>
                 <a:cs typeface="Calibri" pitchFamily="34" charset="-120"/>
               </a:rPr>
-              <a:t>1.  The prefix 'ad-' comes from Latin and means 'to' or 'towards'.</a:t>
+              <a:t>1.  Adding 'ad-' to a base word often gives the meaning of moving toward something.</a:t>
             </a:r>
             <a:endParaRPr lang="en-US" sz="1300" dirty="0"/>
           </a:p>
@@ -36246,7 +36924,7 @@
                 <a:ea typeface="Calibri" pitchFamily="34" charset="-122"/>
                 <a:cs typeface="Calibri" pitchFamily="34" charset="-120"/>
               </a:rPr>
-              <a:t>2.  The prefix 'ad-' means 'against' or 'away from'.</a:t>
+              <a:t>2.  The prefix 'ad-' means 'away from' or 'opposite of'.</a:t>
             </a:r>
             <a:endParaRPr lang="en-US" sz="1300" dirty="0"/>
           </a:p>
@@ -36385,7 +37063,7 @@
                 <a:ea typeface="Calibri" pitchFamily="34" charset="-122"/>
                 <a:cs typeface="Calibri" pitchFamily="34" charset="-120"/>
               </a:rPr>
-              <a:t>3.  The word 'advance' contains the prefix 'ad-', meaning movement towards something.</a:t>
+              <a:t>3.  The prefix 'ad-' always stays spelled exactly as 'ad-' in every word.</a:t>
             </a:r>
             <a:endParaRPr lang="en-US" sz="1300" dirty="0"/>
           </a:p>
@@ -36408,11 +37086,11 @@
             </a:avLst>
           </a:prstGeom>
           <a:solidFill>
-            <a:srgbClr val="DCFCE7"/>
-          </a:solidFill>
-          <a:ln w="12700">
-            <a:solidFill>
-              <a:srgbClr val="16A34A"/>
+            <a:srgbClr val="FEE2E2"/>
+          </a:solidFill>
+          <a:ln w="12700">
+            <a:solidFill>
+              <a:srgbClr val="DC2626"/>
             </a:solidFill>
             <a:prstDash val="solid"/>
           </a:ln>
@@ -36445,13 +37123,13 @@
             <a:r>
               <a:rPr lang="en-US" sz="1100" b="1" dirty="0">
                 <a:solidFill>
-                  <a:srgbClr val="16A34A"/>
+                  <a:srgbClr val="DC2626"/>
                 </a:solidFill>
                 <a:latin typeface="Trebuchet MS" pitchFamily="34" charset="0"/>
                 <a:ea typeface="Trebuchet MS" pitchFamily="34" charset="-122"/>
                 <a:cs typeface="Trebuchet MS" pitchFamily="34" charset="-120"/>
               </a:rPr>
-              <a:t>TRUE</a:t>
+              <a:t>FALSE</a:t>
             </a:r>
             <a:endParaRPr lang="en-US" sz="1100" dirty="0"/>
           </a:p>
@@ -36524,7 +37202,7 @@
                 <a:ea typeface="Calibri" pitchFamily="34" charset="-122"/>
                 <a:cs typeface="Calibri" pitchFamily="34" charset="-120"/>
               </a:rPr>
-              <a:t>4.  The prefix 'ad-' sometimes changes its spelling to match the next letter, like 'ac-' before 'c'.</a:t>
+              <a:t>4.  The prefix 'ad-' comes from Latin.</a:t>
             </a:r>
             <a:endParaRPr lang="en-US" sz="1300" dirty="0"/>
           </a:p>
@@ -36663,7 +37341,7 @@
                 <a:ea typeface="Calibri" pitchFamily="34" charset="-122"/>
                 <a:cs typeface="Calibri" pitchFamily="34" charset="-120"/>
               </a:rPr>
-              <a:t>5.  Every word that starts with the letters 'ad' contains the prefix 'ad-'.</a:t>
+              <a:t>5.  The word 'advance' contains the prefix 'ad-', meaning toward.</a:t>
             </a:r>
             <a:endParaRPr lang="en-US" sz="1300" dirty="0"/>
           </a:p>
@@ -36686,11 +37364,11 @@
             </a:avLst>
           </a:prstGeom>
           <a:solidFill>
-            <a:srgbClr val="FEE2E2"/>
-          </a:solidFill>
-          <a:ln w="12700">
-            <a:solidFill>
-              <a:srgbClr val="DC2626"/>
+            <a:srgbClr val="DCFCE7"/>
+          </a:solidFill>
+          <a:ln w="12700">
+            <a:solidFill>
+              <a:srgbClr val="16A34A"/>
             </a:solidFill>
             <a:prstDash val="solid"/>
           </a:ln>
@@ -36723,13 +37401,13 @@
             <a:r>
               <a:rPr lang="en-US" sz="1100" b="1" dirty="0">
                 <a:solidFill>
-                  <a:srgbClr val="DC2626"/>
+                  <a:srgbClr val="16A34A"/>
                 </a:solidFill>
                 <a:latin typeface="Trebuchet MS" pitchFamily="34" charset="0"/>
                 <a:ea typeface="Trebuchet MS" pitchFamily="34" charset="-122"/>
                 <a:cs typeface="Trebuchet MS" pitchFamily="34" charset="-120"/>
               </a:rPr>
-              <a:t>FALSE</a:t>
+              <a:t>TRUE</a:t>
             </a:r>
             <a:endParaRPr lang="en-US" sz="1100" dirty="0"/>
           </a:p>
@@ -37021,7 +37699,7 @@
                 <a:ea typeface="Calibri" pitchFamily="34" charset="-122"/>
                 <a:cs typeface="Calibri" pitchFamily="34" charset="-120"/>
               </a:rPr>
-              <a:t>Word Labs  •  wordlabs.app  •  Prefix: 'ad-' = to, towards, near</a:t>
+              <a:t>Word Labs  •  wordlabs.app  •  Prefix: 'ad-' = to, toward, near</a:t>
             </a:r>
             <a:endParaRPr lang="en-US" sz="800" dirty="0"/>
           </a:p>
@@ -37158,7 +37836,7 @@
                 <a:ea typeface="Trebuchet MS" pitchFamily="34" charset="-122"/>
                 <a:cs typeface="Trebuchet MS" pitchFamily="34" charset="-120"/>
               </a:rPr>
-              <a:t>to, towards, near</a:t>
+              <a:t>to, toward, near</a:t>
             </a:r>
             <a:endParaRPr lang="en-US" sz="2000" dirty="0"/>
           </a:p>
@@ -37302,7 +37980,7 @@
                 <a:ea typeface="Trebuchet MS" pitchFamily="34" charset="-122"/>
                 <a:cs typeface="Trebuchet MS" pitchFamily="34" charset="-120"/>
               </a:rPr>
-              <a:t>advance</a:t>
+              <a:t>adjust</a:t>
             </a:r>
             <a:endParaRPr lang="en-US" sz="1300" dirty="0"/>
           </a:p>
@@ -37368,7 +38046,7 @@
                 <a:ea typeface="Trebuchet MS" pitchFamily="34" charset="-122"/>
                 <a:cs typeface="Trebuchet MS" pitchFamily="34" charset="-120"/>
               </a:rPr>
-              <a:t>adjust</a:t>
+              <a:t>advance</a:t>
             </a:r>
             <a:endParaRPr lang="en-US" sz="1300" dirty="0"/>
           </a:p>
@@ -37698,7 +38376,7 @@
                 <a:ea typeface="Trebuchet MS" pitchFamily="34" charset="-122"/>
                 <a:cs typeface="Trebuchet MS" pitchFamily="34" charset="-120"/>
               </a:rPr>
-              <a:t>advise</a:t>
+              <a:t>admit</a:t>
             </a:r>
             <a:endParaRPr lang="en-US" sz="1300" dirty="0"/>
           </a:p>
@@ -37990,7 +38668,7 @@
                 <a:ea typeface="Calibri" pitchFamily="34" charset="-122"/>
                 <a:cs typeface="Calibri" pitchFamily="34" charset="-120"/>
               </a:rPr>
-              <a:t>Word Labs  •  wordlabs.app  •  Prefix: 'ad-' = to, towards, near</a:t>
+              <a:t>Word Labs  •  wordlabs.app  •  Prefix: 'ad-' = to, toward, near</a:t>
             </a:r>
             <a:endParaRPr lang="en-US" sz="800" dirty="0"/>
           </a:p>
@@ -38355,7 +39033,7 @@
                 <a:ea typeface="Trebuchet MS" pitchFamily="34" charset="-122"/>
                 <a:cs typeface="Trebuchet MS" pitchFamily="34" charset="-120"/>
               </a:rPr>
-              <a:t>vent</a:t>
+              <a:t>just</a:t>
             </a:r>
             <a:endParaRPr lang="en-US" sz="1300" dirty="0"/>
           </a:p>
@@ -38508,7 +39186,7 @@
                 <a:ea typeface="Trebuchet MS" pitchFamily="34" charset="-122"/>
                 <a:cs typeface="Trebuchet MS" pitchFamily="34" charset="-120"/>
               </a:rPr>
-              <a:t>just</a:t>
+              <a:t>vent</a:t>
             </a:r>
             <a:endParaRPr lang="en-US" sz="1300" dirty="0"/>
           </a:p>
@@ -38814,7 +39492,7 @@
                 <a:ea typeface="Trebuchet MS" pitchFamily="34" charset="-122"/>
                 <a:cs typeface="Trebuchet MS" pitchFamily="34" charset="-120"/>
               </a:rPr>
-              <a:t>vance</a:t>
+              <a:t>apt</a:t>
             </a:r>
             <a:endParaRPr lang="en-US" sz="1300" dirty="0"/>
           </a:p>
@@ -38967,7 +39645,7 @@
                 <a:ea typeface="Trebuchet MS" pitchFamily="34" charset="-122"/>
                 <a:cs typeface="Trebuchet MS" pitchFamily="34" charset="-120"/>
               </a:rPr>
-              <a:t>apt</a:t>
+              <a:t>vance</a:t>
             </a:r>
             <a:endParaRPr lang="en-US" sz="1300" dirty="0"/>
           </a:p>
@@ -39255,7 +39933,7 @@
                 <a:ea typeface="Trebuchet MS" pitchFamily="34" charset="-122"/>
                 <a:cs typeface="Trebuchet MS" pitchFamily="34" charset="-120"/>
               </a:rPr>
-              <a:t>vent</a:t>
+              <a:t>just</a:t>
             </a:r>
             <a:endParaRPr lang="en-US" sz="1300" dirty="0"/>
           </a:p>
@@ -39472,7 +40150,7 @@
                 <a:ea typeface="Trebuchet MS" pitchFamily="34" charset="-122"/>
                 <a:cs typeface="Trebuchet MS" pitchFamily="34" charset="-120"/>
               </a:rPr>
-              <a:t>advance</a:t>
+              <a:t>adjust</a:t>
             </a:r>
             <a:endParaRPr lang="en-US" sz="1400" dirty="0"/>
           </a:p>
@@ -39764,7 +40442,7 @@
                 <a:ea typeface="Calibri" pitchFamily="34" charset="-122"/>
                 <a:cs typeface="Calibri" pitchFamily="34" charset="-120"/>
               </a:rPr>
-              <a:t>Word Labs  •  wordlabs.app  •  Prefix: 'ad-' = to, towards, near</a:t>
+              <a:t>Word Labs  •  wordlabs.app  •  Prefix: 'ad-' = to, toward, near</a:t>
             </a:r>
             <a:endParaRPr lang="en-US" sz="800" dirty="0"/>
           </a:p>
@@ -39876,7 +40554,7 @@
                 <a:ea typeface="Trebuchet MS" pitchFamily="34" charset="-122"/>
                 <a:cs typeface="Trebuchet MS" pitchFamily="34" charset="-120"/>
               </a:rPr>
-              <a:t>advance</a:t>
+              <a:t>adjust</a:t>
             </a:r>
             <a:endParaRPr lang="en-US" sz="1200" dirty="0"/>
           </a:p>
@@ -39942,7 +40620,7 @@
                 <a:ea typeface="Calibri" pitchFamily="34" charset="-122"/>
                 <a:cs typeface="Calibri" pitchFamily="34" charset="-120"/>
               </a:rPr>
-              <a:t>An exciting journey or experience that involves some risk or challenge.</a:t>
+              <a:t>An exciting or unusual experience, often involving some risk or the unknown.</a:t>
             </a:r>
             <a:endParaRPr lang="en-US" sz="1200" dirty="0"/>
           </a:p>
@@ -40015,7 +40693,7 @@
                 <a:ea typeface="Trebuchet MS" pitchFamily="34" charset="-122"/>
                 <a:cs typeface="Trebuchet MS" pitchFamily="34" charset="-120"/>
               </a:rPr>
-              <a:t>adjust</a:t>
+              <a:t>advance</a:t>
             </a:r>
             <a:endParaRPr lang="en-US" sz="1200" dirty="0"/>
           </a:p>
@@ -40081,7 +40759,7 @@
                 <a:ea typeface="Calibri" pitchFamily="34" charset="-122"/>
                 <a:cs typeface="Calibri" pitchFamily="34" charset="-120"/>
               </a:rPr>
-              <a:t>To take something or someone as your own, like adopting a pet or an idea.</a:t>
+              <a:t>To take something as your own, like a new idea, habit, or a child into your family.</a:t>
             </a:r>
             <a:endParaRPr lang="en-US" sz="1200" dirty="0"/>
           </a:p>
@@ -40220,7 +40898,7 @@
                 <a:ea typeface="Calibri" pitchFamily="34" charset="-122"/>
                 <a:cs typeface="Calibri" pitchFamily="34" charset="-120"/>
               </a:rPr>
-              <a:t>To tell lots of people about something, like a product or event, to get their attention.</a:t>
+              <a:t>To tell people about something, like a product or event, to get their attention.</a:t>
             </a:r>
             <a:endParaRPr lang="en-US" sz="1200" dirty="0"/>
           </a:p>
@@ -40359,7 +41037,7 @@
                 <a:ea typeface="Calibri" pitchFamily="34" charset="-122"/>
                 <a:cs typeface="Calibri" pitchFamily="34" charset="-120"/>
               </a:rPr>
-              <a:t>To look at something or someone with great respect and enjoyment.</a:t>
+              <a:t>To look at something or someone with great respect and pleasure.</a:t>
             </a:r>
             <a:endParaRPr lang="en-US" sz="1200" dirty="0"/>
           </a:p>
@@ -40498,7 +41176,7 @@
                 <a:ea typeface="Calibri" pitchFamily="34" charset="-122"/>
                 <a:cs typeface="Calibri" pitchFamily="34" charset="-120"/>
               </a:rPr>
-              <a:t>To give someone helpful suggestions or recommendations about what to do.</a:t>
+              <a:t>To say that something is true, or to let someone enter a place.</a:t>
             </a:r>
             <a:endParaRPr lang="en-US" sz="1200" dirty="0"/>
           </a:p>
@@ -40637,7 +41315,7 @@
                 <a:ea typeface="Calibri" pitchFamily="34" charset="-122"/>
                 <a:cs typeface="Calibri" pitchFamily="34" charset="-120"/>
               </a:rPr>
-              <a:t>To move forward or make progress towards something.</a:t>
+              <a:t>To change something slightly so it works better or fits properly.</a:t>
             </a:r>
             <a:endParaRPr lang="en-US" sz="1200" dirty="0"/>
           </a:p>
@@ -40710,7 +41388,7 @@
                 <a:ea typeface="Trebuchet MS" pitchFamily="34" charset="-122"/>
                 <a:cs typeface="Trebuchet MS" pitchFamily="34" charset="-120"/>
               </a:rPr>
-              <a:t>advise</a:t>
+              <a:t>admit</a:t>
             </a:r>
             <a:endParaRPr lang="en-US" sz="1200" dirty="0"/>
           </a:p>
@@ -40776,7 +41454,7 @@
                 <a:ea typeface="Calibri" pitchFamily="34" charset="-122"/>
                 <a:cs typeface="Calibri" pitchFamily="34" charset="-120"/>
               </a:rPr>
-              <a:t>To make a small change so that something fits or works better.</a:t>
+              <a:t>To move forward or make progress toward something.</a:t>
             </a:r>
             <a:endParaRPr lang="en-US" sz="1200" dirty="0"/>
           </a:p>
@@ -41068,7 +41746,7 @@
                 <a:ea typeface="Calibri" pitchFamily="34" charset="-122"/>
                 <a:cs typeface="Calibri" pitchFamily="34" charset="-120"/>
               </a:rPr>
-              <a:t>Word Labs  •  wordlabs.app  •  Prefix: 'ad-' = to, towards, near</a:t>
+              <a:t>Word Labs  •  wordlabs.app  •  Prefix: 'ad-' = to, toward, near</a:t>
             </a:r>
             <a:endParaRPr lang="en-US" sz="800" dirty="0"/>
           </a:p>
@@ -41271,7 +41949,7 @@
                 <a:ea typeface="Calibri" pitchFamily="34" charset="-122"/>
                 <a:cs typeface="Calibri" pitchFamily="34" charset="-120"/>
               </a:rPr>
-              <a:t>She decided to adjust the straps on her backpack before the long hike.</a:t>
+              <a:t>The explorer set off on a thrilling adventure through the rainforest.</a:t>
             </a:r>
             <a:endParaRPr lang="en-US" sz="1500" dirty="0"/>
           </a:p>
@@ -41435,7 +42113,7 @@
                 <a:ea typeface="Calibri" pitchFamily="34" charset="-122"/>
                 <a:cs typeface="Calibri" pitchFamily="34" charset="-120"/>
               </a:rPr>
-              <a:t>The class gathered around to admire the colourful mural painted on the school wall.</a:t>
+              <a:t>She had to adjust the straps on her backpack before the long hike.</a:t>
             </a:r>
             <a:endParaRPr lang="en-US" sz="1500" dirty="0"/>
           </a:p>
@@ -41599,7 +42277,7 @@
                 <a:ea typeface="Calibri" pitchFamily="34" charset="-122"/>
                 <a:cs typeface="Calibri" pitchFamily="34" charset="-120"/>
               </a:rPr>
-              <a:t>Our team made great advances in the science project by working together after school.</a:t>
+              <a:t>The students were asked to admire the artwork displayed in the school hall.</a:t>
             </a:r>
             <a:endParaRPr lang="en-US" sz="1500" dirty="0"/>
           </a:p>
